--- a/dev/frontogenesis/deck/Frontogenesis_M1_Acceptance.pptx
+++ b/dev/frontogenesis/deck/Frontogenesis_M1_Acceptance.pptx
@@ -20,6 +20,10 @@
     <p:sldId id="268" r:id="rId19"/>
     <p:sldId id="269" r:id="rId20"/>
     <p:sldId id="270" r:id="rId21"/>
+    <p:sldId id="271" r:id="rId22"/>
+    <p:sldId id="272" r:id="rId23"/>
+    <p:sldId id="273" r:id="rId24"/>
+    <p:sldId id="274" r:id="rId25"/>
   </p:sldIdLst>
   <p:sldSz cx="12191695" cy="6858000" type="screen4x3"/>
   <p:notesSz cx="6858000" cy="9144000"/>
@@ -3652,7 +3656,7 @@
                 </a:solidFill>
                 <a:latin typeface="Calibri"/>
               </a:rPr>
-              <a:t>TASK 7a  ·  CRITERION 6</a:t>
+              <a:t>TASK 6  ·  THE HARD GATE, CRITERION 3</a:t>
             </a:r>
           </a:p>
         </p:txBody>
@@ -3694,7 +3698,7 @@
                 </a:solidFill>
                 <a:latin typeface="Cambria"/>
               </a:rPr>
-              <a:t>test_nan_finding.py</a:t>
+              <a:t>Gate V3 — the discrete null</a:t>
             </a:r>
           </a:p>
         </p:txBody>
@@ -3736,57 +3740,35 @@
                 </a:solidFill>
                 <a:latin typeface="Calibri"/>
               </a:rPr>
-              <a:t>fronts_from_gradb2 under config D on NaN land: 14 tests, 11 pass, 3 strict xfails</a:t>
-            </a:r>
-          </a:p>
-        </p:txBody>
-      </p:sp>
-      <p:sp>
-        <p:nvSpPr>
-          <p:cNvPr id="6" name="Rounded Rectangle 5"/>
-          <p:cNvSpPr/>
-          <p:nvPr/>
-        </p:nvSpPr>
+              <a:t>First attempt FAIL 0.950 / 0.758 → PASS 1.004 [0.995, 1.017] / 0.981 [0.970, 0.994]</a:t>
+            </a:r>
+          </a:p>
+        </p:txBody>
+      </p:sp>
+      <p:pic>
+        <p:nvPicPr>
+          <p:cNvPr id="6" name="Picture 5" descr="m1_crop_V3d.png"/>
+          <p:cNvPicPr>
+            <a:picLocks noChangeAspect="1"/>
+          </p:cNvPicPr>
+          <p:nvPr/>
+        </p:nvPicPr>
+        <p:blipFill>
+          <a:blip r:embed="rId2"/>
+          <a:stretch>
+            <a:fillRect/>
+          </a:stretch>
+        </p:blipFill>
         <p:spPr>
           <a:xfrm>
             <a:off x="777240" y="1737360"/>
-            <a:ext cx="5212080" cy="4572000"/>
-          </a:xfrm>
-          <a:prstGeom prst="roundRect">
-            <a:avLst>
-              <a:gd name="adj" fmla="val 7000"/>
-            </a:avLst>
-          </a:prstGeom>
-          <a:solidFill>
-            <a:srgbClr val="E7EFF3"/>
-          </a:solidFill>
-          <a:ln>
-            <a:noFill/>
-          </a:ln>
-          <a:effectLst/>
-        </p:spPr>
-        <p:style>
-          <a:lnRef idx="1">
-            <a:schemeClr val="accent1"/>
-          </a:lnRef>
-          <a:fillRef idx="3">
-            <a:schemeClr val="accent1"/>
-          </a:fillRef>
-          <a:effectRef idx="2">
-            <a:schemeClr val="accent1"/>
-          </a:effectRef>
-          <a:fontRef idx="minor">
-            <a:schemeClr val="lt1"/>
-          </a:fontRef>
-        </p:style>
-        <p:txBody>
-          <a:bodyPr rtlCol="0" anchor="ctr"/>
-          <a:lstStyle/>
-          <a:p>
-            <a:pPr algn="ctr"/>
-          </a:p>
-        </p:txBody>
-      </p:sp>
+            <a:ext cx="4114800" cy="3851031"/>
+          </a:xfrm>
+          <a:prstGeom prst="rect">
+            <a:avLst/>
+          </a:prstGeom>
+        </p:spPr>
+      </p:pic>
       <p:sp>
         <p:nvSpPr>
           <p:cNvPr id="7" name="TextBox 6"/>
@@ -3795,8 +3777,8 @@
         </p:nvSpPr>
         <p:spPr>
           <a:xfrm>
-            <a:off x="1051560" y="1920240"/>
-            <a:ext cx="4663440" cy="365760"/>
+            <a:off x="777240" y="6035040"/>
+            <a:ext cx="4114800" cy="457200"/>
           </a:xfrm>
           <a:prstGeom prst="rect">
             <a:avLst/>
@@ -3818,27 +3800,51 @@
               </a:spcAft>
             </a:pPr>
             <a:r>
-              <a:rPr sz="2000" b="1" i="0">
-                <a:solidFill>
-                  <a:srgbClr val="2C6E49"/>
-                </a:solidFill>
-                <a:latin typeface="Calibri"/>
-              </a:rPr>
-              <a:t>WHAT WORKS</a:t>
-            </a:r>
-          </a:p>
-        </p:txBody>
-      </p:sp>
-      <p:sp>
-        <p:nvSpPr>
-          <p:cNvPr id="8" name="TextBox 7"/>
+              <a:rPr sz="2000" b="0" i="0">
+                <a:solidFill>
+                  <a:srgbClr val="62737F"/>
+                </a:solidFill>
+                <a:latin typeface="Courier New"/>
+              </a:rPr>
+              <a:t>V3 panel (d): LLC, n 26,293, corr 0.982</a:t>
+            </a:r>
+          </a:p>
+        </p:txBody>
+      </p:sp>
+      <p:pic>
+        <p:nvPicPr>
+          <p:cNvPr id="8" name="Picture 7" descr="m1_fig_v3_changes.png"/>
+          <p:cNvPicPr>
+            <a:picLocks noChangeAspect="1"/>
+          </p:cNvPicPr>
+          <p:nvPr/>
+        </p:nvPicPr>
+        <p:blipFill>
+          <a:blip r:embed="rId3"/>
+          <a:stretch>
+            <a:fillRect/>
+          </a:stretch>
+        </p:blipFill>
+        <p:spPr>
+          <a:xfrm>
+            <a:off x="5212080" y="1737360"/>
+            <a:ext cx="6309360" cy="2870439"/>
+          </a:xfrm>
+          <a:prstGeom prst="rect">
+            <a:avLst/>
+          </a:prstGeom>
+        </p:spPr>
+      </p:pic>
+      <p:sp>
+        <p:nvSpPr>
+          <p:cNvPr id="9" name="TextBox 8"/>
           <p:cNvSpPr txBox="1"/>
           <p:nvPr/>
         </p:nvSpPr>
         <p:spPr>
           <a:xfrm>
-            <a:off x="1051560" y="2377440"/>
-            <a:ext cx="4663440" cy="3840480"/>
+            <a:off x="5212080" y="4754880"/>
+            <a:ext cx="6217920" cy="1737360"/>
           </a:xfrm>
           <a:prstGeom prst="rect">
             <a:avLst/>
@@ -3853,10 +3859,10 @@
           <a:p>
             <a:pPr algn="l">
               <a:lnSpc>
-                <a:spcPct val="110000"/>
-              </a:lnSpc>
-              <a:spcAft>
-                <a:spcPts val="700"/>
+                <a:spcPct val="108000"/>
+              </a:lnSpc>
+              <a:spcAft>
+                <a:spcPts val="500"/>
               </a:spcAft>
             </a:pPr>
             <a:r>
@@ -3866,232 +3872,26 @@
                 </a:solidFill>
                 <a:latin typeface="Calibri"/>
               </a:rPr>
-              <a:t>•  A NaN land block: 0 front pixels on NaN; fronts ≥ 10 cells from the coast equal the land-free field pixel for pixel.</a:t>
-            </a:r>
-          </a:p>
-          <a:p>
-            <a:pPr algn="l">
-              <a:lnSpc>
-                <a:spcPct val="110000"/>
-              </a:lnSpc>
-              <a:spcAft>
-                <a:spcPts val="700"/>
+              <a:t>The chain-rule product fails on the grid by (2/3)(dx/ell)². The consistent F = −Σ (L_k b)[L_k, u·∇] b is now the default (form='discrete'); the departure velocity is cubic.</a:t>
+            </a:r>
+          </a:p>
+          <a:p>
+            <a:pPr algn="l">
+              <a:lnSpc>
+                <a:spcPct val="108000"/>
+              </a:lnSpc>
+              <a:spcAft>
+                <a:spcPts val="500"/>
               </a:spcAft>
             </a:pPr>
             <a:r>
               <a:rPr sz="2000" b="0" i="0">
                 <a:solidFill>
-                  <a:srgbClr val="1B2A33"/>
-                </a:solidFill>
-                <a:latin typeface="Calibri"/>
-              </a:rPr>
-              <a:t>•  Real hour 0: 11,836 front pixels in 7 s, 0 on NaN, 878 (7.4%) inside the halo.</a:t>
-            </a:r>
-          </a:p>
-          <a:p>
-            <a:pPr algn="l">
-              <a:lnSpc>
-                <a:spcPct val="110000"/>
-              </a:lnSpc>
-              <a:spcAft>
-                <a:spcPts val="700"/>
-              </a:spcAft>
-            </a:pPr>
-            <a:r>
-              <a:rPr sz="2000" b="0" i="0">
-                <a:solidFill>
-                  <a:srgbClr val="1B2A33"/>
-                </a:solidFill>
-                <a:latin typeface="Calibri"/>
-              </a:rPr>
-              <a:t>•  The three threshold modes agree bit for bit; no coastal bias in the window.</a:t>
-            </a:r>
-          </a:p>
-        </p:txBody>
-      </p:sp>
-      <p:sp>
-        <p:nvSpPr>
-          <p:cNvPr id="9" name="Rounded Rectangle 8"/>
-          <p:cNvSpPr/>
-          <p:nvPr/>
-        </p:nvSpPr>
-        <p:spPr>
-          <a:xfrm>
-            <a:off x="6172200" y="1737360"/>
-            <a:ext cx="5212080" cy="4572000"/>
-          </a:xfrm>
-          <a:prstGeom prst="roundRect">
-            <a:avLst>
-              <a:gd name="adj" fmla="val 7000"/>
-            </a:avLst>
-          </a:prstGeom>
-          <a:solidFill>
-            <a:srgbClr val="FAEFE4"/>
-          </a:solidFill>
-          <a:ln>
-            <a:noFill/>
-          </a:ln>
-          <a:effectLst/>
-        </p:spPr>
-        <p:style>
-          <a:lnRef idx="1">
-            <a:schemeClr val="accent1"/>
-          </a:lnRef>
-          <a:fillRef idx="3">
-            <a:schemeClr val="accent1"/>
-          </a:fillRef>
-          <a:effectRef idx="2">
-            <a:schemeClr val="accent1"/>
-          </a:effectRef>
-          <a:fontRef idx="minor">
-            <a:schemeClr val="lt1"/>
-          </a:fontRef>
-        </p:style>
-        <p:txBody>
-          <a:bodyPr rtlCol="0" anchor="ctr"/>
-          <a:lstStyle/>
-          <a:p>
-            <a:pPr algn="ctr"/>
-          </a:p>
-        </p:txBody>
-      </p:sp>
-      <p:sp>
-        <p:nvSpPr>
-          <p:cNvPr id="10" name="TextBox 9"/>
-          <p:cNvSpPr txBox="1"/>
-          <p:nvPr/>
-        </p:nvSpPr>
-        <p:spPr>
-          <a:xfrm>
-            <a:off x="6446520" y="1920240"/>
-            <a:ext cx="4663440" cy="365760"/>
-          </a:xfrm>
-          <a:prstGeom prst="rect">
-            <a:avLst/>
-          </a:prstGeom>
-          <a:noFill/>
-        </p:spPr>
-        <p:txBody>
-          <a:bodyPr wrap="square" lIns="0" rIns="0" tIns="0" bIns="0">
-            <a:spAutoFit/>
-          </a:bodyPr>
-          <a:lstStyle/>
-          <a:p>
-            <a:pPr algn="l">
-              <a:lnSpc>
-                <a:spcPct val="110000"/>
-              </a:lnSpc>
-              <a:spcAft>
-                <a:spcPts val="0"/>
-              </a:spcAft>
-            </a:pPr>
-            <a:r>
-              <a:rPr sz="2000" b="1" i="0">
-                <a:solidFill>
-                  <a:srgbClr val="A8501B"/>
-                </a:solidFill>
-                <a:latin typeface="Calibri"/>
-              </a:rPr>
-              <a:t>WHAT BREAKS  (xfail, strict)</a:t>
-            </a:r>
-          </a:p>
-        </p:txBody>
-      </p:sp>
-      <p:sp>
-        <p:nvSpPr>
-          <p:cNvPr id="11" name="TextBox 10"/>
-          <p:cNvSpPr txBox="1"/>
-          <p:nvPr/>
-        </p:nvSpPr>
-        <p:spPr>
-          <a:xfrm>
-            <a:off x="6446520" y="2377440"/>
-            <a:ext cx="4663440" cy="3840480"/>
-          </a:xfrm>
-          <a:prstGeom prst="rect">
-            <a:avLst/>
-          </a:prstGeom>
-          <a:noFill/>
-        </p:spPr>
-        <p:txBody>
-          <a:bodyPr wrap="square" lIns="0" rIns="0" tIns="0" bIns="0">
-            <a:spAutoFit/>
-          </a:bodyPr>
-          <a:lstStyle/>
-          <a:p>
-            <a:pPr algn="l">
-              <a:lnSpc>
-                <a:spcPct val="110000"/>
-              </a:lnSpc>
-              <a:spcAft>
-                <a:spcPts val="700"/>
-              </a:spcAft>
-            </a:pPr>
-            <a:r>
-              <a:rPr sz="2000" b="0" i="0">
-                <a:solidFill>
-                  <a:srgbClr val="1B2A33"/>
-                </a:solidFill>
-                <a:latin typeface="Calibri"/>
-              </a:rPr>
-              <a:t>•  thresh_mode 'pool' with the default n_workers=None → TypeError: config D does not run as written.</a:t>
-            </a:r>
-          </a:p>
-          <a:p>
-            <a:pPr algn="l">
-              <a:lnSpc>
-                <a:spcPct val="110000"/>
-              </a:lnSpc>
-              <a:spcAft>
-                <a:spcPts val="700"/>
-              </a:spcAft>
-            </a:pPr>
-            <a:r>
-              <a:rPr sz="2000" b="0" i="0">
-                <a:solidFill>
-                  <a:srgbClr val="1B2A33"/>
-                </a:solidFill>
-                <a:latin typeface="Calibri"/>
-              </a:rPr>
-              <a:t>•  remove_small_holes fills an enclosed NaN island: 6 front pixels on land.</a:t>
-            </a:r>
-          </a:p>
-          <a:p>
-            <a:pPr algn="l">
-              <a:lnSpc>
-                <a:spcPct val="110000"/>
-              </a:lnSpc>
-              <a:spcAft>
-                <a:spcPts val="700"/>
-              </a:spcAft>
-            </a:pPr>
-            <a:r>
-              <a:rPr sz="2000" b="0" i="0">
-                <a:solidFill>
-                  <a:srgbClr val="1B2A33"/>
-                </a:solidFill>
-                <a:latin typeface="Calibri"/>
-              </a:rPr>
-              <a:t>•  despur on an empty skeleton → ValueError in skan.</a:t>
-            </a:r>
-          </a:p>
-          <a:p>
-            <a:pPr algn="l">
-              <a:lnSpc>
-                <a:spcPct val="110000"/>
-              </a:lnSpc>
-              <a:spcAft>
-                <a:spcPts val="700"/>
-              </a:spcAft>
-            </a:pPr>
-            <a:r>
-              <a:rPr sz="2000" b="0" i="0">
-                <a:solidFill>
-                  <a:srgbClr val="1B2A33"/>
-                </a:solidFill>
-                <a:latin typeface="Calibri"/>
-              </a:rPr>
-              <a:t>•  M4 recipe: pass NaN as-is (never fill), explicit n_workers, despur off, then fronts &amp;= isfinite(gradb2).</a:t>
+                  <a:srgbClr val="62737F"/>
+                </a:solidFill>
+                <a:latin typeface="Calibri"/>
+              </a:rPr>
+              <a:t>Both sides of this null see the same centred velocity, so the 0.85x Jacobian attenuation cannot appear here. 70 tests, 0 skipped.</a:t>
             </a:r>
           </a:p>
         </p:txBody>
@@ -4195,7 +3995,7 @@
                 </a:solidFill>
                 <a:latin typeface="Calibri"/>
               </a:rPr>
-              <a:t>TASK 7  ·  THE AUDIT</a:t>
+              <a:t>TASK 6b  ·  M1-Q2, OPTION (a)</a:t>
             </a:r>
           </a:p>
         </p:txBody>
@@ -4237,7 +4037,7 @@
                 </a:solidFill>
                 <a:latin typeface="Cambria"/>
               </a:rPr>
-              <a:t>Decisions applied and the M1 audit</a:t>
+              <a:t>V3b — the finite-volume null</a:t>
             </a:r>
           </a:p>
         </p:txBody>
@@ -4279,21 +4079,45 @@
                 </a:solidFill>
                 <a:latin typeface="Calibri"/>
               </a:rPr>
-              <a:t>M1-Q1..Q8 written into the docs on 2026-09-30; every criterion audited; M1 closed</a:t>
-            </a:r>
-          </a:p>
-        </p:txBody>
-      </p:sp>
-      <p:sp>
-        <p:nvSpPr>
-          <p:cNvPr id="6" name="TextBox 5"/>
+              <a:t>A recorded bias, not a gate: 0.975 [0.954, 1.003] on the real hour, −0.006 ± 0.025 from V3's 0.981</a:t>
+            </a:r>
+          </a:p>
+        </p:txBody>
+      </p:sp>
+      <p:pic>
+        <p:nvPicPr>
+          <p:cNvPr id="6" name="Picture 5" descr="m1_crop_V3b_c.png"/>
+          <p:cNvPicPr>
+            <a:picLocks noChangeAspect="1"/>
+          </p:cNvPicPr>
+          <p:nvPr/>
+        </p:nvPicPr>
+        <p:blipFill>
+          <a:blip r:embed="rId2"/>
+          <a:stretch>
+            <a:fillRect/>
+          </a:stretch>
+        </p:blipFill>
+        <p:spPr>
+          <a:xfrm>
+            <a:off x="777240" y="1737360"/>
+            <a:ext cx="3931920" cy="4002133"/>
+          </a:xfrm>
+          <a:prstGeom prst="rect">
+            <a:avLst/>
+          </a:prstGeom>
+        </p:spPr>
+      </p:pic>
+      <p:sp>
+        <p:nvSpPr>
+          <p:cNvPr id="7" name="TextBox 6"/>
           <p:cNvSpPr txBox="1"/>
           <p:nvPr/>
         </p:nvSpPr>
         <p:spPr>
           <a:xfrm>
-            <a:off x="777240" y="1783080"/>
-            <a:ext cx="5120640" cy="365760"/>
+            <a:off x="777240" y="5806440"/>
+            <a:ext cx="4114800" cy="731520"/>
           </a:xfrm>
           <a:prstGeom prst="rect">
             <a:avLst/>
@@ -4315,27 +4139,51 @@
               </a:spcAft>
             </a:pPr>
             <a:r>
-              <a:rPr sz="2000" b="1" i="0">
-                <a:solidFill>
-                  <a:srgbClr val="065A82"/>
-                </a:solidFill>
-                <a:latin typeface="Calibri"/>
-              </a:rPr>
-              <a:t>APPLIED TO THE DOCS</a:t>
-            </a:r>
-          </a:p>
-        </p:txBody>
-      </p:sp>
-      <p:sp>
-        <p:nvSpPr>
-          <p:cNvPr id="7" name="TextBox 6"/>
+              <a:rPr sz="2000" b="0" i="0">
+                <a:solidFill>
+                  <a:srgbClr val="62737F"/>
+                </a:solidFill>
+                <a:latin typeface="Courier New"/>
+              </a:rPr>
+              <a:t>V3b panel (c): OS7MP-like truth, discrete F</a:t>
+            </a:r>
+          </a:p>
+        </p:txBody>
+      </p:sp>
+      <p:pic>
+        <p:nvPicPr>
+          <p:cNvPr id="8" name="Picture 7" descr="m1_fig_v3b.png"/>
+          <p:cNvPicPr>
+            <a:picLocks noChangeAspect="1"/>
+          </p:cNvPicPr>
+          <p:nvPr/>
+        </p:nvPicPr>
+        <p:blipFill>
+          <a:blip r:embed="rId3"/>
+          <a:stretch>
+            <a:fillRect/>
+          </a:stretch>
+        </p:blipFill>
+        <p:spPr>
+          <a:xfrm>
+            <a:off x="5120640" y="1737360"/>
+            <a:ext cx="6309360" cy="4198456"/>
+          </a:xfrm>
+          <a:prstGeom prst="rect">
+            <a:avLst/>
+          </a:prstGeom>
+        </p:spPr>
+      </p:pic>
+      <p:sp>
+        <p:nvSpPr>
+          <p:cNvPr id="9" name="TextBox 8"/>
           <p:cNvSpPr txBox="1"/>
           <p:nvPr/>
         </p:nvSpPr>
         <p:spPr>
           <a:xfrm>
-            <a:off x="777240" y="2240280"/>
-            <a:ext cx="5120640" cy="4114800"/>
+            <a:off x="5120640" y="5943600"/>
+            <a:ext cx="6309360" cy="731520"/>
           </a:xfrm>
           <a:prstGeom prst="rect">
             <a:avLst/>
@@ -4350,218 +4198,20 @@
           <a:p>
             <a:pPr algn="l">
               <a:lnSpc>
-                <a:spcPct val="110000"/>
-              </a:lnSpc>
-              <a:spcAft>
-                <a:spcPts val="700"/>
+                <a:spcPct val="108000"/>
+              </a:lnSpc>
+              <a:spcAft>
+                <a:spcPts val="0"/>
               </a:spcAft>
             </a:pPr>
             <a:r>
               <a:rPr sz="2000" b="0" i="0">
                 <a:solidFill>
-                  <a:srgbClr val="1B2A33"/>
-                </a:solidFill>
-                <a:latin typeface="Calibri"/>
-              </a:rPr>
-              <a:t>•  Prompt 2: criteria 1, 3, 4, 5, 7 restated; Q&amp;A header.</a:t>
-            </a:r>
-          </a:p>
-          <a:p>
-            <a:pPr algn="l">
-              <a:lnSpc>
-                <a:spcPct val="110000"/>
-              </a:lnSpc>
-              <a:spcAft>
-                <a:spcPts val="700"/>
-              </a:spcAft>
-            </a:pPr>
-            <a:r>
-              <a:rPr sz="2000" b="0" i="0">
-                <a:solidFill>
-                  <a:srgbClr val="1B2A33"/>
-                </a:solidFill>
-                <a:latin typeface="Calibri"/>
-              </a:rPr>
-              <a:t>•  Prompt 4 (M3) and 6 (M5): both forms of F, the baseline and its bands, order 5 as a sensitivity, Figure 2 at 0.981.</a:t>
-            </a:r>
-          </a:p>
-          <a:p>
-            <a:pPr algn="l">
-              <a:lnSpc>
-                <a:spcPct val="110000"/>
-              </a:lnSpc>
-              <a:spcAft>
-                <a:spcPts val="700"/>
-              </a:spcAft>
-            </a:pPr>
-            <a:r>
-              <a:rPr sz="2000" b="0" i="0">
-                <a:solidFill>
-                  <a:srgbClr val="1B2A33"/>
-                </a:solidFill>
-                <a:latin typeface="Calibri"/>
-              </a:rPr>
-              <a:t>•  Coding §2.5, §4.3, §4.4, §4.9, §4.10, §6 M1 and M3; planning §2.4 (sign final), §6 tests 1 and 3, §7.</a:t>
-            </a:r>
-          </a:p>
-          <a:p>
-            <a:pPr algn="l">
-              <a:lnSpc>
-                <a:spcPct val="110000"/>
-              </a:lnSpc>
-              <a:spcAft>
-                <a:spcPts val="700"/>
-              </a:spcAft>
-            </a:pPr>
-            <a:r>
-              <a:rPr sz="2000" b="0" i="0">
-                <a:solidFill>
-                  <a:srgbClr val="1B2A33"/>
-                </a:solidFill>
-                <a:latin typeface="Calibri"/>
-              </a:rPr>
-              <a:t>•  V3b figure: clipped titles and the legend fixed; every number identical.</a:t>
-            </a:r>
-          </a:p>
-        </p:txBody>
-      </p:sp>
-      <p:sp>
-        <p:nvSpPr>
-          <p:cNvPr id="8" name="TextBox 7"/>
-          <p:cNvSpPr txBox="1"/>
-          <p:nvPr/>
-        </p:nvSpPr>
-        <p:spPr>
-          <a:xfrm>
-            <a:off x="6309360" y="1783080"/>
-            <a:ext cx="5120640" cy="365760"/>
-          </a:xfrm>
-          <a:prstGeom prst="rect">
-            <a:avLst/>
-          </a:prstGeom>
-          <a:noFill/>
-        </p:spPr>
-        <p:txBody>
-          <a:bodyPr wrap="square" lIns="0" rIns="0" tIns="0" bIns="0">
-            <a:spAutoFit/>
-          </a:bodyPr>
-          <a:lstStyle/>
-          <a:p>
-            <a:pPr algn="l">
-              <a:lnSpc>
-                <a:spcPct val="110000"/>
-              </a:lnSpc>
-              <a:spcAft>
-                <a:spcPts val="0"/>
-              </a:spcAft>
-            </a:pPr>
-            <a:r>
-              <a:rPr sz="2000" b="1" i="0">
-                <a:solidFill>
-                  <a:srgbClr val="065A82"/>
-                </a:solidFill>
-                <a:latin typeface="Calibri"/>
-              </a:rPr>
-              <a:t>THE AUDIT</a:t>
-            </a:r>
-          </a:p>
-        </p:txBody>
-      </p:sp>
-      <p:sp>
-        <p:nvSpPr>
-          <p:cNvPr id="9" name="TextBox 8"/>
-          <p:cNvSpPr txBox="1"/>
-          <p:nvPr/>
-        </p:nvSpPr>
-        <p:spPr>
-          <a:xfrm>
-            <a:off x="6309360" y="2240280"/>
-            <a:ext cx="5120640" cy="4114800"/>
-          </a:xfrm>
-          <a:prstGeom prst="rect">
-            <a:avLst/>
-          </a:prstGeom>
-          <a:noFill/>
-        </p:spPr>
-        <p:txBody>
-          <a:bodyPr wrap="square" lIns="0" rIns="0" tIns="0" bIns="0">
-            <a:spAutoFit/>
-          </a:bodyPr>
-          <a:lstStyle/>
-          <a:p>
-            <a:pPr algn="l">
-              <a:lnSpc>
-                <a:spcPct val="110000"/>
-              </a:lnSpc>
-              <a:spcAft>
-                <a:spcPts val="700"/>
-              </a:spcAft>
-            </a:pPr>
-            <a:r>
-              <a:rPr sz="2000" b="0" i="0">
-                <a:solidFill>
-                  <a:srgbClr val="1B2A33"/>
-                </a:solidFill>
-                <a:latin typeface="Calibri"/>
-              </a:rPr>
-              <a:t>•  Suite: 84 passed, 3 xfailed in 98 s; offline 66 passed, 18 deselected.</a:t>
-            </a:r>
-          </a:p>
-          <a:p>
-            <a:pPr algn="l">
-              <a:lnSpc>
-                <a:spcPct val="110000"/>
-              </a:lnSpc>
-              <a:spcAft>
-                <a:spcPts val="700"/>
-              </a:spcAft>
-            </a:pPr>
-            <a:r>
-              <a:rPr sz="2000" b="0" i="0">
-                <a:solidFill>
-                  <a:srgbClr val="1B2A33"/>
-                </a:solidFill>
-                <a:latin typeface="Calibri"/>
-              </a:rPr>
-              <a:t>•  Seven PNGs in figs/: five tracked (9be37dc), V3 and V3b untracked and shown; none ignored.</a:t>
-            </a:r>
-          </a:p>
-          <a:p>
-            <a:pPr algn="l">
-              <a:lnSpc>
-                <a:spcPct val="110000"/>
-              </a:lnSpc>
-              <a:spcAft>
-                <a:spcPts val="700"/>
-              </a:spcAft>
-            </a:pPr>
-            <a:r>
-              <a:rPr sz="2000" b="0" i="0">
-                <a:solidFill>
-                  <a:srgbClr val="1B2A33"/>
-                </a:solidFill>
-                <a:latin typeface="Calibri"/>
-              </a:rPr>
-              <a:t>•  Criteria 1-7 each PASS with the numbers of the next slide; every 'Discharges' line honoured, nothing claimed twice.</a:t>
-            </a:r>
-          </a:p>
-          <a:p>
-            <a:pPr algn="l">
-              <a:lnSpc>
-                <a:spcPct val="110000"/>
-              </a:lnSpc>
-              <a:spcAft>
-                <a:spcPts val="700"/>
-              </a:spcAft>
-            </a:pPr>
-            <a:r>
-              <a:rPr sz="2000" b="0" i="0">
-                <a:solidFill>
-                  <a:srgbClr val="1B2A33"/>
-                </a:solidFill>
-                <a:latin typeface="Calibri"/>
-              </a:rPr>
-              <a:t>•  Open issues carried to M2-M4: the fronts bugs, prompt 5's tile_find path, the NaN recipe, M3's requirements, the V3b band.</a:t>
+                  <a:srgbClr val="62737F"/>
+                </a:solidFill>
+                <a:latin typeface="Calibri"/>
+              </a:rPr>
+              <a:t>fvadvect.py: flux-form C-grid advection with MITgcm face transports; centred, DST3, OS7 and OS7MP-like.</a:t>
             </a:r>
           </a:p>
         </p:txBody>
@@ -4599,7 +4249,7 @@
             <a:avLst/>
           </a:prstGeom>
           <a:solidFill>
-            <a:srgbClr val="21295C"/>
+            <a:srgbClr val="F2F6F8"/>
           </a:solidFill>
           <a:ln>
             <a:noFill/>
@@ -4637,7 +4287,7 @@
         <p:spPr>
           <a:xfrm>
             <a:off x="777240" y="347472"/>
-            <a:ext cx="10698480" cy="594360"/>
+            <a:ext cx="10698480" cy="329184"/>
           </a:xfrm>
           <a:prstGeom prst="rect">
             <a:avLst/>
@@ -4659,13 +4309,13 @@
               </a:spcAft>
             </a:pPr>
             <a:r>
-              <a:rPr sz="3000" b="1" i="0">
-                <a:solidFill>
-                  <a:srgbClr val="FFFFFF"/>
-                </a:solidFill>
-                <a:latin typeface="Cambria"/>
-              </a:rPr>
-              <a:t>M1 acceptance</a:t>
+              <a:rPr sz="2000" b="1" i="0">
+                <a:solidFill>
+                  <a:srgbClr val="1C7293"/>
+                </a:solidFill>
+                <a:latin typeface="Calibri"/>
+              </a:rPr>
+              <a:t>TASK 7a  ·  CRITERION 6</a:t>
             </a:r>
           </a:p>
         </p:txBody>
@@ -4678,8 +4328,8 @@
         </p:nvSpPr>
         <p:spPr>
           <a:xfrm>
-            <a:off x="777240" y="950976"/>
-            <a:ext cx="10698480" cy="384048"/>
+            <a:off x="777240" y="676656"/>
+            <a:ext cx="10698480" cy="594360"/>
           </a:xfrm>
           <a:prstGeom prst="rect">
             <a:avLst/>
@@ -4701,33 +4351,77 @@
               </a:spcAft>
             </a:pPr>
             <a:r>
+              <a:rPr sz="3000" b="1" i="0">
+                <a:solidFill>
+                  <a:srgbClr val="21295C"/>
+                </a:solidFill>
+                <a:latin typeface="Cambria"/>
+              </a:rPr>
+              <a:t>test_nan_finding.py</a:t>
+            </a:r>
+          </a:p>
+        </p:txBody>
+      </p:sp>
+      <p:sp>
+        <p:nvSpPr>
+          <p:cNvPr id="5" name="TextBox 4"/>
+          <p:cNvSpPr txBox="1"/>
+          <p:nvPr/>
+        </p:nvSpPr>
+        <p:spPr>
+          <a:xfrm>
+            <a:off x="777240" y="1280160"/>
+            <a:ext cx="10698480" cy="384048"/>
+          </a:xfrm>
+          <a:prstGeom prst="rect">
+            <a:avLst/>
+          </a:prstGeom>
+          <a:noFill/>
+        </p:spPr>
+        <p:txBody>
+          <a:bodyPr wrap="square" lIns="0" rIns="0" tIns="0" bIns="0">
+            <a:spAutoFit/>
+          </a:bodyPr>
+          <a:lstStyle/>
+          <a:p>
+            <a:pPr algn="l">
+              <a:lnSpc>
+                <a:spcPct val="110000"/>
+              </a:lnSpc>
+              <a:spcAft>
+                <a:spcPts val="0"/>
+              </a:spcAft>
+            </a:pPr>
+            <a:r>
               <a:rPr sz="2000" b="0" i="0">
                 <a:solidFill>
-                  <a:srgbClr val="8FBFD0"/>
-                </a:solidFill>
-                <a:latin typeface="Calibri"/>
-              </a:rPr>
-              <a:t>All seven criteria, as audited in the task-7 log entry</a:t>
-            </a:r>
-          </a:p>
-        </p:txBody>
-      </p:sp>
-      <p:sp>
-        <p:nvSpPr>
-          <p:cNvPr id="5" name="Oval 4"/>
+                  <a:srgbClr val="62737F"/>
+                </a:solidFill>
+                <a:latin typeface="Calibri"/>
+              </a:rPr>
+              <a:t>fronts_from_gradb2 under config D on NaN land: 14 tests, 11 pass, 3 strict xfails</a:t>
+            </a:r>
+          </a:p>
+        </p:txBody>
+      </p:sp>
+      <p:sp>
+        <p:nvSpPr>
+          <p:cNvPr id="6" name="Rounded Rectangle 5"/>
           <p:cNvSpPr/>
           <p:nvPr/>
         </p:nvSpPr>
         <p:spPr>
           <a:xfrm>
-            <a:off x="822960" y="1673352"/>
-            <a:ext cx="384048" cy="384048"/>
-          </a:xfrm>
-          <a:prstGeom prst="ellipse">
-            <a:avLst/>
+            <a:off x="777240" y="1737360"/>
+            <a:ext cx="5212080" cy="4572000"/>
+          </a:xfrm>
+          <a:prstGeom prst="roundRect">
+            <a:avLst>
+              <a:gd name="adj" fmla="val 7000"/>
+            </a:avLst>
           </a:prstGeom>
           <a:solidFill>
-            <a:srgbClr val="2C6E49"/>
+            <a:srgbClr val="E7EFF3"/>
           </a:solidFill>
           <a:ln>
             <a:noFill/>
@@ -4749,32 +4443,23 @@
           </a:fontRef>
         </p:style>
         <p:txBody>
-          <a:bodyPr rtlCol="0" anchor="ctr" lIns="0" rIns="0" tIns="0" bIns="0"/>
+          <a:bodyPr rtlCol="0" anchor="ctr"/>
           <a:lstStyle/>
           <a:p>
             <a:pPr algn="ctr"/>
-            <a:r>
-              <a:rPr sz="2000" b="1" i="0">
-                <a:solidFill>
-                  <a:srgbClr val="FFFFFF"/>
-                </a:solidFill>
-                <a:latin typeface="Calibri"/>
-              </a:rPr>
-              <a:t>✓</a:t>
-            </a:r>
-          </a:p>
-        </p:txBody>
-      </p:sp>
-      <p:sp>
-        <p:nvSpPr>
-          <p:cNvPr id="6" name="TextBox 5"/>
+          </a:p>
+        </p:txBody>
+      </p:sp>
+      <p:sp>
+        <p:nvSpPr>
+          <p:cNvPr id="7" name="TextBox 6"/>
           <p:cNvSpPr txBox="1"/>
           <p:nvPr/>
         </p:nvSpPr>
         <p:spPr>
           <a:xfrm>
-            <a:off x="1417320" y="1645920"/>
-            <a:ext cx="9966960" cy="640080"/>
+            <a:off x="1051560" y="1920240"/>
+            <a:ext cx="4663440" cy="365760"/>
           </a:xfrm>
           <a:prstGeom prst="rect">
             <a:avLst/>
@@ -4789,7 +4474,7 @@
           <a:p>
             <a:pPr algn="l">
               <a:lnSpc>
-                <a:spcPct val="105000"/>
+                <a:spcPct val="110000"/>
               </a:lnSpc>
               <a:spcAft>
                 <a:spcPts val="0"/>
@@ -4798,40 +4483,113 @@
             <a:r>
               <a:rPr sz="2000" b="1" i="0">
                 <a:solidFill>
-                  <a:srgbClr val="FFFFFF"/>
-                </a:solidFill>
-                <a:latin typeface="Calibri"/>
-              </a:rPr>
-              <a:t>V1 Cartesian deformation  </a:t>
-            </a:r>
+                  <a:srgbClr val="2C6E49"/>
+                </a:solidFill>
+                <a:latin typeface="Calibri"/>
+              </a:rPr>
+              <a:t>WHAT WORKS</a:t>
+            </a:r>
+          </a:p>
+        </p:txBody>
+      </p:sp>
+      <p:sp>
+        <p:nvSpPr>
+          <p:cNvPr id="8" name="TextBox 7"/>
+          <p:cNvSpPr txBox="1"/>
+          <p:nvPr/>
+        </p:nvSpPr>
+        <p:spPr>
+          <a:xfrm>
+            <a:off x="1051560" y="2377440"/>
+            <a:ext cx="4663440" cy="3840480"/>
+          </a:xfrm>
+          <a:prstGeom prst="rect">
+            <a:avLst/>
+          </a:prstGeom>
+          <a:noFill/>
+        </p:spPr>
+        <p:txBody>
+          <a:bodyPr wrap="square" lIns="0" rIns="0" tIns="0" bIns="0">
+            <a:spAutoFit/>
+          </a:bodyPr>
+          <a:lstStyle/>
+          <a:p>
+            <a:pPr algn="l">
+              <a:lnSpc>
+                <a:spcPct val="110000"/>
+              </a:lnSpc>
+              <a:spcAft>
+                <a:spcPts val="700"/>
+              </a:spcAft>
+            </a:pPr>
             <a:r>
               <a:rPr sz="2000" b="0" i="0">
                 <a:solidFill>
-                  <a:srgbClr val="8FBFD0"/>
-                </a:solidFill>
-                <a:latin typeface="Calibri"/>
-              </a:rPr>
-              <a:t>0.78% at ell = 8 dx over 8 h  (&lt; 1%)</a:t>
-            </a:r>
-          </a:p>
-        </p:txBody>
-      </p:sp>
-      <p:sp>
-        <p:nvSpPr>
-          <p:cNvPr id="7" name="Oval 6"/>
+                  <a:srgbClr val="1B2A33"/>
+                </a:solidFill>
+                <a:latin typeface="Calibri"/>
+              </a:rPr>
+              <a:t>•  A NaN land block: 0 front pixels on NaN; fronts ≥ 10 cells from the coast equal the land-free field pixel for pixel.</a:t>
+            </a:r>
+          </a:p>
+          <a:p>
+            <a:pPr algn="l">
+              <a:lnSpc>
+                <a:spcPct val="110000"/>
+              </a:lnSpc>
+              <a:spcAft>
+                <a:spcPts val="700"/>
+              </a:spcAft>
+            </a:pPr>
+            <a:r>
+              <a:rPr sz="2000" b="0" i="0">
+                <a:solidFill>
+                  <a:srgbClr val="1B2A33"/>
+                </a:solidFill>
+                <a:latin typeface="Calibri"/>
+              </a:rPr>
+              <a:t>•  Real hour 0: 11,836 front pixels in 7 s, 0 on NaN, 878 (7.4%) inside the halo.</a:t>
+            </a:r>
+          </a:p>
+          <a:p>
+            <a:pPr algn="l">
+              <a:lnSpc>
+                <a:spcPct val="110000"/>
+              </a:lnSpc>
+              <a:spcAft>
+                <a:spcPts val="700"/>
+              </a:spcAft>
+            </a:pPr>
+            <a:r>
+              <a:rPr sz="2000" b="0" i="0">
+                <a:solidFill>
+                  <a:srgbClr val="1B2A33"/>
+                </a:solidFill>
+                <a:latin typeface="Calibri"/>
+              </a:rPr>
+              <a:t>•  The three threshold modes agree bit for bit; no coastal bias in the window.</a:t>
+            </a:r>
+          </a:p>
+        </p:txBody>
+      </p:sp>
+      <p:sp>
+        <p:nvSpPr>
+          <p:cNvPr id="9" name="Rounded Rectangle 8"/>
           <p:cNvSpPr/>
           <p:nvPr/>
         </p:nvSpPr>
         <p:spPr>
           <a:xfrm>
-            <a:off x="822960" y="2221991"/>
-            <a:ext cx="384048" cy="384048"/>
-          </a:xfrm>
-          <a:prstGeom prst="ellipse">
-            <a:avLst/>
+            <a:off x="6172200" y="1737360"/>
+            <a:ext cx="5212080" cy="4572000"/>
+          </a:xfrm>
+          <a:prstGeom prst="roundRect">
+            <a:avLst>
+              <a:gd name="adj" fmla="val 7000"/>
+            </a:avLst>
           </a:prstGeom>
           <a:solidFill>
-            <a:srgbClr val="2C6E49"/>
+            <a:srgbClr val="FAEFE4"/>
           </a:solidFill>
           <a:ln>
             <a:noFill/>
@@ -4853,32 +4611,23 @@
           </a:fontRef>
         </p:style>
         <p:txBody>
-          <a:bodyPr rtlCol="0" anchor="ctr" lIns="0" rIns="0" tIns="0" bIns="0"/>
+          <a:bodyPr rtlCol="0" anchor="ctr"/>
           <a:lstStyle/>
           <a:p>
             <a:pPr algn="ctr"/>
-            <a:r>
-              <a:rPr sz="2000" b="1" i="0">
-                <a:solidFill>
-                  <a:srgbClr val="FFFFFF"/>
-                </a:solidFill>
-                <a:latin typeface="Calibri"/>
-              </a:rPr>
-              <a:t>✓</a:t>
-            </a:r>
-          </a:p>
-        </p:txBody>
-      </p:sp>
-      <p:sp>
-        <p:nvSpPr>
-          <p:cNvPr id="8" name="TextBox 7"/>
+          </a:p>
+        </p:txBody>
+      </p:sp>
+      <p:sp>
+        <p:nvSpPr>
+          <p:cNvPr id="10" name="TextBox 9"/>
           <p:cNvSpPr txBox="1"/>
           <p:nvPr/>
         </p:nvSpPr>
         <p:spPr>
           <a:xfrm>
-            <a:off x="1417320" y="2194560"/>
-            <a:ext cx="9966960" cy="640080"/>
+            <a:off x="6446520" y="1920240"/>
+            <a:ext cx="4663440" cy="365760"/>
           </a:xfrm>
           <a:prstGeom prst="rect">
             <a:avLst/>
@@ -4893,7 +4642,7 @@
           <a:p>
             <a:pPr algn="l">
               <a:lnSpc>
-                <a:spcPct val="105000"/>
+                <a:spcPct val="110000"/>
               </a:lnSpc>
               <a:spcAft>
                 <a:spcPts val="0"/>
@@ -4902,87 +4651,25 @@
             <a:r>
               <a:rPr sz="2000" b="1" i="0">
                 <a:solidFill>
-                  <a:srgbClr val="FFFFFF"/>
-                </a:solidFill>
-                <a:latin typeface="Calibri"/>
-              </a:rPr>
-              <a:t>V2 native-grid metric  </a:t>
-            </a:r>
-            <a:r>
-              <a:rPr sz="2000" b="0" i="0">
-                <a:solidFill>
-                  <a:srgbClr val="8FBFD0"/>
-                </a:solidFill>
-                <a:latin typeface="Calibri"/>
-              </a:rPr>
-              <a:t>b_x max 0.077%, b_y 0.041%  (&lt; 1%)</a:t>
-            </a:r>
-          </a:p>
-        </p:txBody>
-      </p:sp>
-      <p:sp>
-        <p:nvSpPr>
-          <p:cNvPr id="9" name="Oval 8"/>
-          <p:cNvSpPr/>
-          <p:nvPr/>
-        </p:nvSpPr>
-        <p:spPr>
-          <a:xfrm>
-            <a:off x="822960" y="2770632"/>
-            <a:ext cx="384048" cy="384048"/>
-          </a:xfrm>
-          <a:prstGeom prst="ellipse">
-            <a:avLst/>
-          </a:prstGeom>
-          <a:solidFill>
-            <a:srgbClr val="2C6E49"/>
-          </a:solidFill>
-          <a:ln>
-            <a:noFill/>
-          </a:ln>
-          <a:effectLst/>
-        </p:spPr>
-        <p:style>
-          <a:lnRef idx="1">
-            <a:schemeClr val="accent1"/>
-          </a:lnRef>
-          <a:fillRef idx="3">
-            <a:schemeClr val="accent1"/>
-          </a:fillRef>
-          <a:effectRef idx="2">
-            <a:schemeClr val="accent1"/>
-          </a:effectRef>
-          <a:fontRef idx="minor">
-            <a:schemeClr val="lt1"/>
-          </a:fontRef>
-        </p:style>
-        <p:txBody>
-          <a:bodyPr rtlCol="0" anchor="ctr" lIns="0" rIns="0" tIns="0" bIns="0"/>
-          <a:lstStyle/>
-          <a:p>
-            <a:pPr algn="ctr"/>
-            <a:r>
-              <a:rPr sz="2000" b="1" i="0">
-                <a:solidFill>
-                  <a:srgbClr val="FFFFFF"/>
-                </a:solidFill>
-                <a:latin typeface="Calibri"/>
-              </a:rPr>
-              <a:t>✓</a:t>
-            </a:r>
-          </a:p>
-        </p:txBody>
-      </p:sp>
-      <p:sp>
-        <p:nvSpPr>
-          <p:cNvPr id="10" name="TextBox 9"/>
+                  <a:srgbClr val="A8501B"/>
+                </a:solidFill>
+                <a:latin typeface="Calibri"/>
+              </a:rPr>
+              <a:t>WHAT BREAKS  (xfail, strict)</a:t>
+            </a:r>
+          </a:p>
+        </p:txBody>
+      </p:sp>
+      <p:sp>
+        <p:nvSpPr>
+          <p:cNvPr id="11" name="TextBox 10"/>
           <p:cNvSpPr txBox="1"/>
           <p:nvPr/>
         </p:nvSpPr>
         <p:spPr>
           <a:xfrm>
-            <a:off x="1417320" y="2743200"/>
-            <a:ext cx="9966960" cy="640080"/>
+            <a:off x="6446520" y="2377440"/>
+            <a:ext cx="4663440" cy="3840480"/>
           </a:xfrm>
           <a:prstGeom prst="rect">
             <a:avLst/>
@@ -4997,533 +4684,77 @@
           <a:p>
             <a:pPr algn="l">
               <a:lnSpc>
-                <a:spcPct val="105000"/>
-              </a:lnSpc>
-              <a:spcAft>
-                <a:spcPts val="0"/>
-              </a:spcAft>
-            </a:pPr>
-            <a:r>
-              <a:rPr sz="2000" b="1" i="0">
-                <a:solidFill>
-                  <a:srgbClr val="FFFFFF"/>
-                </a:solidFill>
-                <a:latin typeface="Calibri"/>
-              </a:rPr>
-              <a:t>V3 discrete null  </a:t>
-            </a:r>
+                <a:spcPct val="110000"/>
+              </a:lnSpc>
+              <a:spcAft>
+                <a:spcPts val="700"/>
+              </a:spcAft>
+            </a:pPr>
             <a:r>
               <a:rPr sz="2000" b="0" i="0">
                 <a:solidFill>
-                  <a:srgbClr val="8FBFD0"/>
-                </a:solidFill>
-                <a:latin typeface="Calibri"/>
-              </a:rPr>
-              <a:t>1.004 [0.995, 1.017] strain, 0.981 [0.970, 0.994] llc  (1 ± 0.05); V3b recorded 0.975 [0.954, 1.003]</a:t>
-            </a:r>
-          </a:p>
-        </p:txBody>
-      </p:sp>
-      <p:sp>
-        <p:nvSpPr>
-          <p:cNvPr id="11" name="Oval 10"/>
-          <p:cNvSpPr/>
-          <p:nvPr/>
-        </p:nvSpPr>
-        <p:spPr>
-          <a:xfrm>
-            <a:off x="822960" y="3639312"/>
-            <a:ext cx="384048" cy="384048"/>
-          </a:xfrm>
-          <a:prstGeom prst="ellipse">
-            <a:avLst/>
-          </a:prstGeom>
-          <a:solidFill>
-            <a:srgbClr val="2C6E49"/>
-          </a:solidFill>
-          <a:ln>
-            <a:noFill/>
-          </a:ln>
-          <a:effectLst/>
-        </p:spPr>
-        <p:style>
-          <a:lnRef idx="1">
-            <a:schemeClr val="accent1"/>
-          </a:lnRef>
-          <a:fillRef idx="3">
-            <a:schemeClr val="accent1"/>
-          </a:fillRef>
-          <a:effectRef idx="2">
-            <a:schemeClr val="accent1"/>
-          </a:effectRef>
-          <a:fontRef idx="minor">
-            <a:schemeClr val="lt1"/>
-          </a:fontRef>
-        </p:style>
-        <p:txBody>
-          <a:bodyPr rtlCol="0" anchor="ctr" lIns="0" rIns="0" tIns="0" bIns="0"/>
-          <a:lstStyle/>
-          <a:p>
-            <a:pPr algn="ctr"/>
-            <a:r>
-              <a:rPr sz="2000" b="1" i="0">
-                <a:solidFill>
-                  <a:srgbClr val="FFFFFF"/>
-                </a:solidFill>
-                <a:latin typeface="Calibri"/>
-              </a:rPr>
-              <a:t>✓</a:t>
-            </a:r>
-          </a:p>
-        </p:txBody>
-      </p:sp>
-      <p:sp>
-        <p:nvSpPr>
-          <p:cNvPr id="12" name="TextBox 11"/>
-          <p:cNvSpPr txBox="1"/>
-          <p:nvPr/>
-        </p:nvSpPr>
-        <p:spPr>
-          <a:xfrm>
-            <a:off x="1417320" y="3611880"/>
-            <a:ext cx="9966960" cy="640080"/>
-          </a:xfrm>
-          <a:prstGeom prst="rect">
-            <a:avLst/>
-          </a:prstGeom>
-          <a:noFill/>
-        </p:spPr>
-        <p:txBody>
-          <a:bodyPr wrap="square" lIns="0" rIns="0" tIns="0" bIns="0">
-            <a:spAutoFit/>
-          </a:bodyPr>
-          <a:lstStyle/>
-          <a:p>
-            <a:pPr algn="l">
-              <a:lnSpc>
-                <a:spcPct val="105000"/>
-              </a:lnSpc>
-              <a:spcAft>
-                <a:spcPts val="0"/>
-              </a:spcAft>
-            </a:pPr>
-            <a:r>
-              <a:rPr sz="2000" b="1" i="0">
-                <a:solidFill>
-                  <a:srgbClr val="FFFFFF"/>
-                </a:solidFill>
-                <a:latin typeface="Calibri"/>
-              </a:rPr>
-              <a:t>V4 interpolation bias  </a:t>
-            </a:r>
+                  <a:srgbClr val="1B2A33"/>
+                </a:solidFill>
+                <a:latin typeface="Calibri"/>
+              </a:rPr>
+              <a:t>•  thresh_mode 'pool' with the default n_workers=None → TypeError: config D does not run as written.</a:t>
+            </a:r>
+          </a:p>
+          <a:p>
+            <a:pPr algn="l">
+              <a:lnSpc>
+                <a:spcPct val="110000"/>
+              </a:lnSpc>
+              <a:spcAft>
+                <a:spcPts val="700"/>
+              </a:spcAft>
+            </a:pPr>
             <a:r>
               <a:rPr sz="2000" b="0" i="0">
                 <a:solidFill>
-                  <a:srgbClr val="8FBFD0"/>
-                </a:solidFill>
-                <a:latin typeface="Calibri"/>
-              </a:rPr>
-              <a:t>recorded: 0.28-1.0% of G per hour at order 3</a:t>
-            </a:r>
-          </a:p>
-        </p:txBody>
-      </p:sp>
-      <p:sp>
-        <p:nvSpPr>
-          <p:cNvPr id="13" name="Oval 12"/>
-          <p:cNvSpPr/>
-          <p:nvPr/>
-        </p:nvSpPr>
-        <p:spPr>
-          <a:xfrm>
-            <a:off x="822960" y="4187952"/>
-            <a:ext cx="384048" cy="384048"/>
-          </a:xfrm>
-          <a:prstGeom prst="ellipse">
-            <a:avLst/>
-          </a:prstGeom>
-          <a:solidFill>
-            <a:srgbClr val="2C6E49"/>
-          </a:solidFill>
-          <a:ln>
-            <a:noFill/>
-          </a:ln>
-          <a:effectLst/>
-        </p:spPr>
-        <p:style>
-          <a:lnRef idx="1">
-            <a:schemeClr val="accent1"/>
-          </a:lnRef>
-          <a:fillRef idx="3">
-            <a:schemeClr val="accent1"/>
-          </a:fillRef>
-          <a:effectRef idx="2">
-            <a:schemeClr val="accent1"/>
-          </a:effectRef>
-          <a:fontRef idx="minor">
-            <a:schemeClr val="lt1"/>
-          </a:fontRef>
-        </p:style>
-        <p:txBody>
-          <a:bodyPr rtlCol="0" anchor="ctr" lIns="0" rIns="0" tIns="0" bIns="0"/>
-          <a:lstStyle/>
-          <a:p>
-            <a:pPr algn="ctr"/>
-            <a:r>
-              <a:rPr sz="2000" b="1" i="0">
-                <a:solidFill>
-                  <a:srgbClr val="FFFFFF"/>
-                </a:solidFill>
-                <a:latin typeface="Calibri"/>
-              </a:rPr>
-              <a:t>✓</a:t>
-            </a:r>
-          </a:p>
-        </p:txBody>
-      </p:sp>
-      <p:sp>
-        <p:nvSpPr>
-          <p:cNvPr id="14" name="TextBox 13"/>
-          <p:cNvSpPr txBox="1"/>
-          <p:nvPr/>
-        </p:nvSpPr>
-        <p:spPr>
-          <a:xfrm>
-            <a:off x="1417320" y="4160520"/>
-            <a:ext cx="9966960" cy="640080"/>
-          </a:xfrm>
-          <a:prstGeom prst="rect">
-            <a:avLst/>
-          </a:prstGeom>
-          <a:noFill/>
-        </p:spPr>
-        <p:txBody>
-          <a:bodyPr wrap="square" lIns="0" rIns="0" tIns="0" bIns="0">
-            <a:spAutoFit/>
-          </a:bodyPr>
-          <a:lstStyle/>
-          <a:p>
-            <a:pPr algn="l">
-              <a:lnSpc>
-                <a:spcPct val="105000"/>
-              </a:lnSpc>
-              <a:spcAft>
-                <a:spcPts val="0"/>
-              </a:spcAft>
-            </a:pPr>
-            <a:r>
-              <a:rPr sz="2000" b="1" i="0">
-                <a:solidFill>
-                  <a:srgbClr val="FFFFFF"/>
-                </a:solidFill>
-                <a:latin typeface="Calibri"/>
-              </a:rPr>
-              <a:t>PNGs V1-V6 (+ V3b)  </a:t>
-            </a:r>
+                  <a:srgbClr val="1B2A33"/>
+                </a:solidFill>
+                <a:latin typeface="Calibri"/>
+              </a:rPr>
+              <a:t>•  remove_small_holes fills an enclosed NaN island: 6 front pixels on land.</a:t>
+            </a:r>
+          </a:p>
+          <a:p>
+            <a:pPr algn="l">
+              <a:lnSpc>
+                <a:spcPct val="110000"/>
+              </a:lnSpc>
+              <a:spcAft>
+                <a:spcPts val="700"/>
+              </a:spcAft>
+            </a:pPr>
             <a:r>
               <a:rPr sz="2000" b="0" i="0">
                 <a:solidFill>
-                  <a:srgbClr val="8FBFD0"/>
-                </a:solidFill>
-                <a:latin typeface="Calibri"/>
-              </a:rPr>
-              <a:t>all seven in figs/ and in git status; V6 shows the edge rim</a:t>
-            </a:r>
-          </a:p>
-        </p:txBody>
-      </p:sp>
-      <p:sp>
-        <p:nvSpPr>
-          <p:cNvPr id="15" name="Oval 14"/>
-          <p:cNvSpPr/>
-          <p:nvPr/>
-        </p:nvSpPr>
-        <p:spPr>
-          <a:xfrm>
-            <a:off x="822960" y="4736592"/>
-            <a:ext cx="384048" cy="384048"/>
-          </a:xfrm>
-          <a:prstGeom prst="ellipse">
-            <a:avLst/>
-          </a:prstGeom>
-          <a:solidFill>
-            <a:srgbClr val="2C6E49"/>
-          </a:solidFill>
-          <a:ln>
-            <a:noFill/>
-          </a:ln>
-          <a:effectLst/>
-        </p:spPr>
-        <p:style>
-          <a:lnRef idx="1">
-            <a:schemeClr val="accent1"/>
-          </a:lnRef>
-          <a:fillRef idx="3">
-            <a:schemeClr val="accent1"/>
-          </a:fillRef>
-          <a:effectRef idx="2">
-            <a:schemeClr val="accent1"/>
-          </a:effectRef>
-          <a:fontRef idx="minor">
-            <a:schemeClr val="lt1"/>
-          </a:fontRef>
-        </p:style>
-        <p:txBody>
-          <a:bodyPr rtlCol="0" anchor="ctr" lIns="0" rIns="0" tIns="0" bIns="0"/>
-          <a:lstStyle/>
-          <a:p>
-            <a:pPr algn="ctr"/>
-            <a:r>
-              <a:rPr sz="2000" b="1" i="0">
-                <a:solidFill>
-                  <a:srgbClr val="FFFFFF"/>
-                </a:solidFill>
-                <a:latin typeface="Calibri"/>
-              </a:rPr>
-              <a:t>✓</a:t>
-            </a:r>
-          </a:p>
-        </p:txBody>
-      </p:sp>
-      <p:sp>
-        <p:nvSpPr>
-          <p:cNvPr id="16" name="TextBox 15"/>
-          <p:cNvSpPr txBox="1"/>
-          <p:nvPr/>
-        </p:nvSpPr>
-        <p:spPr>
-          <a:xfrm>
-            <a:off x="1417320" y="4709159"/>
-            <a:ext cx="9966960" cy="640080"/>
-          </a:xfrm>
-          <a:prstGeom prst="rect">
-            <a:avLst/>
-          </a:prstGeom>
-          <a:noFill/>
-        </p:spPr>
-        <p:txBody>
-          <a:bodyPr wrap="square" lIns="0" rIns="0" tIns="0" bIns="0">
-            <a:spAutoFit/>
-          </a:bodyPr>
-          <a:lstStyle/>
-          <a:p>
-            <a:pPr algn="l">
-              <a:lnSpc>
-                <a:spcPct val="105000"/>
-              </a:lnSpc>
-              <a:spcAft>
-                <a:spcPts val="0"/>
-              </a:spcAft>
-            </a:pPr>
-            <a:r>
-              <a:rPr sz="2000" b="1" i="0">
-                <a:solidFill>
-                  <a:srgbClr val="FFFFFF"/>
-                </a:solidFill>
-                <a:latin typeface="Calibri"/>
-              </a:rPr>
-              <a:t>Tests  </a:t>
-            </a:r>
+                  <a:srgbClr val="1B2A33"/>
+                </a:solidFill>
+                <a:latin typeface="Calibri"/>
+              </a:rPr>
+              <a:t>•  despur on an empty skeleton → ValueError in skan.</a:t>
+            </a:r>
+          </a:p>
+          <a:p>
+            <a:pPr algn="l">
+              <a:lnSpc>
+                <a:spcPct val="110000"/>
+              </a:lnSpc>
+              <a:spcAft>
+                <a:spcPts val="700"/>
+              </a:spcAft>
+            </a:pPr>
             <a:r>
               <a:rPr sz="2000" b="0" i="0">
                 <a:solidFill>
-                  <a:srgbClr val="8FBFD0"/>
-                </a:solidFill>
-                <a:latin typeface="Calibri"/>
-              </a:rPr>
-              <a:t>84 passed, 3 strict xfailed, incl. test_nan_finding.py</a:t>
-            </a:r>
-          </a:p>
-        </p:txBody>
-      </p:sp>
-      <p:sp>
-        <p:nvSpPr>
-          <p:cNvPr id="17" name="Oval 16"/>
-          <p:cNvSpPr/>
-          <p:nvPr/>
-        </p:nvSpPr>
-        <p:spPr>
-          <a:xfrm>
-            <a:off x="822960" y="5285231"/>
-            <a:ext cx="384048" cy="384048"/>
-          </a:xfrm>
-          <a:prstGeom prst="ellipse">
-            <a:avLst/>
-          </a:prstGeom>
-          <a:solidFill>
-            <a:srgbClr val="2C6E49"/>
-          </a:solidFill>
-          <a:ln>
-            <a:noFill/>
-          </a:ln>
-          <a:effectLst/>
-        </p:spPr>
-        <p:style>
-          <a:lnRef idx="1">
-            <a:schemeClr val="accent1"/>
-          </a:lnRef>
-          <a:fillRef idx="3">
-            <a:schemeClr val="accent1"/>
-          </a:fillRef>
-          <a:effectRef idx="2">
-            <a:schemeClr val="accent1"/>
-          </a:effectRef>
-          <a:fontRef idx="minor">
-            <a:schemeClr val="lt1"/>
-          </a:fontRef>
-        </p:style>
-        <p:txBody>
-          <a:bodyPr rtlCol="0" anchor="ctr" lIns="0" rIns="0" tIns="0" bIns="0"/>
-          <a:lstStyle/>
-          <a:p>
-            <a:pPr algn="ctr"/>
-            <a:r>
-              <a:rPr sz="2000" b="1" i="0">
-                <a:solidFill>
-                  <a:srgbClr val="FFFFFF"/>
-                </a:solidFill>
-                <a:latin typeface="Calibri"/>
-              </a:rPr>
-              <a:t>✓</a:t>
-            </a:r>
-          </a:p>
-        </p:txBody>
-      </p:sp>
-      <p:sp>
-        <p:nvSpPr>
-          <p:cNvPr id="18" name="TextBox 17"/>
-          <p:cNvSpPr txBox="1"/>
-          <p:nvPr/>
-        </p:nvSpPr>
-        <p:spPr>
-          <a:xfrm>
-            <a:off x="1417320" y="5257799"/>
-            <a:ext cx="9966960" cy="640080"/>
-          </a:xfrm>
-          <a:prstGeom prst="rect">
-            <a:avLst/>
-          </a:prstGeom>
-          <a:noFill/>
-        </p:spPr>
-        <p:txBody>
-          <a:bodyPr wrap="square" lIns="0" rIns="0" tIns="0" bIns="0">
-            <a:spAutoFit/>
-          </a:bodyPr>
-          <a:lstStyle/>
-          <a:p>
-            <a:pPr algn="l">
-              <a:lnSpc>
-                <a:spcPct val="105000"/>
-              </a:lnSpc>
-              <a:spcAft>
-                <a:spcPts val="0"/>
-              </a:spcAft>
-            </a:pPr>
-            <a:r>
-              <a:rPr sz="2000" b="1" i="0">
-                <a:solidFill>
-                  <a:srgbClr val="FFFFFF"/>
-                </a:solidFill>
-                <a:latin typeface="Calibri"/>
-              </a:rPr>
-              <a:t>Regression oracle  </a:t>
-            </a:r>
-            <a:r>
-              <a:rPr sz="2000" b="0" i="0">
-                <a:solidFill>
-                  <a:srgbClr val="8FBFD0"/>
-                </a:solidFill>
-                <a:latin typeface="Calibri"/>
-              </a:rPr>
-              <a:t>form='chain' bit-for-bit frontogenesis_tendency, max |dF| = 0</a:t>
-            </a:r>
-          </a:p>
-        </p:txBody>
-      </p:sp>
-      <p:sp>
-        <p:nvSpPr>
-          <p:cNvPr id="19" name="Rounded Rectangle 18"/>
-          <p:cNvSpPr/>
-          <p:nvPr/>
-        </p:nvSpPr>
-        <p:spPr>
-          <a:xfrm>
-            <a:off x="777240" y="5806440"/>
-            <a:ext cx="10607040" cy="731520"/>
-          </a:xfrm>
-          <a:prstGeom prst="roundRect">
-            <a:avLst>
-              <a:gd name="adj" fmla="val 7000"/>
-            </a:avLst>
-          </a:prstGeom>
-          <a:solidFill>
-            <a:srgbClr val="065A82"/>
-          </a:solidFill>
-          <a:ln>
-            <a:noFill/>
-          </a:ln>
-          <a:effectLst/>
-        </p:spPr>
-        <p:style>
-          <a:lnRef idx="1">
-            <a:schemeClr val="accent1"/>
-          </a:lnRef>
-          <a:fillRef idx="3">
-            <a:schemeClr val="accent1"/>
-          </a:fillRef>
-          <a:effectRef idx="2">
-            <a:schemeClr val="accent1"/>
-          </a:effectRef>
-          <a:fontRef idx="minor">
-            <a:schemeClr val="lt1"/>
-          </a:fontRef>
-        </p:style>
-        <p:txBody>
-          <a:bodyPr rtlCol="0" anchor="ctr"/>
-          <a:lstStyle/>
-          <a:p>
-            <a:pPr algn="ctr"/>
-          </a:p>
-        </p:txBody>
-      </p:sp>
-      <p:sp>
-        <p:nvSpPr>
-          <p:cNvPr id="20" name="TextBox 19"/>
-          <p:cNvSpPr txBox="1"/>
-          <p:nvPr/>
-        </p:nvSpPr>
-        <p:spPr>
-          <a:xfrm>
-            <a:off x="1143000" y="5989320"/>
-            <a:ext cx="9875520" cy="411480"/>
-          </a:xfrm>
-          <a:prstGeom prst="rect">
-            <a:avLst/>
-          </a:prstGeom>
-          <a:noFill/>
-        </p:spPr>
-        <p:txBody>
-          <a:bodyPr wrap="square" lIns="0" rIns="0" tIns="0" bIns="0">
-            <a:spAutoFit/>
-          </a:bodyPr>
-          <a:lstStyle/>
-          <a:p>
-            <a:pPr algn="l">
-              <a:lnSpc>
-                <a:spcPct val="110000"/>
-              </a:lnSpc>
-              <a:spcAft>
-                <a:spcPts val="0"/>
-              </a:spcAft>
-            </a:pPr>
-            <a:r>
-              <a:rPr sz="2000" b="1" i="0">
-                <a:solidFill>
-                  <a:srgbClr val="FFFFFF"/>
-                </a:solidFill>
-                <a:latin typeface="Calibri"/>
-              </a:rPr>
-              <a:t>M1 closed 2026-09-30.  Next: M2 pulls the 72-hour series; M3 computes the budget.</a:t>
+                  <a:srgbClr val="1B2A33"/>
+                </a:solidFill>
+                <a:latin typeface="Calibri"/>
+              </a:rPr>
+              <a:t>•  M4 recipe: pass NaN as-is (never fill), explicit n_workers, despur off, then fronts &amp;= isfinite(gradb2).</a:t>
             </a:r>
           </a:p>
         </p:txBody>
@@ -5627,7 +4858,7 @@
                 </a:solidFill>
                 <a:latin typeface="Calibri"/>
               </a:rPr>
-              <a:t>FINDINGS</a:t>
+              <a:t>TASK 7  ·  THE AUDIT</a:t>
             </a:r>
           </a:p>
         </p:txBody>
@@ -5669,7 +4900,7 @@
                 </a:solidFill>
                 <a:latin typeface="Cambria"/>
               </a:rPr>
-              <a:t>Findings for the writeup</a:t>
+              <a:t>Decisions applied and the M1 audit</a:t>
             </a:r>
           </a:p>
         </p:txBody>
@@ -5711,7 +4942,7 @@
                 </a:solidFill>
                 <a:latin typeface="Calibri"/>
               </a:rPr>
-              <a:t>Five things the discretisation taught us</a:t>
+              <a:t>M1-Q1..Q8 written into the docs on 2026-09-30; every criterion audited; M1 closed</a:t>
             </a:r>
           </a:p>
         </p:txBody>
@@ -5724,8 +4955,8 @@
         </p:nvSpPr>
         <p:spPr>
           <a:xfrm>
-            <a:off x="777240" y="1737360"/>
-            <a:ext cx="10607040" cy="4846320"/>
+            <a:off x="777240" y="1783080"/>
+            <a:ext cx="5120640" cy="365760"/>
           </a:xfrm>
           <a:prstGeom prst="rect">
             <a:avLst/>
@@ -5740,10 +4971,10 @@
           <a:p>
             <a:pPr algn="l">
               <a:lnSpc>
-                <a:spcPct val="105000"/>
-              </a:lnSpc>
-              <a:spcAft>
-                <a:spcPts val="900"/>
+                <a:spcPct val="110000"/>
+              </a:lnSpc>
+              <a:spcAft>
+                <a:spcPts val="0"/>
               </a:spcAft>
             </a:pPr>
             <a:r>
@@ -5753,8 +4984,41 @@
                 </a:solidFill>
                 <a:latin typeface="Calibri"/>
               </a:rPr>
-              <a:t>Discrete F. </a:t>
-            </a:r>
+              <a:t>APPLIED TO THE DOCS</a:t>
+            </a:r>
+          </a:p>
+        </p:txBody>
+      </p:sp>
+      <p:sp>
+        <p:nvSpPr>
+          <p:cNvPr id="7" name="TextBox 6"/>
+          <p:cNvSpPr txBox="1"/>
+          <p:nvPr/>
+        </p:nvSpPr>
+        <p:spPr>
+          <a:xfrm>
+            <a:off x="777240" y="2240280"/>
+            <a:ext cx="5120640" cy="4114800"/>
+          </a:xfrm>
+          <a:prstGeom prst="rect">
+            <a:avLst/>
+          </a:prstGeom>
+          <a:noFill/>
+        </p:spPr>
+        <p:txBody>
+          <a:bodyPr wrap="square" lIns="0" rIns="0" tIns="0" bIns="0">
+            <a:spAutoFit/>
+          </a:bodyPr>
+          <a:lstStyle/>
+          <a:p>
+            <a:pPr algn="l">
+              <a:lnSpc>
+                <a:spcPct val="110000"/>
+              </a:lnSpc>
+              <a:spcAft>
+                <a:spcPts val="700"/>
+              </a:spcAft>
+            </a:pPr>
             <a:r>
               <a:rPr sz="2000" b="0" i="0">
                 <a:solidFill>
@@ -5762,16 +5026,96 @@
                 </a:solidFill>
                 <a:latin typeface="Calibri"/>
               </a:rPr>
-              <a:t>The chain-rule product −(∇b)ᵀ(∇u)(∇b) fails on the grid by (2/3)(dx/ell)²; the consistent form passes V3 and is ~0.79x the chain F on real front pixels — about the size of the effect being measured.</a:t>
-            </a:r>
-          </a:p>
-          <a:p>
-            <a:pPr algn="l">
-              <a:lnSpc>
-                <a:spcPct val="105000"/>
-              </a:lnSpc>
-              <a:spcAft>
-                <a:spcPts val="900"/>
+              <a:t>•  Prompt 2: criteria 1, 3, 4, 5, 7 restated; Q&amp;A header.</a:t>
+            </a:r>
+          </a:p>
+          <a:p>
+            <a:pPr algn="l">
+              <a:lnSpc>
+                <a:spcPct val="110000"/>
+              </a:lnSpc>
+              <a:spcAft>
+                <a:spcPts val="700"/>
+              </a:spcAft>
+            </a:pPr>
+            <a:r>
+              <a:rPr sz="2000" b="0" i="0">
+                <a:solidFill>
+                  <a:srgbClr val="1B2A33"/>
+                </a:solidFill>
+                <a:latin typeface="Calibri"/>
+              </a:rPr>
+              <a:t>•  Prompt 4 (M3) and 6 (M5): both forms of F, the baseline and its bands, order 5 as a sensitivity, Figure 2 at 0.981.</a:t>
+            </a:r>
+          </a:p>
+          <a:p>
+            <a:pPr algn="l">
+              <a:lnSpc>
+                <a:spcPct val="110000"/>
+              </a:lnSpc>
+              <a:spcAft>
+                <a:spcPts val="700"/>
+              </a:spcAft>
+            </a:pPr>
+            <a:r>
+              <a:rPr sz="2000" b="0" i="0">
+                <a:solidFill>
+                  <a:srgbClr val="1B2A33"/>
+                </a:solidFill>
+                <a:latin typeface="Calibri"/>
+              </a:rPr>
+              <a:t>•  Coding §2.5, §4.3, §4.4, §4.9, §4.10, §6 M1 and M3; planning §2.4 (sign final), §6 tests 1 and 3, §7.</a:t>
+            </a:r>
+          </a:p>
+          <a:p>
+            <a:pPr algn="l">
+              <a:lnSpc>
+                <a:spcPct val="110000"/>
+              </a:lnSpc>
+              <a:spcAft>
+                <a:spcPts val="700"/>
+              </a:spcAft>
+            </a:pPr>
+            <a:r>
+              <a:rPr sz="2000" b="0" i="0">
+                <a:solidFill>
+                  <a:srgbClr val="1B2A33"/>
+                </a:solidFill>
+                <a:latin typeface="Calibri"/>
+              </a:rPr>
+              <a:t>•  V3b figure: clipped titles and the legend fixed; every number identical.</a:t>
+            </a:r>
+          </a:p>
+        </p:txBody>
+      </p:sp>
+      <p:sp>
+        <p:nvSpPr>
+          <p:cNvPr id="8" name="TextBox 7"/>
+          <p:cNvSpPr txBox="1"/>
+          <p:nvPr/>
+        </p:nvSpPr>
+        <p:spPr>
+          <a:xfrm>
+            <a:off x="6309360" y="1783080"/>
+            <a:ext cx="5120640" cy="365760"/>
+          </a:xfrm>
+          <a:prstGeom prst="rect">
+            <a:avLst/>
+          </a:prstGeom>
+          <a:noFill/>
+        </p:spPr>
+        <p:txBody>
+          <a:bodyPr wrap="square" lIns="0" rIns="0" tIns="0" bIns="0">
+            <a:spAutoFit/>
+          </a:bodyPr>
+          <a:lstStyle/>
+          <a:p>
+            <a:pPr algn="l">
+              <a:lnSpc>
+                <a:spcPct val="110000"/>
+              </a:lnSpc>
+              <a:spcAft>
+                <a:spcPts val="0"/>
               </a:spcAft>
             </a:pPr>
             <a:r>
@@ -5781,8 +5125,41 @@
                 </a:solidFill>
                 <a:latin typeface="Calibri"/>
               </a:rPr>
-              <a:t>Stencil at the departure point. </a:t>
-            </a:r>
+              <a:t>THE AUDIT</a:t>
+            </a:r>
+          </a:p>
+        </p:txBody>
+      </p:sp>
+      <p:sp>
+        <p:nvSpPr>
+          <p:cNvPr id="9" name="TextBox 8"/>
+          <p:cNvSpPr txBox="1"/>
+          <p:nvPr/>
+        </p:nvSpPr>
+        <p:spPr>
+          <a:xfrm>
+            <a:off x="6309360" y="2240280"/>
+            <a:ext cx="5120640" cy="4114800"/>
+          </a:xfrm>
+          <a:prstGeom prst="rect">
+            <a:avLst/>
+          </a:prstGeom>
+          <a:noFill/>
+        </p:spPr>
+        <p:txBody>
+          <a:bodyPr wrap="square" lIns="0" rIns="0" tIns="0" bIns="0">
+            <a:spAutoFit/>
+          </a:bodyPr>
+          <a:lstStyle/>
+          <a:p>
+            <a:pPr algn="l">
+              <a:lnSpc>
+                <a:spcPct val="110000"/>
+              </a:lnSpc>
+              <a:spcAft>
+                <a:spcPts val="700"/>
+              </a:spcAft>
+            </a:pPr>
             <a:r>
               <a:rPr sz="2000" b="0" i="0">
                 <a:solidFill>
@@ -5790,27 +5167,18 @@
                 </a:solidFill>
                 <a:latin typeface="Calibri"/>
               </a:rPr>
-              <a:t>Shifting b and differentiating measures the residual DG/Dt − 2F (≈ 0 under pure strain); the departure stencil measures DG/Dt.</a:t>
-            </a:r>
-          </a:p>
-          <a:p>
-            <a:pPr algn="l">
-              <a:lnSpc>
-                <a:spcPct val="105000"/>
-              </a:lnSpc>
-              <a:spcAft>
-                <a:spcPts val="900"/>
-              </a:spcAft>
-            </a:pPr>
-            <a:r>
-              <a:rPr sz="2000" b="1" i="0">
-                <a:solidFill>
-                  <a:srgbClr val="065A82"/>
-                </a:solidFill>
-                <a:latin typeface="Calibri"/>
-              </a:rPr>
-              <a:t>The divergent subfilter correction τ_δ. </a:t>
-            </a:r>
+              <a:t>•  Suite: 84 passed, 3 xfailed in 98 s; offline 66 passed, 18 deselected.</a:t>
+            </a:r>
+          </a:p>
+          <a:p>
+            <a:pPr algn="l">
+              <a:lnSpc>
+                <a:spcPct val="110000"/>
+              </a:lnSpc>
+              <a:spcAft>
+                <a:spcPts val="700"/>
+              </a:spcAft>
+            </a:pPr>
             <a:r>
               <a:rPr sz="2000" b="0" i="0">
                 <a:solidFill>
@@ -5818,27 +5186,18 @@
                 </a:solidFill>
                 <a:latin typeface="Calibri"/>
               </a:rPr>
-              <a:t>Without it the flux form leaves 38-44% of the budget unclosed on a divergent flow and overstates the term 2.2x on hour 0.</a:t>
-            </a:r>
-          </a:p>
-          <a:p>
-            <a:pPr algn="l">
-              <a:lnSpc>
-                <a:spcPct val="105000"/>
-              </a:lnSpc>
-              <a:spcAft>
-                <a:spcPts val="900"/>
-              </a:spcAft>
-            </a:pPr>
-            <a:r>
-              <a:rPr sz="2000" b="1" i="0">
-                <a:solidFill>
-                  <a:srgbClr val="065A82"/>
-                </a:solidFill>
-                <a:latin typeface="Calibri"/>
-              </a:rPr>
-              <a:t>V3b closes the 0.85x question. </a:t>
-            </a:r>
+              <a:t>•  Seven PNGs in figs/: five tracked (9be37dc), V3 and V3b untracked and shown; none ignored.</a:t>
+            </a:r>
+          </a:p>
+          <a:p>
+            <a:pPr algn="l">
+              <a:lnSpc>
+                <a:spcPct val="110000"/>
+              </a:lnSpc>
+              <a:spcAft>
+                <a:spcPts val="700"/>
+              </a:spcAft>
+            </a:pPr>
             <a:r>
               <a:rPr sz="2000" b="0" i="0">
                 <a:solidFill>
@@ -5846,27 +5205,18 @@
                 </a:solidFill>
                 <a:latin typeface="Calibri"/>
               </a:rPr>
-              <a:t>A flux-form OS7MP-like truth shifts the slope by −0.006 ± 0.025: the Jacobian attenuation is the resolved G's consistent view of the strain, not a bias. Shortfall per width: −2 / −4 / −11% at 2 / 1.5 / 1 dx.</a:t>
-            </a:r>
-          </a:p>
-          <a:p>
-            <a:pPr algn="l">
-              <a:lnSpc>
-                <a:spcPct val="105000"/>
-              </a:lnSpc>
-              <a:spcAft>
-                <a:spcPts val="900"/>
-              </a:spcAft>
-            </a:pPr>
-            <a:r>
-              <a:rPr sz="2000" b="1" i="0">
-                <a:solidFill>
-                  <a:srgbClr val="065A82"/>
-                </a:solidFill>
-                <a:latin typeface="Calibri"/>
-              </a:rPr>
-              <a:t>Planning §2.4 sign. </a:t>
-            </a:r>
+              <a:t>•  Criteria 1-7 each PASS with the numbers of the next slide; every 'Discharges' line honoured, nothing claimed twice.</a:t>
+            </a:r>
+          </a:p>
+          <a:p>
+            <a:pPr algn="l">
+              <a:lnSpc>
+                <a:spcPct val="110000"/>
+              </a:lnSpc>
+              <a:spcAft>
+                <a:spcPts val="700"/>
+              </a:spcAft>
+            </a:pPr>
             <a:r>
               <a:rPr sz="2000" b="0" i="0">
                 <a:solidFill>
@@ -5874,7 +5224,7 @@
                 </a:solidFill>
                 <a:latin typeface="Calibri"/>
               </a:rPr>
-              <a:t>F = −½δG + ½|σ|G cos 2θ with θ from the compressional axis (plus, not minus). Final, M1-Q3.</a:t>
+              <a:t>•  Open issues carried to M2-M4: the fronts bugs, prompt 5's tile_find path, the NaN recipe, M3's requirements, the V3b band.</a:t>
             </a:r>
           </a:p>
         </p:txBody>
@@ -5912,7 +5262,7 @@
             <a:avLst/>
           </a:prstGeom>
           <a:solidFill>
-            <a:srgbClr val="F2F6F8"/>
+            <a:srgbClr val="21295C"/>
           </a:solidFill>
           <a:ln>
             <a:noFill/>
@@ -5950,7 +5300,7 @@
         <p:spPr>
           <a:xfrm>
             <a:off x="777240" y="347472"/>
-            <a:ext cx="10698480" cy="329184"/>
+            <a:ext cx="10698480" cy="594360"/>
           </a:xfrm>
           <a:prstGeom prst="rect">
             <a:avLst/>
@@ -5972,13 +5322,13 @@
               </a:spcAft>
             </a:pPr>
             <a:r>
-              <a:rPr sz="2000" b="1" i="0">
-                <a:solidFill>
-                  <a:srgbClr val="1C7293"/>
-                </a:solidFill>
-                <a:latin typeface="Calibri"/>
-              </a:rPr>
-              <a:t>M1-Q1 .. Q15</a:t>
+              <a:rPr sz="3000" b="1" i="0">
+                <a:solidFill>
+                  <a:srgbClr val="FFFFFF"/>
+                </a:solidFill>
+                <a:latin typeface="Cambria"/>
+              </a:rPr>
+              <a:t>M1 acceptance</a:t>
             </a:r>
           </a:p>
         </p:txBody>
@@ -5991,8 +5341,8 @@
         </p:nvSpPr>
         <p:spPr>
           <a:xfrm>
-            <a:off x="777240" y="676656"/>
-            <a:ext cx="10698480" cy="594360"/>
+            <a:off x="777240" y="950976"/>
+            <a:ext cx="10698480" cy="384048"/>
           </a:xfrm>
           <a:prstGeom prst="rect">
             <a:avLst/>
@@ -6014,237 +5364,33 @@
               </a:spcAft>
             </a:pPr>
             <a:r>
-              <a:rPr sz="3000" b="1" i="0">
-                <a:solidFill>
-                  <a:srgbClr val="21295C"/>
-                </a:solidFill>
-                <a:latin typeface="Cambria"/>
-              </a:rPr>
-              <a:t>Decisions and open issues</a:t>
-            </a:r>
-          </a:p>
-        </p:txBody>
-      </p:sp>
-      <p:sp>
-        <p:nvSpPr>
-          <p:cNvPr id="5" name="TextBox 4"/>
-          <p:cNvSpPr txBox="1"/>
-          <p:nvPr/>
-        </p:nvSpPr>
-        <p:spPr>
-          <a:xfrm>
-            <a:off x="777240" y="1280160"/>
-            <a:ext cx="10698480" cy="384048"/>
-          </a:xfrm>
-          <a:prstGeom prst="rect">
-            <a:avLst/>
-          </a:prstGeom>
-          <a:noFill/>
-        </p:spPr>
-        <p:txBody>
-          <a:bodyPr wrap="square" lIns="0" rIns="0" tIns="0" bIns="0">
-            <a:spAutoFit/>
-          </a:bodyPr>
-          <a:lstStyle/>
-          <a:p>
-            <a:pPr algn="l">
-              <a:lnSpc>
-                <a:spcPct val="110000"/>
-              </a:lnSpc>
-              <a:spcAft>
-                <a:spcPts val="0"/>
-              </a:spcAft>
-            </a:pPr>
-            <a:r>
               <a:rPr sz="2000" b="0" i="0">
                 <a:solidFill>
-                  <a:srgbClr val="62737F"/>
-                </a:solidFill>
-                <a:latin typeface="Calibri"/>
-              </a:rPr>
-              <a:t>What shapes M3 and M4, and the fronts fixes JXP chose to make on this branch</a:t>
-            </a:r>
-          </a:p>
-        </p:txBody>
-      </p:sp>
-      <p:sp>
-        <p:nvSpPr>
-          <p:cNvPr id="6" name="TextBox 5"/>
-          <p:cNvSpPr txBox="1"/>
-          <p:nvPr/>
-        </p:nvSpPr>
-        <p:spPr>
-          <a:xfrm>
-            <a:off x="777240" y="1783080"/>
-            <a:ext cx="5120640" cy="365760"/>
-          </a:xfrm>
-          <a:prstGeom prst="rect">
-            <a:avLst/>
-          </a:prstGeom>
-          <a:noFill/>
-        </p:spPr>
-        <p:txBody>
-          <a:bodyPr wrap="square" lIns="0" rIns="0" tIns="0" bIns="0">
-            <a:spAutoFit/>
-          </a:bodyPr>
-          <a:lstStyle/>
-          <a:p>
-            <a:pPr algn="l">
-              <a:lnSpc>
-                <a:spcPct val="110000"/>
-              </a:lnSpc>
-              <a:spcAft>
-                <a:spcPts val="0"/>
-              </a:spcAft>
-            </a:pPr>
-            <a:r>
-              <a:rPr sz="2000" b="1" i="0">
-                <a:solidFill>
-                  <a:srgbClr val="065A82"/>
-                </a:solidFill>
-                <a:latin typeface="Calibri"/>
-              </a:rPr>
-              <a:t>SHAPES M3 / M4</a:t>
-            </a:r>
-          </a:p>
-        </p:txBody>
-      </p:sp>
-      <p:sp>
-        <p:nvSpPr>
-          <p:cNvPr id="7" name="TextBox 6"/>
-          <p:cNvSpPr txBox="1"/>
-          <p:nvPr/>
-        </p:nvSpPr>
-        <p:spPr>
-          <a:xfrm>
-            <a:off x="777240" y="2240280"/>
-            <a:ext cx="5120640" cy="4206240"/>
-          </a:xfrm>
-          <a:prstGeom prst="rect">
-            <a:avLst/>
-          </a:prstGeom>
-          <a:noFill/>
-        </p:spPr>
-        <p:txBody>
-          <a:bodyPr wrap="square" lIns="0" rIns="0" tIns="0" bIns="0">
-            <a:spAutoFit/>
-          </a:bodyPr>
-          <a:lstStyle/>
-          <a:p>
-            <a:pPr algn="l">
-              <a:lnSpc>
-                <a:spcPct val="110000"/>
-              </a:lnSpc>
-              <a:spcAft>
-                <a:spcPts val="600"/>
-              </a:spcAft>
-            </a:pPr>
-            <a:r>
-              <a:rPr sz="2000" b="0" i="0">
-                <a:solidFill>
-                  <a:srgbClr val="1B2A33"/>
-                </a:solidFill>
-                <a:latin typeface="Calibri"/>
-              </a:rPr>
-              <a:t>•  Q1: both forms of F; discrete primary, chain as a stated systematic.</a:t>
-            </a:r>
-          </a:p>
-          <a:p>
-            <a:pPr algn="l">
-              <a:lnSpc>
-                <a:spcPct val="110000"/>
-              </a:lnSpc>
-              <a:spcAft>
-                <a:spcPts val="600"/>
-              </a:spcAft>
-            </a:pPr>
-            <a:r>
-              <a:rPr sz="2000" b="0" i="0">
-                <a:solidFill>
-                  <a:srgbClr val="1B2A33"/>
-                </a:solidFill>
-                <a:latin typeface="Calibri"/>
-              </a:rPr>
-              <a:t>•  Q2 / Q4: Figure 2 at 0.981 with its band; systematic 0.954-1.003; no upward correction.</a:t>
-            </a:r>
-          </a:p>
-          <a:p>
-            <a:pPr algn="l">
-              <a:lnSpc>
-                <a:spcPct val="110000"/>
-              </a:lnSpc>
-              <a:spcAft>
-                <a:spcPts val="600"/>
-              </a:spcAft>
-            </a:pPr>
-            <a:r>
-              <a:rPr sz="2000" b="0" i="0">
-                <a:solidFill>
-                  <a:srgbClr val="1B2A33"/>
-                </a:solidFill>
-                <a:latin typeface="Calibri"/>
-              </a:rPr>
-              <a:t>•  Q5 / Q6: V1 at 8 dx; V4 bar 0.28-1.0% of G/h at order 3; order 5 as a sensitivity.</a:t>
-            </a:r>
-          </a:p>
-          <a:p>
-            <a:pPr algn="l">
-              <a:lnSpc>
-                <a:spcPct val="110000"/>
-              </a:lnSpc>
-              <a:spcAft>
-                <a:spcPts val="600"/>
-              </a:spcAft>
-            </a:pPr>
-            <a:r>
-              <a:rPr sz="2000" b="0" i="0">
-                <a:solidFill>
-                  <a:srgbClr val="1B2A33"/>
-                </a:solidFill>
-                <a:latin typeface="Calibri"/>
-              </a:rPr>
-              <a:t>•  Subtract the numerics shortfall first: −2 / −4 / −11% at 2 / 1.5 / 1 dx.</a:t>
-            </a:r>
-          </a:p>
-          <a:p>
-            <a:pPr algn="l">
-              <a:lnSpc>
-                <a:spcPct val="110000"/>
-              </a:lnSpc>
-              <a:spcAft>
-                <a:spcPts val="600"/>
-              </a:spcAft>
-            </a:pPr>
-            <a:r>
-              <a:rPr sz="2000" b="0" i="0">
-                <a:solidFill>
-                  <a:srgbClr val="1B2A33"/>
-                </a:solidFill>
-                <a:latin typeface="Calibri"/>
-              </a:rPr>
-              <a:t>•  Pass τ_δ to subfilter_term; split the ratio estimator by the sign of 2F.</a:t>
-            </a:r>
-          </a:p>
-        </p:txBody>
-      </p:sp>
-      <p:sp>
-        <p:nvSpPr>
-          <p:cNvPr id="8" name="Rounded Rectangle 7"/>
+                  <a:srgbClr val="8FBFD0"/>
+                </a:solidFill>
+                <a:latin typeface="Calibri"/>
+              </a:rPr>
+              <a:t>All seven criteria, as audited in the task-7 log entry</a:t>
+            </a:r>
+          </a:p>
+        </p:txBody>
+      </p:sp>
+      <p:sp>
+        <p:nvSpPr>
+          <p:cNvPr id="5" name="Oval 4"/>
           <p:cNvSpPr/>
           <p:nvPr/>
         </p:nvSpPr>
         <p:spPr>
           <a:xfrm>
-            <a:off x="6172200" y="1737360"/>
-            <a:ext cx="5257800" cy="4754880"/>
-          </a:xfrm>
-          <a:prstGeom prst="roundRect">
-            <a:avLst>
-              <a:gd name="adj" fmla="val 7000"/>
-            </a:avLst>
+            <a:off x="822960" y="1673352"/>
+            <a:ext cx="384048" cy="384048"/>
+          </a:xfrm>
+          <a:prstGeom prst="ellipse">
+            <a:avLst/>
           </a:prstGeom>
           <a:solidFill>
-            <a:srgbClr val="FAEFE4"/>
+            <a:srgbClr val="2C6E49"/>
           </a:solidFill>
           <a:ln>
             <a:noFill/>
@@ -6266,23 +5412,32 @@
           </a:fontRef>
         </p:style>
         <p:txBody>
-          <a:bodyPr rtlCol="0" anchor="ctr"/>
+          <a:bodyPr rtlCol="0" anchor="ctr" lIns="0" rIns="0" tIns="0" bIns="0" wrap="none"/>
           <a:lstStyle/>
           <a:p>
             <a:pPr algn="ctr"/>
-          </a:p>
-        </p:txBody>
-      </p:sp>
-      <p:sp>
-        <p:nvSpPr>
-          <p:cNvPr id="9" name="TextBox 8"/>
+            <a:r>
+              <a:rPr sz="2000" b="1" i="0">
+                <a:solidFill>
+                  <a:srgbClr val="FFFFFF"/>
+                </a:solidFill>
+                <a:latin typeface="Calibri"/>
+              </a:rPr>
+              <a:t>✓</a:t>
+            </a:r>
+          </a:p>
+        </p:txBody>
+      </p:sp>
+      <p:sp>
+        <p:nvSpPr>
+          <p:cNvPr id="6" name="TextBox 5"/>
           <p:cNvSpPr txBox="1"/>
           <p:nvPr/>
         </p:nvSpPr>
         <p:spPr>
           <a:xfrm>
-            <a:off x="6446520" y="1874519"/>
-            <a:ext cx="4754880" cy="731520"/>
+            <a:off x="1417320" y="1645920"/>
+            <a:ext cx="9966960" cy="640080"/>
           </a:xfrm>
           <a:prstGeom prst="rect">
             <a:avLst/>
@@ -6306,20 +5461,177 @@
             <a:r>
               <a:rPr sz="2000" b="1" i="0">
                 <a:solidFill>
-                  <a:srgbClr val="A8501B"/>
-                </a:solidFill>
-                <a:latin typeface="Calibri"/>
-              </a:rPr>
-              <a:t>NEXT: fronts FIXES — not yet applied. </a:t>
+                  <a:srgbClr val="FFFFFF"/>
+                </a:solidFill>
+                <a:latin typeface="Calibri"/>
+              </a:rPr>
+              <a:t>V1 Cartesian deformation  </a:t>
             </a:r>
             <a:r>
               <a:rPr sz="2000" b="0" i="0">
                 <a:solidFill>
-                  <a:srgbClr val="A8501B"/>
-                </a:solidFill>
-                <a:latin typeface="Calibri"/>
-              </a:rPr>
-              <a:t>Q9: on this frontogenesis branch; JXP tells Lauren.</a:t>
+                  <a:srgbClr val="8FBFD0"/>
+                </a:solidFill>
+                <a:latin typeface="Calibri"/>
+              </a:rPr>
+              <a:t>0.78% at ell = 8 dx over 8 h  (&lt; 1%)</a:t>
+            </a:r>
+          </a:p>
+        </p:txBody>
+      </p:sp>
+      <p:sp>
+        <p:nvSpPr>
+          <p:cNvPr id="7" name="Oval 6"/>
+          <p:cNvSpPr/>
+          <p:nvPr/>
+        </p:nvSpPr>
+        <p:spPr>
+          <a:xfrm>
+            <a:off x="822960" y="2221991"/>
+            <a:ext cx="384048" cy="384048"/>
+          </a:xfrm>
+          <a:prstGeom prst="ellipse">
+            <a:avLst/>
+          </a:prstGeom>
+          <a:solidFill>
+            <a:srgbClr val="2C6E49"/>
+          </a:solidFill>
+          <a:ln>
+            <a:noFill/>
+          </a:ln>
+          <a:effectLst/>
+        </p:spPr>
+        <p:style>
+          <a:lnRef idx="1">
+            <a:schemeClr val="accent1"/>
+          </a:lnRef>
+          <a:fillRef idx="3">
+            <a:schemeClr val="accent1"/>
+          </a:fillRef>
+          <a:effectRef idx="2">
+            <a:schemeClr val="accent1"/>
+          </a:effectRef>
+          <a:fontRef idx="minor">
+            <a:schemeClr val="lt1"/>
+          </a:fontRef>
+        </p:style>
+        <p:txBody>
+          <a:bodyPr rtlCol="0" anchor="ctr" lIns="0" rIns="0" tIns="0" bIns="0" wrap="none"/>
+          <a:lstStyle/>
+          <a:p>
+            <a:pPr algn="ctr"/>
+            <a:r>
+              <a:rPr sz="2000" b="1" i="0">
+                <a:solidFill>
+                  <a:srgbClr val="FFFFFF"/>
+                </a:solidFill>
+                <a:latin typeface="Calibri"/>
+              </a:rPr>
+              <a:t>✓</a:t>
+            </a:r>
+          </a:p>
+        </p:txBody>
+      </p:sp>
+      <p:sp>
+        <p:nvSpPr>
+          <p:cNvPr id="8" name="TextBox 7"/>
+          <p:cNvSpPr txBox="1"/>
+          <p:nvPr/>
+        </p:nvSpPr>
+        <p:spPr>
+          <a:xfrm>
+            <a:off x="1417320" y="2194560"/>
+            <a:ext cx="9966960" cy="640080"/>
+          </a:xfrm>
+          <a:prstGeom prst="rect">
+            <a:avLst/>
+          </a:prstGeom>
+          <a:noFill/>
+        </p:spPr>
+        <p:txBody>
+          <a:bodyPr wrap="square" lIns="0" rIns="0" tIns="0" bIns="0">
+            <a:spAutoFit/>
+          </a:bodyPr>
+          <a:lstStyle/>
+          <a:p>
+            <a:pPr algn="l">
+              <a:lnSpc>
+                <a:spcPct val="105000"/>
+              </a:lnSpc>
+              <a:spcAft>
+                <a:spcPts val="0"/>
+              </a:spcAft>
+            </a:pPr>
+            <a:r>
+              <a:rPr sz="2000" b="1" i="0">
+                <a:solidFill>
+                  <a:srgbClr val="FFFFFF"/>
+                </a:solidFill>
+                <a:latin typeface="Calibri"/>
+              </a:rPr>
+              <a:t>V2 native-grid metric  </a:t>
+            </a:r>
+            <a:r>
+              <a:rPr sz="2000" b="0" i="0">
+                <a:solidFill>
+                  <a:srgbClr val="8FBFD0"/>
+                </a:solidFill>
+                <a:latin typeface="Calibri"/>
+              </a:rPr>
+              <a:t>b_x max 0.077%, b_y 0.041%  (&lt; 1%)</a:t>
+            </a:r>
+          </a:p>
+        </p:txBody>
+      </p:sp>
+      <p:sp>
+        <p:nvSpPr>
+          <p:cNvPr id="9" name="Oval 8"/>
+          <p:cNvSpPr/>
+          <p:nvPr/>
+        </p:nvSpPr>
+        <p:spPr>
+          <a:xfrm>
+            <a:off x="822960" y="2770632"/>
+            <a:ext cx="384048" cy="384048"/>
+          </a:xfrm>
+          <a:prstGeom prst="ellipse">
+            <a:avLst/>
+          </a:prstGeom>
+          <a:solidFill>
+            <a:srgbClr val="2C6E49"/>
+          </a:solidFill>
+          <a:ln>
+            <a:noFill/>
+          </a:ln>
+          <a:effectLst/>
+        </p:spPr>
+        <p:style>
+          <a:lnRef idx="1">
+            <a:schemeClr val="accent1"/>
+          </a:lnRef>
+          <a:fillRef idx="3">
+            <a:schemeClr val="accent1"/>
+          </a:fillRef>
+          <a:effectRef idx="2">
+            <a:schemeClr val="accent1"/>
+          </a:effectRef>
+          <a:fontRef idx="minor">
+            <a:schemeClr val="lt1"/>
+          </a:fontRef>
+        </p:style>
+        <p:txBody>
+          <a:bodyPr rtlCol="0" anchor="ctr" lIns="0" rIns="0" tIns="0" bIns="0" wrap="none"/>
+          <a:lstStyle/>
+          <a:p>
+            <a:pPr algn="ctr"/>
+            <a:r>
+              <a:rPr sz="2000" b="1" i="0">
+                <a:solidFill>
+                  <a:srgbClr val="FFFFFF"/>
+                </a:solidFill>
+                <a:latin typeface="Calibri"/>
+              </a:rPr>
+              <a:t>✓</a:t>
             </a:r>
           </a:p>
         </p:txBody>
@@ -6332,8 +5644,8 @@
         </p:nvSpPr>
         <p:spPr>
           <a:xfrm>
-            <a:off x="6446520" y="2697480"/>
-            <a:ext cx="4754880" cy="3749039"/>
+            <a:off x="1417320" y="2743200"/>
+            <a:ext cx="9966960" cy="640080"/>
           </a:xfrm>
           <a:prstGeom prst="rect">
             <a:avLst/>
@@ -6348,96 +5660,533 @@
           <a:p>
             <a:pPr algn="l">
               <a:lnSpc>
-                <a:spcPct val="110000"/>
-              </a:lnSpc>
-              <a:spcAft>
-                <a:spcPts val="500"/>
-              </a:spcAft>
-            </a:pPr>
+                <a:spcPct val="105000"/>
+              </a:lnSpc>
+              <a:spcAft>
+                <a:spcPts val="0"/>
+              </a:spcAft>
+            </a:pPr>
+            <a:r>
+              <a:rPr sz="2000" b="1" i="0">
+                <a:solidFill>
+                  <a:srgbClr val="FFFFFF"/>
+                </a:solidFill>
+                <a:latin typeface="Calibri"/>
+              </a:rPr>
+              <a:t>V3 discrete null  </a:t>
+            </a:r>
             <a:r>
               <a:rPr sz="2000" b="0" i="0">
                 <a:solidFill>
-                  <a:srgbClr val="1B2A33"/>
-                </a:solidFill>
-                <a:latin typeface="Calibri"/>
-              </a:rPr>
-              <a:t>•  Q10: n_workers=None → os.cpu_count(); document the __main__ guard.</a:t>
-            </a:r>
-          </a:p>
-          <a:p>
-            <a:pPr algn="l">
-              <a:lnSpc>
-                <a:spcPct val="110000"/>
-              </a:lnSpc>
-              <a:spcAft>
-                <a:spcPts val="500"/>
-              </a:spcAft>
-            </a:pPr>
+                  <a:srgbClr val="8FBFD0"/>
+                </a:solidFill>
+                <a:latin typeface="Calibri"/>
+              </a:rPr>
+              <a:t>1.004 [0.995, 1.017] strain, 0.981 [0.970, 0.994] llc  (1 ± 0.05); V3b recorded 0.975 [0.954, 1.003]</a:t>
+            </a:r>
+          </a:p>
+        </p:txBody>
+      </p:sp>
+      <p:sp>
+        <p:nvSpPr>
+          <p:cNvPr id="11" name="Oval 10"/>
+          <p:cNvSpPr/>
+          <p:nvPr/>
+        </p:nvSpPr>
+        <p:spPr>
+          <a:xfrm>
+            <a:off x="822960" y="3639312"/>
+            <a:ext cx="384048" cy="384048"/>
+          </a:xfrm>
+          <a:prstGeom prst="ellipse">
+            <a:avLst/>
+          </a:prstGeom>
+          <a:solidFill>
+            <a:srgbClr val="2C6E49"/>
+          </a:solidFill>
+          <a:ln>
+            <a:noFill/>
+          </a:ln>
+          <a:effectLst/>
+        </p:spPr>
+        <p:style>
+          <a:lnRef idx="1">
+            <a:schemeClr val="accent1"/>
+          </a:lnRef>
+          <a:fillRef idx="3">
+            <a:schemeClr val="accent1"/>
+          </a:fillRef>
+          <a:effectRef idx="2">
+            <a:schemeClr val="accent1"/>
+          </a:effectRef>
+          <a:fontRef idx="minor">
+            <a:schemeClr val="lt1"/>
+          </a:fontRef>
+        </p:style>
+        <p:txBody>
+          <a:bodyPr rtlCol="0" anchor="ctr" lIns="0" rIns="0" tIns="0" bIns="0" wrap="none"/>
+          <a:lstStyle/>
+          <a:p>
+            <a:pPr algn="ctr"/>
+            <a:r>
+              <a:rPr sz="2000" b="1" i="0">
+                <a:solidFill>
+                  <a:srgbClr val="FFFFFF"/>
+                </a:solidFill>
+                <a:latin typeface="Calibri"/>
+              </a:rPr>
+              <a:t>✓</a:t>
+            </a:r>
+          </a:p>
+        </p:txBody>
+      </p:sp>
+      <p:sp>
+        <p:nvSpPr>
+          <p:cNvPr id="12" name="TextBox 11"/>
+          <p:cNvSpPr txBox="1"/>
+          <p:nvPr/>
+        </p:nvSpPr>
+        <p:spPr>
+          <a:xfrm>
+            <a:off x="1417320" y="3611880"/>
+            <a:ext cx="9966960" cy="640080"/>
+          </a:xfrm>
+          <a:prstGeom prst="rect">
+            <a:avLst/>
+          </a:prstGeom>
+          <a:noFill/>
+        </p:spPr>
+        <p:txBody>
+          <a:bodyPr wrap="square" lIns="0" rIns="0" tIns="0" bIns="0">
+            <a:spAutoFit/>
+          </a:bodyPr>
+          <a:lstStyle/>
+          <a:p>
+            <a:pPr algn="l">
+              <a:lnSpc>
+                <a:spcPct val="105000"/>
+              </a:lnSpc>
+              <a:spcAft>
+                <a:spcPts val="0"/>
+              </a:spcAft>
+            </a:pPr>
+            <a:r>
+              <a:rPr sz="2000" b="1" i="0">
+                <a:solidFill>
+                  <a:srgbClr val="FFFFFF"/>
+                </a:solidFill>
+                <a:latin typeface="Calibri"/>
+              </a:rPr>
+              <a:t>V4 interpolation bias  </a:t>
+            </a:r>
             <a:r>
               <a:rPr sz="2000" b="0" i="0">
                 <a:solidFill>
-                  <a:srgbClr val="1B2A33"/>
-                </a:solidFill>
-                <a:latin typeface="Calibri"/>
-              </a:rPr>
-              <a:t>•  Q11: fronts &amp;= isfinite(gradb2) after cropping and dilation.</a:t>
-            </a:r>
-          </a:p>
-          <a:p>
-            <a:pPr algn="l">
-              <a:lnSpc>
-                <a:spcPct val="110000"/>
-              </a:lnSpc>
-              <a:spcAft>
-                <a:spcPts val="500"/>
-              </a:spcAft>
-            </a:pPr>
+                  <a:srgbClr val="8FBFD0"/>
+                </a:solidFill>
+                <a:latin typeface="Calibri"/>
+              </a:rPr>
+              <a:t>recorded: 0.28-1.0% of G per hour at order 3</a:t>
+            </a:r>
+          </a:p>
+        </p:txBody>
+      </p:sp>
+      <p:sp>
+        <p:nvSpPr>
+          <p:cNvPr id="13" name="Oval 12"/>
+          <p:cNvSpPr/>
+          <p:nvPr/>
+        </p:nvSpPr>
+        <p:spPr>
+          <a:xfrm>
+            <a:off x="822960" y="4187952"/>
+            <a:ext cx="384048" cy="384048"/>
+          </a:xfrm>
+          <a:prstGeom prst="ellipse">
+            <a:avLst/>
+          </a:prstGeom>
+          <a:solidFill>
+            <a:srgbClr val="2C6E49"/>
+          </a:solidFill>
+          <a:ln>
+            <a:noFill/>
+          </a:ln>
+          <a:effectLst/>
+        </p:spPr>
+        <p:style>
+          <a:lnRef idx="1">
+            <a:schemeClr val="accent1"/>
+          </a:lnRef>
+          <a:fillRef idx="3">
+            <a:schemeClr val="accent1"/>
+          </a:fillRef>
+          <a:effectRef idx="2">
+            <a:schemeClr val="accent1"/>
+          </a:effectRef>
+          <a:fontRef idx="minor">
+            <a:schemeClr val="lt1"/>
+          </a:fontRef>
+        </p:style>
+        <p:txBody>
+          <a:bodyPr rtlCol="0" anchor="ctr" lIns="0" rIns="0" tIns="0" bIns="0" wrap="none"/>
+          <a:lstStyle/>
+          <a:p>
+            <a:pPr algn="ctr"/>
+            <a:r>
+              <a:rPr sz="2000" b="1" i="0">
+                <a:solidFill>
+                  <a:srgbClr val="FFFFFF"/>
+                </a:solidFill>
+                <a:latin typeface="Calibri"/>
+              </a:rPr>
+              <a:t>✓</a:t>
+            </a:r>
+          </a:p>
+        </p:txBody>
+      </p:sp>
+      <p:sp>
+        <p:nvSpPr>
+          <p:cNvPr id="14" name="TextBox 13"/>
+          <p:cNvSpPr txBox="1"/>
+          <p:nvPr/>
+        </p:nvSpPr>
+        <p:spPr>
+          <a:xfrm>
+            <a:off x="1417320" y="4160520"/>
+            <a:ext cx="9966960" cy="640080"/>
+          </a:xfrm>
+          <a:prstGeom prst="rect">
+            <a:avLst/>
+          </a:prstGeom>
+          <a:noFill/>
+        </p:spPr>
+        <p:txBody>
+          <a:bodyPr wrap="square" lIns="0" rIns="0" tIns="0" bIns="0">
+            <a:spAutoFit/>
+          </a:bodyPr>
+          <a:lstStyle/>
+          <a:p>
+            <a:pPr algn="l">
+              <a:lnSpc>
+                <a:spcPct val="105000"/>
+              </a:lnSpc>
+              <a:spcAft>
+                <a:spcPts val="0"/>
+              </a:spcAft>
+            </a:pPr>
+            <a:r>
+              <a:rPr sz="2000" b="1" i="0">
+                <a:solidFill>
+                  <a:srgbClr val="FFFFFF"/>
+                </a:solidFill>
+                <a:latin typeface="Calibri"/>
+              </a:rPr>
+              <a:t>PNGs V1-V6 (+ V3b)  </a:t>
+            </a:r>
             <a:r>
               <a:rPr sz="2000" b="0" i="0">
                 <a:solidFill>
-                  <a:srgbClr val="1B2A33"/>
-                </a:solidFill>
-                <a:latin typeface="Calibri"/>
-              </a:rPr>
-              <a:t>•  Q12: despur returns early on an empty skeleton.</a:t>
-            </a:r>
-          </a:p>
-          <a:p>
-            <a:pPr algn="l">
-              <a:lnSpc>
-                <a:spcPct val="110000"/>
-              </a:lnSpc>
-              <a:spcAft>
-                <a:spcPts val="500"/>
-              </a:spcAft>
-            </a:pPr>
+                  <a:srgbClr val="8FBFD0"/>
+                </a:solidFill>
+                <a:latin typeface="Calibri"/>
+              </a:rPr>
+              <a:t>all seven in figs/ and in git status; V6 shows the edge rim</a:t>
+            </a:r>
+          </a:p>
+        </p:txBody>
+      </p:sp>
+      <p:sp>
+        <p:nvSpPr>
+          <p:cNvPr id="15" name="Oval 14"/>
+          <p:cNvSpPr/>
+          <p:nvPr/>
+        </p:nvSpPr>
+        <p:spPr>
+          <a:xfrm>
+            <a:off x="822960" y="4736592"/>
+            <a:ext cx="384048" cy="384048"/>
+          </a:xfrm>
+          <a:prstGeom prst="ellipse">
+            <a:avLst/>
+          </a:prstGeom>
+          <a:solidFill>
+            <a:srgbClr val="2C6E49"/>
+          </a:solidFill>
+          <a:ln>
+            <a:noFill/>
+          </a:ln>
+          <a:effectLst/>
+        </p:spPr>
+        <p:style>
+          <a:lnRef idx="1">
+            <a:schemeClr val="accent1"/>
+          </a:lnRef>
+          <a:fillRef idx="3">
+            <a:schemeClr val="accent1"/>
+          </a:fillRef>
+          <a:effectRef idx="2">
+            <a:schemeClr val="accent1"/>
+          </a:effectRef>
+          <a:fontRef idx="minor">
+            <a:schemeClr val="lt1"/>
+          </a:fontRef>
+        </p:style>
+        <p:txBody>
+          <a:bodyPr rtlCol="0" anchor="ctr" lIns="0" rIns="0" tIns="0" bIns="0" wrap="none"/>
+          <a:lstStyle/>
+          <a:p>
+            <a:pPr algn="ctr"/>
+            <a:r>
+              <a:rPr sz="2000" b="1" i="0">
+                <a:solidFill>
+                  <a:srgbClr val="FFFFFF"/>
+                </a:solidFill>
+                <a:latin typeface="Calibri"/>
+              </a:rPr>
+              <a:t>✓</a:t>
+            </a:r>
+          </a:p>
+        </p:txBody>
+      </p:sp>
+      <p:sp>
+        <p:nvSpPr>
+          <p:cNvPr id="16" name="TextBox 15"/>
+          <p:cNvSpPr txBox="1"/>
+          <p:nvPr/>
+        </p:nvSpPr>
+        <p:spPr>
+          <a:xfrm>
+            <a:off x="1417320" y="4709159"/>
+            <a:ext cx="9966960" cy="640080"/>
+          </a:xfrm>
+          <a:prstGeom prst="rect">
+            <a:avLst/>
+          </a:prstGeom>
+          <a:noFill/>
+        </p:spPr>
+        <p:txBody>
+          <a:bodyPr wrap="square" lIns="0" rIns="0" tIns="0" bIns="0">
+            <a:spAutoFit/>
+          </a:bodyPr>
+          <a:lstStyle/>
+          <a:p>
+            <a:pPr algn="l">
+              <a:lnSpc>
+                <a:spcPct val="105000"/>
+              </a:lnSpc>
+              <a:spcAft>
+                <a:spcPts val="0"/>
+              </a:spcAft>
+            </a:pPr>
+            <a:r>
+              <a:rPr sz="2000" b="1" i="0">
+                <a:solidFill>
+                  <a:srgbClr val="FFFFFF"/>
+                </a:solidFill>
+                <a:latin typeface="Calibri"/>
+              </a:rPr>
+              <a:t>Tests  </a:t>
+            </a:r>
             <a:r>
               <a:rPr sz="2000" b="0" i="0">
                 <a:solidFill>
-                  <a:srgbClr val="1B2A33"/>
-                </a:solidFill>
-                <a:latin typeface="Calibri"/>
-              </a:rPr>
-              <a:t>•  Q13 / Q14: max_size = min_size − 1; silence the All-NaN warnings.</a:t>
-            </a:r>
-          </a:p>
-          <a:p>
-            <a:pPr algn="l">
-              <a:lnSpc>
-                <a:spcPct val="110000"/>
-              </a:lnSpc>
-              <a:spcAft>
-                <a:spcPts val="500"/>
-              </a:spcAft>
-            </a:pPr>
+                  <a:srgbClr val="8FBFD0"/>
+                </a:solidFill>
+                <a:latin typeface="Calibri"/>
+              </a:rPr>
+              <a:t>84 passed, 3 strict xfailed, incl. test_nan_finding.py</a:t>
+            </a:r>
+          </a:p>
+        </p:txBody>
+      </p:sp>
+      <p:sp>
+        <p:nvSpPr>
+          <p:cNvPr id="17" name="Oval 16"/>
+          <p:cNvSpPr/>
+          <p:nvPr/>
+        </p:nvSpPr>
+        <p:spPr>
+          <a:xfrm>
+            <a:off x="822960" y="5285231"/>
+            <a:ext cx="384048" cy="384048"/>
+          </a:xfrm>
+          <a:prstGeom prst="ellipse">
+            <a:avLst/>
+          </a:prstGeom>
+          <a:solidFill>
+            <a:srgbClr val="2C6E49"/>
+          </a:solidFill>
+          <a:ln>
+            <a:noFill/>
+          </a:ln>
+          <a:effectLst/>
+        </p:spPr>
+        <p:style>
+          <a:lnRef idx="1">
+            <a:schemeClr val="accent1"/>
+          </a:lnRef>
+          <a:fillRef idx="3">
+            <a:schemeClr val="accent1"/>
+          </a:fillRef>
+          <a:effectRef idx="2">
+            <a:schemeClr val="accent1"/>
+          </a:effectRef>
+          <a:fontRef idx="minor">
+            <a:schemeClr val="lt1"/>
+          </a:fontRef>
+        </p:style>
+        <p:txBody>
+          <a:bodyPr rtlCol="0" anchor="ctr" lIns="0" rIns="0" tIns="0" bIns="0" wrap="none"/>
+          <a:lstStyle/>
+          <a:p>
+            <a:pPr algn="ctr"/>
+            <a:r>
+              <a:rPr sz="2000" b="1" i="0">
+                <a:solidFill>
+                  <a:srgbClr val="FFFFFF"/>
+                </a:solidFill>
+                <a:latin typeface="Calibri"/>
+              </a:rPr>
+              <a:t>✓</a:t>
+            </a:r>
+          </a:p>
+        </p:txBody>
+      </p:sp>
+      <p:sp>
+        <p:nvSpPr>
+          <p:cNvPr id="18" name="TextBox 17"/>
+          <p:cNvSpPr txBox="1"/>
+          <p:nvPr/>
+        </p:nvSpPr>
+        <p:spPr>
+          <a:xfrm>
+            <a:off x="1417320" y="5257799"/>
+            <a:ext cx="9966960" cy="640080"/>
+          </a:xfrm>
+          <a:prstGeom prst="rect">
+            <a:avLst/>
+          </a:prstGeom>
+          <a:noFill/>
+        </p:spPr>
+        <p:txBody>
+          <a:bodyPr wrap="square" lIns="0" rIns="0" tIns="0" bIns="0">
+            <a:spAutoFit/>
+          </a:bodyPr>
+          <a:lstStyle/>
+          <a:p>
+            <a:pPr algn="l">
+              <a:lnSpc>
+                <a:spcPct val="105000"/>
+              </a:lnSpc>
+              <a:spcAft>
+                <a:spcPts val="0"/>
+              </a:spcAft>
+            </a:pPr>
+            <a:r>
+              <a:rPr sz="2000" b="1" i="0">
+                <a:solidFill>
+                  <a:srgbClr val="FFFFFF"/>
+                </a:solidFill>
+                <a:latin typeface="Calibri"/>
+              </a:rPr>
+              <a:t>Regression oracle  </a:t>
+            </a:r>
             <a:r>
               <a:rPr sz="2000" b="0" i="0">
                 <a:solidFill>
-                  <a:srgbClr val="1B2A33"/>
-                </a:solidFill>
-                <a:latin typeface="Calibri"/>
-              </a:rPr>
-              <a:t>•  Q15: prompt 5 → fronts_from_gradb2 + the NaN recipe; two docstrings.</a:t>
+                  <a:srgbClr val="8FBFD0"/>
+                </a:solidFill>
+                <a:latin typeface="Calibri"/>
+              </a:rPr>
+              <a:t>form='chain' bit-for-bit frontogenesis_tendency, max |dF| = 0</a:t>
+            </a:r>
+          </a:p>
+        </p:txBody>
+      </p:sp>
+      <p:sp>
+        <p:nvSpPr>
+          <p:cNvPr id="19" name="Rounded Rectangle 18"/>
+          <p:cNvSpPr/>
+          <p:nvPr/>
+        </p:nvSpPr>
+        <p:spPr>
+          <a:xfrm>
+            <a:off x="777240" y="5806440"/>
+            <a:ext cx="10607040" cy="731520"/>
+          </a:xfrm>
+          <a:prstGeom prst="roundRect">
+            <a:avLst>
+              <a:gd name="adj" fmla="val 7000"/>
+            </a:avLst>
+          </a:prstGeom>
+          <a:solidFill>
+            <a:srgbClr val="065A82"/>
+          </a:solidFill>
+          <a:ln>
+            <a:noFill/>
+          </a:ln>
+          <a:effectLst/>
+        </p:spPr>
+        <p:style>
+          <a:lnRef idx="1">
+            <a:schemeClr val="accent1"/>
+          </a:lnRef>
+          <a:fillRef idx="3">
+            <a:schemeClr val="accent1"/>
+          </a:fillRef>
+          <a:effectRef idx="2">
+            <a:schemeClr val="accent1"/>
+          </a:effectRef>
+          <a:fontRef idx="minor">
+            <a:schemeClr val="lt1"/>
+          </a:fontRef>
+        </p:style>
+        <p:txBody>
+          <a:bodyPr rtlCol="0" anchor="ctr"/>
+          <a:lstStyle/>
+          <a:p>
+            <a:pPr algn="ctr"/>
+          </a:p>
+        </p:txBody>
+      </p:sp>
+      <p:sp>
+        <p:nvSpPr>
+          <p:cNvPr id="20" name="TextBox 19"/>
+          <p:cNvSpPr txBox="1"/>
+          <p:nvPr/>
+        </p:nvSpPr>
+        <p:spPr>
+          <a:xfrm>
+            <a:off x="1143000" y="5989320"/>
+            <a:ext cx="9875520" cy="411480"/>
+          </a:xfrm>
+          <a:prstGeom prst="rect">
+            <a:avLst/>
+          </a:prstGeom>
+          <a:noFill/>
+        </p:spPr>
+        <p:txBody>
+          <a:bodyPr wrap="square" lIns="0" rIns="0" tIns="0" bIns="0">
+            <a:spAutoFit/>
+          </a:bodyPr>
+          <a:lstStyle/>
+          <a:p>
+            <a:pPr algn="l">
+              <a:lnSpc>
+                <a:spcPct val="110000"/>
+              </a:lnSpc>
+              <a:spcAft>
+                <a:spcPts val="0"/>
+              </a:spcAft>
+            </a:pPr>
+            <a:r>
+              <a:rPr sz="2000" b="1" i="0">
+                <a:solidFill>
+                  <a:srgbClr val="FFFFFF"/>
+                </a:solidFill>
+                <a:latin typeface="Calibri"/>
+              </a:rPr>
+              <a:t>M1 closed 2026-09-30.  Next: M2 pulls the 72-hour series; M3 computes the budget.</a:t>
             </a:r>
           </a:p>
         </p:txBody>
@@ -6541,7 +6290,7 @@
                 </a:solidFill>
                 <a:latin typeface="Calibri"/>
               </a:rPr>
-              <a:t>TASK 8</a:t>
+              <a:t>FINDINGS</a:t>
             </a:r>
           </a:p>
         </p:txBody>
@@ -6583,7 +6332,7 @@
                 </a:solidFill>
                 <a:latin typeface="Cambria"/>
               </a:rPr>
-              <a:t>This deck</a:t>
+              <a:t>Findings for the writeup</a:t>
             </a:r>
           </a:p>
         </p:txBody>
@@ -6625,7 +6374,1679 @@
                 </a:solidFill>
                 <a:latin typeface="Calibri"/>
               </a:rPr>
-              <a:t>Reproducible from the logged numbers alone; nothing below 20 pt</a:t>
+              <a:t>Five things the discretisation taught us</a:t>
+            </a:r>
+          </a:p>
+        </p:txBody>
+      </p:sp>
+      <p:sp>
+        <p:nvSpPr>
+          <p:cNvPr id="6" name="TextBox 5"/>
+          <p:cNvSpPr txBox="1"/>
+          <p:nvPr/>
+        </p:nvSpPr>
+        <p:spPr>
+          <a:xfrm>
+            <a:off x="777240" y="1737360"/>
+            <a:ext cx="10607040" cy="4846320"/>
+          </a:xfrm>
+          <a:prstGeom prst="rect">
+            <a:avLst/>
+          </a:prstGeom>
+          <a:noFill/>
+        </p:spPr>
+        <p:txBody>
+          <a:bodyPr wrap="square" lIns="0" rIns="0" tIns="0" bIns="0">
+            <a:spAutoFit/>
+          </a:bodyPr>
+          <a:lstStyle/>
+          <a:p>
+            <a:pPr algn="l">
+              <a:lnSpc>
+                <a:spcPct val="105000"/>
+              </a:lnSpc>
+              <a:spcAft>
+                <a:spcPts val="900"/>
+              </a:spcAft>
+            </a:pPr>
+            <a:r>
+              <a:rPr sz="2000" b="1" i="0">
+                <a:solidFill>
+                  <a:srgbClr val="065A82"/>
+                </a:solidFill>
+                <a:latin typeface="Calibri"/>
+              </a:rPr>
+              <a:t>Discrete F. </a:t>
+            </a:r>
+            <a:r>
+              <a:rPr sz="2000" b="0" i="0">
+                <a:solidFill>
+                  <a:srgbClr val="1B2A33"/>
+                </a:solidFill>
+                <a:latin typeface="Calibri"/>
+              </a:rPr>
+              <a:t>The chain-rule product −(∇b)ᵀ(∇u)(∇b) fails on the grid by (2/3)(dx/ell)²; the consistent form passes V3 and is ~0.79x the chain F on real front pixels — about the size of the effect being measured.</a:t>
+            </a:r>
+          </a:p>
+          <a:p>
+            <a:pPr algn="l">
+              <a:lnSpc>
+                <a:spcPct val="105000"/>
+              </a:lnSpc>
+              <a:spcAft>
+                <a:spcPts val="900"/>
+              </a:spcAft>
+            </a:pPr>
+            <a:r>
+              <a:rPr sz="2000" b="1" i="0">
+                <a:solidFill>
+                  <a:srgbClr val="065A82"/>
+                </a:solidFill>
+                <a:latin typeface="Calibri"/>
+              </a:rPr>
+              <a:t>Stencil at the departure point. </a:t>
+            </a:r>
+            <a:r>
+              <a:rPr sz="2000" b="0" i="0">
+                <a:solidFill>
+                  <a:srgbClr val="1B2A33"/>
+                </a:solidFill>
+                <a:latin typeface="Calibri"/>
+              </a:rPr>
+              <a:t>Shifting b and differentiating measures the residual DG/Dt − 2F (≈ 0 under pure strain); the departure stencil measures DG/Dt.</a:t>
+            </a:r>
+          </a:p>
+          <a:p>
+            <a:pPr algn="l">
+              <a:lnSpc>
+                <a:spcPct val="105000"/>
+              </a:lnSpc>
+              <a:spcAft>
+                <a:spcPts val="900"/>
+              </a:spcAft>
+            </a:pPr>
+            <a:r>
+              <a:rPr sz="2000" b="1" i="0">
+                <a:solidFill>
+                  <a:srgbClr val="065A82"/>
+                </a:solidFill>
+                <a:latin typeface="Calibri"/>
+              </a:rPr>
+              <a:t>The divergent subfilter correction τ_δ. </a:t>
+            </a:r>
+            <a:r>
+              <a:rPr sz="2000" b="0" i="0">
+                <a:solidFill>
+                  <a:srgbClr val="1B2A33"/>
+                </a:solidFill>
+                <a:latin typeface="Calibri"/>
+              </a:rPr>
+              <a:t>Without it the flux form leaves 38-44% of the budget unclosed on a divergent flow and overstates the term 2.2x on hour 0.</a:t>
+            </a:r>
+          </a:p>
+          <a:p>
+            <a:pPr algn="l">
+              <a:lnSpc>
+                <a:spcPct val="105000"/>
+              </a:lnSpc>
+              <a:spcAft>
+                <a:spcPts val="900"/>
+              </a:spcAft>
+            </a:pPr>
+            <a:r>
+              <a:rPr sz="2000" b="1" i="0">
+                <a:solidFill>
+                  <a:srgbClr val="065A82"/>
+                </a:solidFill>
+                <a:latin typeface="Calibri"/>
+              </a:rPr>
+              <a:t>V3b closes the 0.85x question. </a:t>
+            </a:r>
+            <a:r>
+              <a:rPr sz="2000" b="0" i="0">
+                <a:solidFill>
+                  <a:srgbClr val="1B2A33"/>
+                </a:solidFill>
+                <a:latin typeface="Calibri"/>
+              </a:rPr>
+              <a:t>A flux-form OS7MP-like truth shifts the slope by −0.006 ± 0.025: the Jacobian attenuation is the resolved G's consistent view of the strain, not a bias. Shortfall per width: −2 / −4 / −11% at 2 / 1.5 / 1 dx.</a:t>
+            </a:r>
+          </a:p>
+          <a:p>
+            <a:pPr algn="l">
+              <a:lnSpc>
+                <a:spcPct val="105000"/>
+              </a:lnSpc>
+              <a:spcAft>
+                <a:spcPts val="900"/>
+              </a:spcAft>
+            </a:pPr>
+            <a:r>
+              <a:rPr sz="2000" b="1" i="0">
+                <a:solidFill>
+                  <a:srgbClr val="065A82"/>
+                </a:solidFill>
+                <a:latin typeface="Calibri"/>
+              </a:rPr>
+              <a:t>Planning §2.4 sign. </a:t>
+            </a:r>
+            <a:r>
+              <a:rPr sz="2000" b="0" i="0">
+                <a:solidFill>
+                  <a:srgbClr val="1B2A33"/>
+                </a:solidFill>
+                <a:latin typeface="Calibri"/>
+              </a:rPr>
+              <a:t>F = −½δG + ½|σ|G cos 2θ with θ from the compressional axis (plus, not minus). Final, M1-Q3.</a:t>
+            </a:r>
+          </a:p>
+        </p:txBody>
+      </p:sp>
+    </p:spTree>
+  </p:cSld>
+  <p:clrMapOvr>
+    <a:masterClrMapping/>
+  </p:clrMapOvr>
+</p:sld>
+</file>
+
+<file path=ppt/slides/slide16.xml><?xml version="1.0" encoding="utf-8"?>
+<p:sld xmlns:a="http://schemas.openxmlformats.org/drawingml/2006/main" xmlns:p="http://schemas.openxmlformats.org/presentationml/2006/main" xmlns:r="http://schemas.openxmlformats.org/officeDocument/2006/relationships">
+  <p:cSld>
+    <p:spTree>
+      <p:nvGrpSpPr>
+        <p:cNvPr id="1" name=""/>
+        <p:cNvGrpSpPr/>
+        <p:nvPr/>
+      </p:nvGrpSpPr>
+      <p:grpSpPr/>
+      <p:sp>
+        <p:nvSpPr>
+          <p:cNvPr id="2" name="Rectangle 1"/>
+          <p:cNvSpPr/>
+          <p:nvPr/>
+        </p:nvSpPr>
+        <p:spPr>
+          <a:xfrm>
+            <a:off x="0" y="0"/>
+            <a:ext cx="12191695" cy="6858000"/>
+          </a:xfrm>
+          <a:prstGeom prst="rect">
+            <a:avLst/>
+          </a:prstGeom>
+          <a:solidFill>
+            <a:srgbClr val="F2F6F8"/>
+          </a:solidFill>
+          <a:ln>
+            <a:noFill/>
+          </a:ln>
+          <a:effectLst/>
+        </p:spPr>
+        <p:style>
+          <a:lnRef idx="1">
+            <a:schemeClr val="accent1"/>
+          </a:lnRef>
+          <a:fillRef idx="3">
+            <a:schemeClr val="accent1"/>
+          </a:fillRef>
+          <a:effectRef idx="2">
+            <a:schemeClr val="accent1"/>
+          </a:effectRef>
+          <a:fontRef idx="minor">
+            <a:schemeClr val="lt1"/>
+          </a:fontRef>
+        </p:style>
+        <p:txBody>
+          <a:bodyPr rtlCol="0" anchor="ctr"/>
+          <a:lstStyle/>
+          <a:p>
+            <a:pPr algn="ctr"/>
+          </a:p>
+        </p:txBody>
+      </p:sp>
+      <p:sp>
+        <p:nvSpPr>
+          <p:cNvPr id="3" name="TextBox 2"/>
+          <p:cNvSpPr txBox="1"/>
+          <p:nvPr/>
+        </p:nvSpPr>
+        <p:spPr>
+          <a:xfrm>
+            <a:off x="777240" y="347472"/>
+            <a:ext cx="10698480" cy="329184"/>
+          </a:xfrm>
+          <a:prstGeom prst="rect">
+            <a:avLst/>
+          </a:prstGeom>
+          <a:noFill/>
+        </p:spPr>
+        <p:txBody>
+          <a:bodyPr wrap="square" lIns="0" rIns="0" tIns="0" bIns="0">
+            <a:spAutoFit/>
+          </a:bodyPr>
+          <a:lstStyle/>
+          <a:p>
+            <a:pPr algn="l">
+              <a:lnSpc>
+                <a:spcPct val="110000"/>
+              </a:lnSpc>
+              <a:spcAft>
+                <a:spcPts val="0"/>
+              </a:spcAft>
+            </a:pPr>
+            <a:r>
+              <a:rPr sz="2000" b="1" i="0">
+                <a:solidFill>
+                  <a:srgbClr val="1C7293"/>
+                </a:solidFill>
+                <a:latin typeface="Calibri"/>
+              </a:rPr>
+              <a:t>M1-Q1 .. Q15</a:t>
+            </a:r>
+          </a:p>
+        </p:txBody>
+      </p:sp>
+      <p:sp>
+        <p:nvSpPr>
+          <p:cNvPr id="4" name="TextBox 3"/>
+          <p:cNvSpPr txBox="1"/>
+          <p:nvPr/>
+        </p:nvSpPr>
+        <p:spPr>
+          <a:xfrm>
+            <a:off x="777240" y="676656"/>
+            <a:ext cx="10698480" cy="594360"/>
+          </a:xfrm>
+          <a:prstGeom prst="rect">
+            <a:avLst/>
+          </a:prstGeom>
+          <a:noFill/>
+        </p:spPr>
+        <p:txBody>
+          <a:bodyPr wrap="square" lIns="0" rIns="0" tIns="0" bIns="0">
+            <a:spAutoFit/>
+          </a:bodyPr>
+          <a:lstStyle/>
+          <a:p>
+            <a:pPr algn="l">
+              <a:lnSpc>
+                <a:spcPct val="110000"/>
+              </a:lnSpc>
+              <a:spcAft>
+                <a:spcPts val="0"/>
+              </a:spcAft>
+            </a:pPr>
+            <a:r>
+              <a:rPr sz="3000" b="1" i="0">
+                <a:solidFill>
+                  <a:srgbClr val="21295C"/>
+                </a:solidFill>
+                <a:latin typeface="Cambria"/>
+              </a:rPr>
+              <a:t>Decisions and open issues</a:t>
+            </a:r>
+          </a:p>
+        </p:txBody>
+      </p:sp>
+      <p:sp>
+        <p:nvSpPr>
+          <p:cNvPr id="5" name="TextBox 4"/>
+          <p:cNvSpPr txBox="1"/>
+          <p:nvPr/>
+        </p:nvSpPr>
+        <p:spPr>
+          <a:xfrm>
+            <a:off x="777240" y="1280160"/>
+            <a:ext cx="10698480" cy="384048"/>
+          </a:xfrm>
+          <a:prstGeom prst="rect">
+            <a:avLst/>
+          </a:prstGeom>
+          <a:noFill/>
+        </p:spPr>
+        <p:txBody>
+          <a:bodyPr wrap="square" lIns="0" rIns="0" tIns="0" bIns="0">
+            <a:spAutoFit/>
+          </a:bodyPr>
+          <a:lstStyle/>
+          <a:p>
+            <a:pPr algn="l">
+              <a:lnSpc>
+                <a:spcPct val="110000"/>
+              </a:lnSpc>
+              <a:spcAft>
+                <a:spcPts val="0"/>
+              </a:spcAft>
+            </a:pPr>
+            <a:r>
+              <a:rPr sz="2000" b="0" i="0">
+                <a:solidFill>
+                  <a:srgbClr val="62737F"/>
+                </a:solidFill>
+                <a:latin typeface="Calibri"/>
+              </a:rPr>
+              <a:t>What shapes M3 and M4, and the fronts fixes JXP chose to make on this branch</a:t>
+            </a:r>
+          </a:p>
+        </p:txBody>
+      </p:sp>
+      <p:sp>
+        <p:nvSpPr>
+          <p:cNvPr id="6" name="TextBox 5"/>
+          <p:cNvSpPr txBox="1"/>
+          <p:nvPr/>
+        </p:nvSpPr>
+        <p:spPr>
+          <a:xfrm>
+            <a:off x="777240" y="1783080"/>
+            <a:ext cx="5120640" cy="365760"/>
+          </a:xfrm>
+          <a:prstGeom prst="rect">
+            <a:avLst/>
+          </a:prstGeom>
+          <a:noFill/>
+        </p:spPr>
+        <p:txBody>
+          <a:bodyPr wrap="square" lIns="0" rIns="0" tIns="0" bIns="0">
+            <a:spAutoFit/>
+          </a:bodyPr>
+          <a:lstStyle/>
+          <a:p>
+            <a:pPr algn="l">
+              <a:lnSpc>
+                <a:spcPct val="110000"/>
+              </a:lnSpc>
+              <a:spcAft>
+                <a:spcPts val="0"/>
+              </a:spcAft>
+            </a:pPr>
+            <a:r>
+              <a:rPr sz="2000" b="1" i="0">
+                <a:solidFill>
+                  <a:srgbClr val="065A82"/>
+                </a:solidFill>
+                <a:latin typeface="Calibri"/>
+              </a:rPr>
+              <a:t>SHAPES M3 / M4</a:t>
+            </a:r>
+          </a:p>
+        </p:txBody>
+      </p:sp>
+      <p:sp>
+        <p:nvSpPr>
+          <p:cNvPr id="7" name="TextBox 6"/>
+          <p:cNvSpPr txBox="1"/>
+          <p:nvPr/>
+        </p:nvSpPr>
+        <p:spPr>
+          <a:xfrm>
+            <a:off x="777240" y="2240280"/>
+            <a:ext cx="5120640" cy="4206240"/>
+          </a:xfrm>
+          <a:prstGeom prst="rect">
+            <a:avLst/>
+          </a:prstGeom>
+          <a:noFill/>
+        </p:spPr>
+        <p:txBody>
+          <a:bodyPr wrap="square" lIns="0" rIns="0" tIns="0" bIns="0">
+            <a:spAutoFit/>
+          </a:bodyPr>
+          <a:lstStyle/>
+          <a:p>
+            <a:pPr algn="l">
+              <a:lnSpc>
+                <a:spcPct val="110000"/>
+              </a:lnSpc>
+              <a:spcAft>
+                <a:spcPts val="600"/>
+              </a:spcAft>
+            </a:pPr>
+            <a:r>
+              <a:rPr sz="2000" b="0" i="0">
+                <a:solidFill>
+                  <a:srgbClr val="1B2A33"/>
+                </a:solidFill>
+                <a:latin typeface="Calibri"/>
+              </a:rPr>
+              <a:t>•  Q1: both forms of F; discrete primary, chain as a stated systematic.</a:t>
+            </a:r>
+          </a:p>
+          <a:p>
+            <a:pPr algn="l">
+              <a:lnSpc>
+                <a:spcPct val="110000"/>
+              </a:lnSpc>
+              <a:spcAft>
+                <a:spcPts val="600"/>
+              </a:spcAft>
+            </a:pPr>
+            <a:r>
+              <a:rPr sz="2000" b="0" i="0">
+                <a:solidFill>
+                  <a:srgbClr val="1B2A33"/>
+                </a:solidFill>
+                <a:latin typeface="Calibri"/>
+              </a:rPr>
+              <a:t>•  Q2 / Q4: Figure 2 at 0.981 with its band; systematic 0.954-1.003; no upward correction.</a:t>
+            </a:r>
+          </a:p>
+          <a:p>
+            <a:pPr algn="l">
+              <a:lnSpc>
+                <a:spcPct val="110000"/>
+              </a:lnSpc>
+              <a:spcAft>
+                <a:spcPts val="600"/>
+              </a:spcAft>
+            </a:pPr>
+            <a:r>
+              <a:rPr sz="2000" b="0" i="0">
+                <a:solidFill>
+                  <a:srgbClr val="1B2A33"/>
+                </a:solidFill>
+                <a:latin typeface="Calibri"/>
+              </a:rPr>
+              <a:t>•  Q5 / Q6: V1 at 8 dx; V4 bar 0.28-1.0% of G/h at order 3; order 5 as a sensitivity.</a:t>
+            </a:r>
+          </a:p>
+          <a:p>
+            <a:pPr algn="l">
+              <a:lnSpc>
+                <a:spcPct val="110000"/>
+              </a:lnSpc>
+              <a:spcAft>
+                <a:spcPts val="600"/>
+              </a:spcAft>
+            </a:pPr>
+            <a:r>
+              <a:rPr sz="2000" b="0" i="0">
+                <a:solidFill>
+                  <a:srgbClr val="1B2A33"/>
+                </a:solidFill>
+                <a:latin typeface="Calibri"/>
+              </a:rPr>
+              <a:t>•  Subtract the numerics shortfall first: −2 / −4 / −11% at 2 / 1.5 / 1 dx.</a:t>
+            </a:r>
+          </a:p>
+          <a:p>
+            <a:pPr algn="l">
+              <a:lnSpc>
+                <a:spcPct val="110000"/>
+              </a:lnSpc>
+              <a:spcAft>
+                <a:spcPts val="600"/>
+              </a:spcAft>
+            </a:pPr>
+            <a:r>
+              <a:rPr sz="2000" b="0" i="0">
+                <a:solidFill>
+                  <a:srgbClr val="1B2A33"/>
+                </a:solidFill>
+                <a:latin typeface="Calibri"/>
+              </a:rPr>
+              <a:t>•  Pass τ_δ to subfilter_term; split the ratio estimator by the sign of 2F.</a:t>
+            </a:r>
+          </a:p>
+        </p:txBody>
+      </p:sp>
+      <p:sp>
+        <p:nvSpPr>
+          <p:cNvPr id="8" name="Rounded Rectangle 7"/>
+          <p:cNvSpPr/>
+          <p:nvPr/>
+        </p:nvSpPr>
+        <p:spPr>
+          <a:xfrm>
+            <a:off x="6172200" y="1737360"/>
+            <a:ext cx="5257800" cy="4754880"/>
+          </a:xfrm>
+          <a:prstGeom prst="roundRect">
+            <a:avLst>
+              <a:gd name="adj" fmla="val 7000"/>
+            </a:avLst>
+          </a:prstGeom>
+          <a:solidFill>
+            <a:srgbClr val="FAEFE4"/>
+          </a:solidFill>
+          <a:ln>
+            <a:noFill/>
+          </a:ln>
+          <a:effectLst/>
+        </p:spPr>
+        <p:style>
+          <a:lnRef idx="1">
+            <a:schemeClr val="accent1"/>
+          </a:lnRef>
+          <a:fillRef idx="3">
+            <a:schemeClr val="accent1"/>
+          </a:fillRef>
+          <a:effectRef idx="2">
+            <a:schemeClr val="accent1"/>
+          </a:effectRef>
+          <a:fontRef idx="minor">
+            <a:schemeClr val="lt1"/>
+          </a:fontRef>
+        </p:style>
+        <p:txBody>
+          <a:bodyPr rtlCol="0" anchor="ctr"/>
+          <a:lstStyle/>
+          <a:p>
+            <a:pPr algn="ctr"/>
+          </a:p>
+        </p:txBody>
+      </p:sp>
+      <p:sp>
+        <p:nvSpPr>
+          <p:cNvPr id="9" name="TextBox 8"/>
+          <p:cNvSpPr txBox="1"/>
+          <p:nvPr/>
+        </p:nvSpPr>
+        <p:spPr>
+          <a:xfrm>
+            <a:off x="6446520" y="1874519"/>
+            <a:ext cx="4754880" cy="731520"/>
+          </a:xfrm>
+          <a:prstGeom prst="rect">
+            <a:avLst/>
+          </a:prstGeom>
+          <a:noFill/>
+        </p:spPr>
+        <p:txBody>
+          <a:bodyPr wrap="square" lIns="0" rIns="0" tIns="0" bIns="0">
+            <a:spAutoFit/>
+          </a:bodyPr>
+          <a:lstStyle/>
+          <a:p>
+            <a:pPr algn="l">
+              <a:lnSpc>
+                <a:spcPct val="105000"/>
+              </a:lnSpc>
+              <a:spcAft>
+                <a:spcPts val="0"/>
+              </a:spcAft>
+            </a:pPr>
+            <a:r>
+              <a:rPr sz="2000" b="1" i="0">
+                <a:solidFill>
+                  <a:srgbClr val="A8501B"/>
+                </a:solidFill>
+                <a:latin typeface="Calibri"/>
+              </a:rPr>
+              <a:t>NEXT: fronts FIXES — not yet applied. </a:t>
+            </a:r>
+            <a:r>
+              <a:rPr sz="2000" b="0" i="0">
+                <a:solidFill>
+                  <a:srgbClr val="A8501B"/>
+                </a:solidFill>
+                <a:latin typeface="Calibri"/>
+              </a:rPr>
+              <a:t>Q9: on this frontogenesis branch; JXP tells Lauren.</a:t>
+            </a:r>
+          </a:p>
+        </p:txBody>
+      </p:sp>
+      <p:sp>
+        <p:nvSpPr>
+          <p:cNvPr id="10" name="TextBox 9"/>
+          <p:cNvSpPr txBox="1"/>
+          <p:nvPr/>
+        </p:nvSpPr>
+        <p:spPr>
+          <a:xfrm>
+            <a:off x="6446520" y="2697480"/>
+            <a:ext cx="4754880" cy="3749039"/>
+          </a:xfrm>
+          <a:prstGeom prst="rect">
+            <a:avLst/>
+          </a:prstGeom>
+          <a:noFill/>
+        </p:spPr>
+        <p:txBody>
+          <a:bodyPr wrap="square" lIns="0" rIns="0" tIns="0" bIns="0">
+            <a:spAutoFit/>
+          </a:bodyPr>
+          <a:lstStyle/>
+          <a:p>
+            <a:pPr algn="l">
+              <a:lnSpc>
+                <a:spcPct val="110000"/>
+              </a:lnSpc>
+              <a:spcAft>
+                <a:spcPts val="500"/>
+              </a:spcAft>
+            </a:pPr>
+            <a:r>
+              <a:rPr sz="2000" b="0" i="0">
+                <a:solidFill>
+                  <a:srgbClr val="1B2A33"/>
+                </a:solidFill>
+                <a:latin typeface="Calibri"/>
+              </a:rPr>
+              <a:t>•  Q10: n_workers=None → os.cpu_count(); document the __main__ guard.</a:t>
+            </a:r>
+          </a:p>
+          <a:p>
+            <a:pPr algn="l">
+              <a:lnSpc>
+                <a:spcPct val="110000"/>
+              </a:lnSpc>
+              <a:spcAft>
+                <a:spcPts val="500"/>
+              </a:spcAft>
+            </a:pPr>
+            <a:r>
+              <a:rPr sz="2000" b="0" i="0">
+                <a:solidFill>
+                  <a:srgbClr val="1B2A33"/>
+                </a:solidFill>
+                <a:latin typeface="Calibri"/>
+              </a:rPr>
+              <a:t>•  Q11: fronts &amp;= isfinite(gradb2) after cropping and dilation.</a:t>
+            </a:r>
+          </a:p>
+          <a:p>
+            <a:pPr algn="l">
+              <a:lnSpc>
+                <a:spcPct val="110000"/>
+              </a:lnSpc>
+              <a:spcAft>
+                <a:spcPts val="500"/>
+              </a:spcAft>
+            </a:pPr>
+            <a:r>
+              <a:rPr sz="2000" b="0" i="0">
+                <a:solidFill>
+                  <a:srgbClr val="1B2A33"/>
+                </a:solidFill>
+                <a:latin typeface="Calibri"/>
+              </a:rPr>
+              <a:t>•  Q12: despur returns early on an empty skeleton.</a:t>
+            </a:r>
+          </a:p>
+          <a:p>
+            <a:pPr algn="l">
+              <a:lnSpc>
+                <a:spcPct val="110000"/>
+              </a:lnSpc>
+              <a:spcAft>
+                <a:spcPts val="500"/>
+              </a:spcAft>
+            </a:pPr>
+            <a:r>
+              <a:rPr sz="2000" b="0" i="0">
+                <a:solidFill>
+                  <a:srgbClr val="1B2A33"/>
+                </a:solidFill>
+                <a:latin typeface="Calibri"/>
+              </a:rPr>
+              <a:t>•  Q13 / Q14: max_size = min_size − 1; silence the All-NaN warnings.</a:t>
+            </a:r>
+          </a:p>
+          <a:p>
+            <a:pPr algn="l">
+              <a:lnSpc>
+                <a:spcPct val="110000"/>
+              </a:lnSpc>
+              <a:spcAft>
+                <a:spcPts val="500"/>
+              </a:spcAft>
+            </a:pPr>
+            <a:r>
+              <a:rPr sz="2000" b="0" i="0">
+                <a:solidFill>
+                  <a:srgbClr val="1B2A33"/>
+                </a:solidFill>
+                <a:latin typeface="Calibri"/>
+              </a:rPr>
+              <a:t>•  Q15: prompt 5 → fronts_from_gradb2 + the NaN recipe; two docstrings.</a:t>
+            </a:r>
+          </a:p>
+        </p:txBody>
+      </p:sp>
+    </p:spTree>
+  </p:cSld>
+  <p:clrMapOvr>
+    <a:masterClrMapping/>
+  </p:clrMapOvr>
+</p:sld>
+</file>
+
+<file path=ppt/slides/slide17.xml><?xml version="1.0" encoding="utf-8"?>
+<p:sld xmlns:a="http://schemas.openxmlformats.org/drawingml/2006/main" xmlns:p="http://schemas.openxmlformats.org/presentationml/2006/main" xmlns:r="http://schemas.openxmlformats.org/officeDocument/2006/relationships">
+  <p:cSld>
+    <p:spTree>
+      <p:nvGrpSpPr>
+        <p:cNvPr id="1" name=""/>
+        <p:cNvGrpSpPr/>
+        <p:nvPr/>
+      </p:nvGrpSpPr>
+      <p:grpSpPr/>
+      <p:sp>
+        <p:nvSpPr>
+          <p:cNvPr id="2" name="Rectangle 1"/>
+          <p:cNvSpPr/>
+          <p:nvPr/>
+        </p:nvSpPr>
+        <p:spPr>
+          <a:xfrm>
+            <a:off x="0" y="0"/>
+            <a:ext cx="12191695" cy="6858000"/>
+          </a:xfrm>
+          <a:prstGeom prst="rect">
+            <a:avLst/>
+          </a:prstGeom>
+          <a:solidFill>
+            <a:srgbClr val="F2F6F8"/>
+          </a:solidFill>
+          <a:ln>
+            <a:noFill/>
+          </a:ln>
+          <a:effectLst/>
+        </p:spPr>
+        <p:style>
+          <a:lnRef idx="1">
+            <a:schemeClr val="accent1"/>
+          </a:lnRef>
+          <a:fillRef idx="3">
+            <a:schemeClr val="accent1"/>
+          </a:fillRef>
+          <a:effectRef idx="2">
+            <a:schemeClr val="accent1"/>
+          </a:effectRef>
+          <a:fontRef idx="minor">
+            <a:schemeClr val="lt1"/>
+          </a:fontRef>
+        </p:style>
+        <p:txBody>
+          <a:bodyPr rtlCol="0" anchor="ctr"/>
+          <a:lstStyle/>
+          <a:p>
+            <a:pPr algn="ctr"/>
+          </a:p>
+        </p:txBody>
+      </p:sp>
+      <p:sp>
+        <p:nvSpPr>
+          <p:cNvPr id="3" name="TextBox 2"/>
+          <p:cNvSpPr txBox="1"/>
+          <p:nvPr/>
+        </p:nvSpPr>
+        <p:spPr>
+          <a:xfrm>
+            <a:off x="777240" y="347472"/>
+            <a:ext cx="10698480" cy="329184"/>
+          </a:xfrm>
+          <a:prstGeom prst="rect">
+            <a:avLst/>
+          </a:prstGeom>
+          <a:noFill/>
+        </p:spPr>
+        <p:txBody>
+          <a:bodyPr wrap="square" lIns="0" rIns="0" tIns="0" bIns="0">
+            <a:spAutoFit/>
+          </a:bodyPr>
+          <a:lstStyle/>
+          <a:p>
+            <a:pPr algn="l">
+              <a:lnSpc>
+                <a:spcPct val="110000"/>
+              </a:lnSpc>
+              <a:spcAft>
+                <a:spcPts val="0"/>
+              </a:spcAft>
+            </a:pPr>
+            <a:r>
+              <a:rPr sz="2000" b="1" i="0">
+                <a:solidFill>
+                  <a:srgbClr val="1C7293"/>
+                </a:solidFill>
+                <a:latin typeface="Calibri"/>
+              </a:rPr>
+              <a:t>GLOSSARY  ·  1 OF 2  ·  NOTATION AS ON THE SLIDES</a:t>
+            </a:r>
+          </a:p>
+        </p:txBody>
+      </p:sp>
+      <p:sp>
+        <p:nvSpPr>
+          <p:cNvPr id="4" name="TextBox 3"/>
+          <p:cNvSpPr txBox="1"/>
+          <p:nvPr/>
+        </p:nvSpPr>
+        <p:spPr>
+          <a:xfrm>
+            <a:off x="777240" y="676656"/>
+            <a:ext cx="10698480" cy="594360"/>
+          </a:xfrm>
+          <a:prstGeom prst="rect">
+            <a:avLst/>
+          </a:prstGeom>
+          <a:noFill/>
+        </p:spPr>
+        <p:txBody>
+          <a:bodyPr wrap="square" lIns="0" rIns="0" tIns="0" bIns="0">
+            <a:spAutoFit/>
+          </a:bodyPr>
+          <a:lstStyle/>
+          <a:p>
+            <a:pPr algn="l">
+              <a:lnSpc>
+                <a:spcPct val="110000"/>
+              </a:lnSpc>
+              <a:spcAft>
+                <a:spcPts val="0"/>
+              </a:spcAft>
+            </a:pPr>
+            <a:r>
+              <a:rPr sz="3000" b="1" i="0">
+                <a:solidFill>
+                  <a:srgbClr val="21295C"/>
+                </a:solidFill>
+                <a:latin typeface="Cambria"/>
+              </a:rPr>
+              <a:t>Glossary — the physics and the operators</a:t>
+            </a:r>
+          </a:p>
+        </p:txBody>
+      </p:sp>
+      <p:sp>
+        <p:nvSpPr>
+          <p:cNvPr id="5" name="TextBox 4"/>
+          <p:cNvSpPr txBox="1"/>
+          <p:nvPr/>
+        </p:nvSpPr>
+        <p:spPr>
+          <a:xfrm>
+            <a:off x="777240" y="1417320"/>
+            <a:ext cx="10652760" cy="5120640"/>
+          </a:xfrm>
+          <a:prstGeom prst="rect">
+            <a:avLst/>
+          </a:prstGeom>
+          <a:noFill/>
+        </p:spPr>
+        <p:txBody>
+          <a:bodyPr wrap="square" lIns="0" rIns="0" tIns="0" bIns="0">
+            <a:spAutoFit/>
+          </a:bodyPr>
+          <a:lstStyle/>
+          <a:p>
+            <a:pPr algn="l">
+              <a:lnSpc>
+                <a:spcPct val="100000"/>
+              </a:lnSpc>
+              <a:spcAft>
+                <a:spcPts val="500"/>
+              </a:spcAft>
+            </a:pPr>
+            <a:r>
+              <a:rPr sz="2000" b="1" i="0">
+                <a:solidFill>
+                  <a:srgbClr val="065A82"/>
+                </a:solidFill>
+                <a:latin typeface="Calibri"/>
+              </a:rPr>
+              <a:t>b, G  </a:t>
+            </a:r>
+            <a:r>
+              <a:rPr sz="2000" b="0" i="0">
+                <a:solidFill>
+                  <a:srgbClr val="1B2A33"/>
+                </a:solidFill>
+                <a:latin typeface="Calibri"/>
+              </a:rPr>
+              <a:t>buoyancy b = g σ₀/ρ₀ from Theta and Salt (JMD95 at p = 0); G = |∇b|² = b_x² + b_y² is the front strength, from the same gradient that feeds F.</a:t>
+            </a:r>
+          </a:p>
+          <a:p>
+            <a:pPr algn="l">
+              <a:lnSpc>
+                <a:spcPct val="100000"/>
+              </a:lnSpc>
+              <a:spcAft>
+                <a:spcPts val="500"/>
+              </a:spcAft>
+            </a:pPr>
+            <a:r>
+              <a:rPr sz="2000" b="1" i="0">
+                <a:solidFill>
+                  <a:srgbClr val="065A82"/>
+                </a:solidFill>
+                <a:latin typeface="Calibri"/>
+              </a:rPr>
+              <a:t>F  </a:t>
+            </a:r>
+            <a:r>
+              <a:rPr sz="2000" b="0" i="0">
+                <a:solidFill>
+                  <a:srgbClr val="1B2A33"/>
+                </a:solidFill>
+                <a:latin typeface="Calibri"/>
+              </a:rPr>
+              <a:t>the frontogenesis tendency predicted from the velocity field, F = ½ DG/Dt: F = −½δG + ½|σ|G cos 2θ (δ divergence, |σ| strain, θ from the compressional axis).</a:t>
+            </a:r>
+          </a:p>
+          <a:p>
+            <a:pPr algn="l">
+              <a:lnSpc>
+                <a:spcPct val="100000"/>
+              </a:lnSpc>
+              <a:spcAft>
+                <a:spcPts val="500"/>
+              </a:spcAft>
+            </a:pPr>
+            <a:r>
+              <a:rPr sz="2000" b="1" i="0">
+                <a:solidFill>
+                  <a:srgbClr val="065A82"/>
+                </a:solidFill>
+                <a:latin typeface="Calibri"/>
+              </a:rPr>
+              <a:t>DG/Dt  </a:t>
+            </a:r>
+            <a:r>
+              <a:rPr sz="2000" b="0" i="0">
+                <a:solidFill>
+                  <a:srgbClr val="1B2A33"/>
+                </a:solidFill>
+                <a:latin typeface="Calibri"/>
+              </a:rPr>
+              <a:t>the measured side: G differenced along a parcel over one hour. The gates fit the slope of DG/Dt on 2F.</a:t>
+            </a:r>
+          </a:p>
+          <a:p>
+            <a:pPr algn="l">
+              <a:lnSpc>
+                <a:spcPct val="100000"/>
+              </a:lnSpc>
+              <a:spcAft>
+                <a:spcPts val="500"/>
+              </a:spcAft>
+            </a:pPr>
+            <a:r>
+              <a:rPr sz="2000" b="1" i="0">
+                <a:solidFill>
+                  <a:srgbClr val="065A82"/>
+                </a:solidFill>
+                <a:latin typeface="Calibri"/>
+              </a:rPr>
+              <a:t>Discrete vs chain-rule F  </a:t>
+            </a:r>
+            <a:r>
+              <a:rPr sz="2000" b="0" i="0">
+                <a:solidFill>
+                  <a:srgbClr val="1B2A33"/>
+                </a:solidFill>
+                <a:latin typeface="Calibri"/>
+              </a:rPr>
+              <a:t>chain: −(∇b)ᵀ(∇u)(∇b), the repo's frontogenesis_tendency (form='chain'). Discrete: −Σ (L_k b)[L_k, u·∇] b, built on the same stencil as G (form='discrete', the default).</a:t>
+            </a:r>
+          </a:p>
+          <a:p>
+            <a:pPr algn="l">
+              <a:lnSpc>
+                <a:spcPct val="100000"/>
+              </a:lnSpc>
+              <a:spcAft>
+                <a:spcPts val="500"/>
+              </a:spcAft>
+            </a:pPr>
+            <a:r>
+              <a:rPr sz="2000" b="1" i="0">
+                <a:solidFill>
+                  <a:srgbClr val="065A82"/>
+                </a:solidFill>
+                <a:latin typeface="Calibri"/>
+              </a:rPr>
+              <a:t>Semi-Lagrangian step, departure point  </a:t>
+            </a:r>
+            <a:r>
+              <a:rPr sz="2000" b="0" i="0">
+                <a:solidFill>
+                  <a:srgbClr val="1B2A33"/>
+                </a:solidFill>
+                <a:latin typeface="Calibri"/>
+              </a:rPr>
+              <a:t>follow the parcel back one hour along u, interpolate b (order 3 = cubic) onto the stencil there, then difference G.</a:t>
+            </a:r>
+          </a:p>
+          <a:p>
+            <a:pPr algn="l">
+              <a:lnSpc>
+                <a:spcPct val="100000"/>
+              </a:lnSpc>
+              <a:spcAft>
+                <a:spcPts val="500"/>
+              </a:spcAft>
+            </a:pPr>
+            <a:r>
+              <a:rPr sz="2000" b="1" i="0">
+                <a:solidFill>
+                  <a:srgbClr val="065A82"/>
+                </a:solidFill>
+                <a:latin typeface="Calibri"/>
+              </a:rPr>
+              <a:t>lowpass, L  </a:t>
+            </a:r>
+            <a:r>
+              <a:rPr sz="2000" b="0" i="0">
+                <a:solidFill>
+                  <a:srgbClr val="1B2A33"/>
+                </a:solidFill>
+                <a:latin typeface="Calibri"/>
+              </a:rPr>
+              <a:t>a top-hat filter of half-width L/2 applied to b and u before the budget; NaN propagates, never renormalised.</a:t>
+            </a:r>
+          </a:p>
+          <a:p>
+            <a:pPr algn="l">
+              <a:lnSpc>
+                <a:spcPct val="100000"/>
+              </a:lnSpc>
+              <a:spcAft>
+                <a:spcPts val="500"/>
+              </a:spcAft>
+            </a:pPr>
+            <a:r>
+              <a:rPr sz="2000" b="1" i="0">
+                <a:solidFill>
+                  <a:srgbClr val="065A82"/>
+                </a:solidFill>
+                <a:latin typeface="Calibri"/>
+              </a:rPr>
+              <a:t>Subfilter term τ, τ_δ, Germano  </a:t>
+            </a:r>
+            <a:r>
+              <a:rPr sz="2000" b="0" i="0">
+                <a:solidFill>
+                  <a:srgbClr val="1B2A33"/>
+                </a:solidFill>
+                <a:latin typeface="Calibri"/>
+              </a:rPr>
+              <a:t>τ closes the filtered budget (M3's field = 2 × term); τ_δ is its divergent part; Germano: composite-filter τ = filtered fine τ + the Leonard flux, for any linear filter.</a:t>
+            </a:r>
+          </a:p>
+        </p:txBody>
+      </p:sp>
+    </p:spTree>
+  </p:cSld>
+  <p:clrMapOvr>
+    <a:masterClrMapping/>
+  </p:clrMapOvr>
+</p:sld>
+</file>
+
+<file path=ppt/slides/slide18.xml><?xml version="1.0" encoding="utf-8"?>
+<p:sld xmlns:a="http://schemas.openxmlformats.org/drawingml/2006/main" xmlns:p="http://schemas.openxmlformats.org/presentationml/2006/main" xmlns:r="http://schemas.openxmlformats.org/officeDocument/2006/relationships">
+  <p:cSld>
+    <p:spTree>
+      <p:nvGrpSpPr>
+        <p:cNvPr id="1" name=""/>
+        <p:cNvGrpSpPr/>
+        <p:nvPr/>
+      </p:nvGrpSpPr>
+      <p:grpSpPr/>
+      <p:sp>
+        <p:nvSpPr>
+          <p:cNvPr id="2" name="Rectangle 1"/>
+          <p:cNvSpPr/>
+          <p:nvPr/>
+        </p:nvSpPr>
+        <p:spPr>
+          <a:xfrm>
+            <a:off x="0" y="0"/>
+            <a:ext cx="12191695" cy="6858000"/>
+          </a:xfrm>
+          <a:prstGeom prst="rect">
+            <a:avLst/>
+          </a:prstGeom>
+          <a:solidFill>
+            <a:srgbClr val="F2F6F8"/>
+          </a:solidFill>
+          <a:ln>
+            <a:noFill/>
+          </a:ln>
+          <a:effectLst/>
+        </p:spPr>
+        <p:style>
+          <a:lnRef idx="1">
+            <a:schemeClr val="accent1"/>
+          </a:lnRef>
+          <a:fillRef idx="3">
+            <a:schemeClr val="accent1"/>
+          </a:fillRef>
+          <a:effectRef idx="2">
+            <a:schemeClr val="accent1"/>
+          </a:effectRef>
+          <a:fontRef idx="minor">
+            <a:schemeClr val="lt1"/>
+          </a:fontRef>
+        </p:style>
+        <p:txBody>
+          <a:bodyPr rtlCol="0" anchor="ctr"/>
+          <a:lstStyle/>
+          <a:p>
+            <a:pPr algn="ctr"/>
+          </a:p>
+        </p:txBody>
+      </p:sp>
+      <p:sp>
+        <p:nvSpPr>
+          <p:cNvPr id="3" name="TextBox 2"/>
+          <p:cNvSpPr txBox="1"/>
+          <p:nvPr/>
+        </p:nvSpPr>
+        <p:spPr>
+          <a:xfrm>
+            <a:off x="777240" y="347472"/>
+            <a:ext cx="10698480" cy="329184"/>
+          </a:xfrm>
+          <a:prstGeom prst="rect">
+            <a:avLst/>
+          </a:prstGeom>
+          <a:noFill/>
+        </p:spPr>
+        <p:txBody>
+          <a:bodyPr wrap="square" lIns="0" rIns="0" tIns="0" bIns="0">
+            <a:spAutoFit/>
+          </a:bodyPr>
+          <a:lstStyle/>
+          <a:p>
+            <a:pPr algn="l">
+              <a:lnSpc>
+                <a:spcPct val="110000"/>
+              </a:lnSpc>
+              <a:spcAft>
+                <a:spcPts val="0"/>
+              </a:spcAft>
+            </a:pPr>
+            <a:r>
+              <a:rPr sz="2000" b="1" i="0">
+                <a:solidFill>
+                  <a:srgbClr val="1C7293"/>
+                </a:solidFill>
+                <a:latin typeface="Calibri"/>
+              </a:rPr>
+              <a:t>GLOSSARY  ·  2 OF 2</a:t>
+            </a:r>
+          </a:p>
+        </p:txBody>
+      </p:sp>
+      <p:sp>
+        <p:nvSpPr>
+          <p:cNvPr id="4" name="TextBox 3"/>
+          <p:cNvSpPr txBox="1"/>
+          <p:nvPr/>
+        </p:nvSpPr>
+        <p:spPr>
+          <a:xfrm>
+            <a:off x="777240" y="676656"/>
+            <a:ext cx="10698480" cy="594360"/>
+          </a:xfrm>
+          <a:prstGeom prst="rect">
+            <a:avLst/>
+          </a:prstGeom>
+          <a:noFill/>
+        </p:spPr>
+        <p:txBody>
+          <a:bodyPr wrap="square" lIns="0" rIns="0" tIns="0" bIns="0">
+            <a:spAutoFit/>
+          </a:bodyPr>
+          <a:lstStyle/>
+          <a:p>
+            <a:pPr algn="l">
+              <a:lnSpc>
+                <a:spcPct val="110000"/>
+              </a:lnSpc>
+              <a:spcAft>
+                <a:spcPts val="0"/>
+              </a:spcAft>
+            </a:pPr>
+            <a:r>
+              <a:rPr sz="3000" b="1" i="0">
+                <a:solidFill>
+                  <a:srgbClr val="21295C"/>
+                </a:solidFill>
+                <a:latin typeface="Cambria"/>
+              </a:rPr>
+              <a:t>Glossary — the grid, the gates and the statistics</a:t>
+            </a:r>
+          </a:p>
+        </p:txBody>
+      </p:sp>
+      <p:sp>
+        <p:nvSpPr>
+          <p:cNvPr id="5" name="TextBox 4"/>
+          <p:cNvSpPr txBox="1"/>
+          <p:nvPr/>
+        </p:nvSpPr>
+        <p:spPr>
+          <a:xfrm>
+            <a:off x="777240" y="1417320"/>
+            <a:ext cx="10652760" cy="5120640"/>
+          </a:xfrm>
+          <a:prstGeom prst="rect">
+            <a:avLst/>
+          </a:prstGeom>
+          <a:noFill/>
+        </p:spPr>
+        <p:txBody>
+          <a:bodyPr wrap="square" lIns="0" rIns="0" tIns="0" bIns="0">
+            <a:spAutoFit/>
+          </a:bodyPr>
+          <a:lstStyle/>
+          <a:p>
+            <a:pPr algn="l">
+              <a:lnSpc>
+                <a:spcPct val="100000"/>
+              </a:lnSpc>
+              <a:spcAft>
+                <a:spcPts val="500"/>
+              </a:spcAft>
+            </a:pPr>
+            <a:r>
+              <a:rPr sz="2000" b="1" i="0">
+                <a:solidFill>
+                  <a:srgbClr val="065A82"/>
+                </a:solidFill>
+                <a:latin typeface="Calibri"/>
+              </a:rPr>
+              <a:t>LLC4320, face 10, tile 330  </a:t>
+            </a:r>
+            <a:r>
+              <a:rPr sz="2000" b="0" i="0">
+                <a:solidFill>
+                  <a:srgbClr val="1B2A33"/>
+                </a:solidFill>
+                <a:latin typeface="Calibri"/>
+              </a:rPr>
+              <a:t>the 1/48° MITgcm run; face 10 is rotated (i meridional, j zonal); tile 330 is the 720 × 720 California Current window.</a:t>
+            </a:r>
+          </a:p>
+          <a:p>
+            <a:pPr algn="l">
+              <a:lnSpc>
+                <a:spcPct val="100000"/>
+              </a:lnSpc>
+              <a:spcAft>
+                <a:spcPts val="500"/>
+              </a:spcAft>
+            </a:pPr>
+            <a:r>
+              <a:rPr sz="2000" b="1" i="0">
+                <a:solidFill>
+                  <a:srgbClr val="065A82"/>
+                </a:solidFill>
+                <a:latin typeface="Calibri"/>
+              </a:rPr>
+              <a:t>C-grid, Jacobian  </a:t>
+            </a:r>
+            <a:r>
+              <a:rPr sz="2000" b="0" i="0">
+                <a:solidFill>
+                  <a:srgbClr val="1B2A33"/>
+                </a:solidFill>
+                <a:latin typeface="Calibri"/>
+              </a:rPr>
+              <a:t>U on west faces, V on south faces, Theta at centres; the Jacobian ∇u interpolated to centres is 0.85x the flux-form strain.</a:t>
+            </a:r>
+          </a:p>
+          <a:p>
+            <a:pPr algn="l">
+              <a:lnSpc>
+                <a:spcPct val="100000"/>
+              </a:lnSpc>
+              <a:spcAft>
+                <a:spcPts val="500"/>
+              </a:spcAft>
+            </a:pPr>
+            <a:r>
+              <a:rPr sz="2000" b="1" i="0">
+                <a:solidFill>
+                  <a:srgbClr val="065A82"/>
+                </a:solidFill>
+                <a:latin typeface="Calibri"/>
+              </a:rPr>
+              <a:t>OS7MP  </a:t>
+            </a:r>
+            <a:r>
+              <a:rPr sz="2000" b="0" i="0">
+                <a:solidFill>
+                  <a:srgbClr val="1B2A33"/>
+                </a:solidFill>
+                <a:latin typeface="Calibri"/>
+              </a:rPr>
+              <a:t>LLC4320's tracer advection (tempAdvScheme = 7): flux-limited, seventh-order, monotonicity-preserving (Daru &amp; Tenaud 2004); its implicit diffusion is the rival.</a:t>
+            </a:r>
+          </a:p>
+          <a:p>
+            <a:pPr algn="l">
+              <a:lnSpc>
+                <a:spcPct val="100000"/>
+              </a:lnSpc>
+              <a:spcAft>
+                <a:spcPts val="500"/>
+              </a:spcAft>
+            </a:pPr>
+            <a:r>
+              <a:rPr sz="2000" b="1" i="0">
+                <a:solidFill>
+                  <a:srgbClr val="065A82"/>
+                </a:solidFill>
+                <a:latin typeface="Calibri"/>
+              </a:rPr>
+              <a:t>Halo, tile-edge margin, analysis mask  </a:t>
+            </a:r>
+            <a:r>
+              <a:rPr sz="2000" b="0" i="0">
+                <a:solidFill>
+                  <a:srgbClr val="1B2A33"/>
+                </a:solidFill>
+                <a:latin typeface="Calibri"/>
+              </a:rPr>
+              <a:t>7 cells (12.57 km) from land; edge_cells = 7 removes the finite tile-edge rim; with the 100 km offshore cut, 262,925 analysis cells.</a:t>
+            </a:r>
+          </a:p>
+          <a:p>
+            <a:pPr algn="l">
+              <a:lnSpc>
+                <a:spcPct val="100000"/>
+              </a:lnSpc>
+              <a:spcAft>
+                <a:spcPts val="500"/>
+              </a:spcAft>
+            </a:pPr>
+            <a:r>
+              <a:rPr sz="2000" b="1" i="0">
+                <a:solidFill>
+                  <a:srgbClr val="065A82"/>
+                </a:solidFill>
+                <a:latin typeface="Calibri"/>
+              </a:rPr>
+              <a:t>Front pixels (p90)  </a:t>
+            </a:r>
+            <a:r>
+              <a:rPr sz="2000" b="0" i="0">
+                <a:solidFill>
+                  <a:srgbClr val="1B2A33"/>
+                </a:solidFill>
+                <a:latin typeface="Calibri"/>
+              </a:rPr>
+              <a:t>cells with G at or above its 90th percentile — where every slope is fitted.</a:t>
+            </a:r>
+          </a:p>
+          <a:p>
+            <a:pPr algn="l">
+              <a:lnSpc>
+                <a:spcPct val="100000"/>
+              </a:lnSpc>
+              <a:spcAft>
+                <a:spcPts val="500"/>
+              </a:spcAft>
+            </a:pPr>
+            <a:r>
+              <a:rPr sz="2000" b="1" i="0">
+                <a:solidFill>
+                  <a:srgbClr val="065A82"/>
+                </a:solidFill>
+                <a:latin typeface="Calibri"/>
+              </a:rPr>
+              <a:t>V3 discrete null, V3b finite-volume null  </a:t>
+            </a:r>
+            <a:r>
+              <a:rPr sz="2000" b="0" i="0">
+                <a:solidFill>
+                  <a:srgbClr val="1B2A33"/>
+                </a:solidFill>
+                <a:latin typeface="Calibri"/>
+              </a:rPr>
+              <a:t>V3: truth advected by our own step; slope must be 1 ± 0.05 (the gate). V3b: truth from flux-form OS7MP-like advection (recorded, not gated).</a:t>
+            </a:r>
+          </a:p>
+          <a:p>
+            <a:pPr algn="l">
+              <a:lnSpc>
+                <a:spcPct val="100000"/>
+              </a:lnSpc>
+              <a:spcAft>
+                <a:spcPts val="500"/>
+              </a:spcAft>
+            </a:pPr>
+            <a:r>
+              <a:rPr sz="2000" b="1" i="0">
+                <a:solidFill>
+                  <a:srgbClr val="065A82"/>
+                </a:solidFill>
+                <a:latin typeface="Calibri"/>
+              </a:rPr>
+              <a:t>Slope [lo, hi]  </a:t>
+            </a:r>
+            <a:r>
+              <a:rPr sz="2000" b="0" i="0">
+                <a:solidFill>
+                  <a:srgbClr val="1B2A33"/>
+                </a:solidFill>
+                <a:latin typeface="Calibri"/>
+              </a:rPr>
+              <a:t>OLS slope of DG/Dt on 2F over front pixels; the brackets are the 32-cell block-bootstrap 2.5-97.5% interval.</a:t>
+            </a:r>
+          </a:p>
+          <a:p>
+            <a:pPr algn="l">
+              <a:lnSpc>
+                <a:spcPct val="100000"/>
+              </a:lnSpc>
+              <a:spcAft>
+                <a:spcPts val="500"/>
+              </a:spcAft>
+            </a:pPr>
+            <a:r>
+              <a:rPr sz="2000" b="1" i="0">
+                <a:solidFill>
+                  <a:srgbClr val="065A82"/>
+                </a:solidFill>
+                <a:latin typeface="Calibri"/>
+              </a:rPr>
+              <a:t>Oracle, xfail  </a:t>
+            </a:r>
+            <a:r>
+              <a:rPr sz="2000" b="0" i="0">
+                <a:solidFill>
+                  <a:srgbClr val="1B2A33"/>
+                </a:solidFill>
+                <a:latin typeface="Calibri"/>
+              </a:rPr>
+              <a:t>the repo's frontogenesis_tendency, matched bit for bit by form='chain'; a strict xfail documents a known bug and flips to XPASS when fixed.</a:t>
+            </a:r>
+          </a:p>
+        </p:txBody>
+      </p:sp>
+    </p:spTree>
+  </p:cSld>
+  <p:clrMapOvr>
+    <a:masterClrMapping/>
+  </p:clrMapOvr>
+</p:sld>
+</file>
+
+<file path=ppt/slides/slide19.xml><?xml version="1.0" encoding="utf-8"?>
+<p:sld xmlns:a="http://schemas.openxmlformats.org/drawingml/2006/main" xmlns:p="http://schemas.openxmlformats.org/presentationml/2006/main" xmlns:r="http://schemas.openxmlformats.org/officeDocument/2006/relationships">
+  <p:cSld>
+    <p:spTree>
+      <p:nvGrpSpPr>
+        <p:cNvPr id="1" name=""/>
+        <p:cNvGrpSpPr/>
+        <p:nvPr/>
+      </p:nvGrpSpPr>
+      <p:grpSpPr/>
+      <p:sp>
+        <p:nvSpPr>
+          <p:cNvPr id="2" name="Rectangle 1"/>
+          <p:cNvSpPr/>
+          <p:nvPr/>
+        </p:nvSpPr>
+        <p:spPr>
+          <a:xfrm>
+            <a:off x="0" y="0"/>
+            <a:ext cx="12191695" cy="6858000"/>
+          </a:xfrm>
+          <a:prstGeom prst="rect">
+            <a:avLst/>
+          </a:prstGeom>
+          <a:solidFill>
+            <a:srgbClr val="F2F6F8"/>
+          </a:solidFill>
+          <a:ln>
+            <a:noFill/>
+          </a:ln>
+          <a:effectLst/>
+        </p:spPr>
+        <p:style>
+          <a:lnRef idx="1">
+            <a:schemeClr val="accent1"/>
+          </a:lnRef>
+          <a:fillRef idx="3">
+            <a:schemeClr val="accent1"/>
+          </a:fillRef>
+          <a:effectRef idx="2">
+            <a:schemeClr val="accent1"/>
+          </a:effectRef>
+          <a:fontRef idx="minor">
+            <a:schemeClr val="lt1"/>
+          </a:fontRef>
+        </p:style>
+        <p:txBody>
+          <a:bodyPr rtlCol="0" anchor="ctr"/>
+          <a:lstStyle/>
+          <a:p>
+            <a:pPr algn="ctr"/>
+          </a:p>
+        </p:txBody>
+      </p:sp>
+      <p:sp>
+        <p:nvSpPr>
+          <p:cNvPr id="3" name="TextBox 2"/>
+          <p:cNvSpPr txBox="1"/>
+          <p:nvPr/>
+        </p:nvSpPr>
+        <p:spPr>
+          <a:xfrm>
+            <a:off x="777240" y="347472"/>
+            <a:ext cx="10698480" cy="329184"/>
+          </a:xfrm>
+          <a:prstGeom prst="rect">
+            <a:avLst/>
+          </a:prstGeom>
+          <a:noFill/>
+        </p:spPr>
+        <p:txBody>
+          <a:bodyPr wrap="square" lIns="0" rIns="0" tIns="0" bIns="0">
+            <a:spAutoFit/>
+          </a:bodyPr>
+          <a:lstStyle/>
+          <a:p>
+            <a:pPr algn="l">
+              <a:lnSpc>
+                <a:spcPct val="110000"/>
+              </a:lnSpc>
+              <a:spcAft>
+                <a:spcPts val="0"/>
+              </a:spcAft>
+            </a:pPr>
+            <a:r>
+              <a:rPr sz="2000" b="1" i="0">
+                <a:solidFill>
+                  <a:srgbClr val="1C7293"/>
+                </a:solidFill>
+                <a:latin typeface="Calibri"/>
+              </a:rPr>
+              <a:t>TASK 8  ·  EXTENDED BY TASK 9 (M0 / M1 SUMMARIES, GLOSSARY), 2026-10-01</a:t>
+            </a:r>
+          </a:p>
+        </p:txBody>
+      </p:sp>
+      <p:sp>
+        <p:nvSpPr>
+          <p:cNvPr id="4" name="TextBox 3"/>
+          <p:cNvSpPr txBox="1"/>
+          <p:nvPr/>
+        </p:nvSpPr>
+        <p:spPr>
+          <a:xfrm>
+            <a:off x="777240" y="676656"/>
+            <a:ext cx="10698480" cy="594360"/>
+          </a:xfrm>
+          <a:prstGeom prst="rect">
+            <a:avLst/>
+          </a:prstGeom>
+          <a:noFill/>
+        </p:spPr>
+        <p:txBody>
+          <a:bodyPr wrap="square" lIns="0" rIns="0" tIns="0" bIns="0">
+            <a:spAutoFit/>
+          </a:bodyPr>
+          <a:lstStyle/>
+          <a:p>
+            <a:pPr algn="l">
+              <a:lnSpc>
+                <a:spcPct val="110000"/>
+              </a:lnSpc>
+              <a:spcAft>
+                <a:spcPts val="0"/>
+              </a:spcAft>
+            </a:pPr>
+            <a:r>
+              <a:rPr sz="3000" b="1" i="0">
+                <a:solidFill>
+                  <a:srgbClr val="21295C"/>
+                </a:solidFill>
+                <a:latin typeface="Cambria"/>
+              </a:rPr>
+              <a:t>This deck</a:t>
+            </a:r>
+          </a:p>
+        </p:txBody>
+      </p:sp>
+      <p:sp>
+        <p:nvSpPr>
+          <p:cNvPr id="5" name="TextBox 4"/>
+          <p:cNvSpPr txBox="1"/>
+          <p:nvPr/>
+        </p:nvSpPr>
+        <p:spPr>
+          <a:xfrm>
+            <a:off x="777240" y="1280160"/>
+            <a:ext cx="10698480" cy="384048"/>
+          </a:xfrm>
+          <a:prstGeom prst="rect">
+            <a:avLst/>
+          </a:prstGeom>
+          <a:noFill/>
+        </p:spPr>
+        <p:txBody>
+          <a:bodyPr wrap="square" lIns="0" rIns="0" tIns="0" bIns="0">
+            <a:spAutoFit/>
+          </a:bodyPr>
+          <a:lstStyle/>
+          <a:p>
+            <a:pPr algn="l">
+              <a:lnSpc>
+                <a:spcPct val="110000"/>
+              </a:lnSpc>
+              <a:spcAft>
+                <a:spcPts val="0"/>
+              </a:spcAft>
+            </a:pPr>
+            <a:r>
+              <a:rPr sz="2000" b="0" i="0">
+                <a:solidFill>
+                  <a:srgbClr val="62737F"/>
+                </a:solidFill>
+                <a:latin typeface="Calibri"/>
+              </a:rPr>
+              <a:t>Reproducible from the logged numbers alone; nothing below 20 pt; 19 slides</a:t>
             </a:r>
           </a:p>
         </p:txBody>
@@ -7382,7 +8803,7 @@
                 </a:solidFill>
                 <a:latin typeface="Calibri"/>
               </a:rPr>
-              <a:t>Nine task sessions, then the audit and what it leaves behind</a:t>
+              <a:t>Two one-slide summaries, nine task sessions, the audit, and a glossary</a:t>
             </a:r>
           </a:p>
         </p:txBody>
@@ -7395,8 +8816,198 @@
         </p:nvSpPr>
         <p:spPr>
           <a:xfrm>
-            <a:off x="822960" y="1691640"/>
-            <a:ext cx="420624" cy="420624"/>
+            <a:off x="822960" y="1645920"/>
+            <a:ext cx="457200" cy="457200"/>
+          </a:xfrm>
+          <a:prstGeom prst="ellipse">
+            <a:avLst/>
+          </a:prstGeom>
+          <a:solidFill>
+            <a:srgbClr val="1C7293"/>
+          </a:solidFill>
+          <a:ln>
+            <a:noFill/>
+          </a:ln>
+          <a:effectLst/>
+        </p:spPr>
+        <p:style>
+          <a:lnRef idx="1">
+            <a:schemeClr val="accent1"/>
+          </a:lnRef>
+          <a:fillRef idx="3">
+            <a:schemeClr val="accent1"/>
+          </a:fillRef>
+          <a:effectRef idx="2">
+            <a:schemeClr val="accent1"/>
+          </a:effectRef>
+          <a:fontRef idx="minor">
+            <a:schemeClr val="lt1"/>
+          </a:fontRef>
+        </p:style>
+        <p:txBody>
+          <a:bodyPr rtlCol="0" anchor="ctr" lIns="0" rIns="0" tIns="0" bIns="0" wrap="none"/>
+          <a:lstStyle/>
+          <a:p>
+            <a:pPr algn="ctr"/>
+            <a:r>
+              <a:rPr sz="2000" b="1" i="0">
+                <a:solidFill>
+                  <a:srgbClr val="FFFFFF"/>
+                </a:solidFill>
+                <a:latin typeface="Calibri"/>
+              </a:rPr>
+              <a:t>M0</a:t>
+            </a:r>
+          </a:p>
+        </p:txBody>
+      </p:sp>
+      <p:sp>
+        <p:nvSpPr>
+          <p:cNvPr id="6" name="TextBox 5"/>
+          <p:cNvSpPr txBox="1"/>
+          <p:nvPr/>
+        </p:nvSpPr>
+        <p:spPr>
+          <a:xfrm>
+            <a:off x="1463040" y="1719072"/>
+            <a:ext cx="4846320" cy="365760"/>
+          </a:xfrm>
+          <a:prstGeom prst="rect">
+            <a:avLst/>
+          </a:prstGeom>
+          <a:noFill/>
+        </p:spPr>
+        <p:txBody>
+          <a:bodyPr wrap="square" lIns="0" rIns="0" tIns="0" bIns="0">
+            <a:spAutoFit/>
+          </a:bodyPr>
+          <a:lstStyle/>
+          <a:p>
+            <a:pPr algn="l">
+              <a:lnSpc>
+                <a:spcPct val="110000"/>
+              </a:lnSpc>
+              <a:spcAft>
+                <a:spcPts val="0"/>
+              </a:spcAft>
+            </a:pPr>
+            <a:r>
+              <a:rPr sz="2000" b="1" i="0">
+                <a:solidFill>
+                  <a:srgbClr val="21295C"/>
+                </a:solidFill>
+                <a:latin typeface="Calibri"/>
+              </a:rPr>
+              <a:t>Where we started: M0 in one slide</a:t>
+            </a:r>
+          </a:p>
+        </p:txBody>
+      </p:sp>
+      <p:sp>
+        <p:nvSpPr>
+          <p:cNvPr id="7" name="Oval 6"/>
+          <p:cNvSpPr/>
+          <p:nvPr/>
+        </p:nvSpPr>
+        <p:spPr>
+          <a:xfrm>
+            <a:off x="822960" y="2231136"/>
+            <a:ext cx="457200" cy="457200"/>
+          </a:xfrm>
+          <a:prstGeom prst="ellipse">
+            <a:avLst/>
+          </a:prstGeom>
+          <a:solidFill>
+            <a:srgbClr val="1C7293"/>
+          </a:solidFill>
+          <a:ln>
+            <a:noFill/>
+          </a:ln>
+          <a:effectLst/>
+        </p:spPr>
+        <p:style>
+          <a:lnRef idx="1">
+            <a:schemeClr val="accent1"/>
+          </a:lnRef>
+          <a:fillRef idx="3">
+            <a:schemeClr val="accent1"/>
+          </a:fillRef>
+          <a:effectRef idx="2">
+            <a:schemeClr val="accent1"/>
+          </a:effectRef>
+          <a:fontRef idx="minor">
+            <a:schemeClr val="lt1"/>
+          </a:fontRef>
+        </p:style>
+        <p:txBody>
+          <a:bodyPr rtlCol="0" anchor="ctr" lIns="0" rIns="0" tIns="0" bIns="0" wrap="none"/>
+          <a:lstStyle/>
+          <a:p>
+            <a:pPr algn="ctr"/>
+            <a:r>
+              <a:rPr sz="2000" b="1" i="0">
+                <a:solidFill>
+                  <a:srgbClr val="FFFFFF"/>
+                </a:solidFill>
+                <a:latin typeface="Calibri"/>
+              </a:rPr>
+              <a:t>M1</a:t>
+            </a:r>
+          </a:p>
+        </p:txBody>
+      </p:sp>
+      <p:sp>
+        <p:nvSpPr>
+          <p:cNvPr id="8" name="TextBox 7"/>
+          <p:cNvSpPr txBox="1"/>
+          <p:nvPr/>
+        </p:nvSpPr>
+        <p:spPr>
+          <a:xfrm>
+            <a:off x="1463040" y="2304288"/>
+            <a:ext cx="4846320" cy="365760"/>
+          </a:xfrm>
+          <a:prstGeom prst="rect">
+            <a:avLst/>
+          </a:prstGeom>
+          <a:noFill/>
+        </p:spPr>
+        <p:txBody>
+          <a:bodyPr wrap="square" lIns="0" rIns="0" tIns="0" bIns="0">
+            <a:spAutoFit/>
+          </a:bodyPr>
+          <a:lstStyle/>
+          <a:p>
+            <a:pPr algn="l">
+              <a:lnSpc>
+                <a:spcPct val="110000"/>
+              </a:lnSpc>
+              <a:spcAft>
+                <a:spcPts val="0"/>
+              </a:spcAft>
+            </a:pPr>
+            <a:r>
+              <a:rPr sz="2000" b="1" i="0">
+                <a:solidFill>
+                  <a:srgbClr val="21295C"/>
+                </a:solidFill>
+                <a:latin typeface="Calibri"/>
+              </a:rPr>
+              <a:t>The answer: M1 in one slide</a:t>
+            </a:r>
+          </a:p>
+        </p:txBody>
+      </p:sp>
+      <p:sp>
+        <p:nvSpPr>
+          <p:cNvPr id="9" name="Oval 8"/>
+          <p:cNvSpPr/>
+          <p:nvPr/>
+        </p:nvSpPr>
+        <p:spPr>
+          <a:xfrm>
+            <a:off x="822960" y="2816352"/>
+            <a:ext cx="457200" cy="457200"/>
           </a:xfrm>
           <a:prstGeom prst="ellipse">
             <a:avLst/>
@@ -7424,7 +9035,7 @@
           </a:fontRef>
         </p:style>
         <p:txBody>
-          <a:bodyPr rtlCol="0" anchor="ctr" lIns="0" rIns="0" tIns="0" bIns="0"/>
+          <a:bodyPr rtlCol="0" anchor="ctr" lIns="0" rIns="0" tIns="0" bIns="0" wrap="none"/>
           <a:lstStyle/>
           <a:p>
             <a:pPr algn="ctr"/>
@@ -7442,13 +9053,13 @@
       </p:sp>
       <p:sp>
         <p:nvSpPr>
-          <p:cNvPr id="6" name="TextBox 5"/>
+          <p:cNvPr id="10" name="TextBox 9"/>
           <p:cNvSpPr txBox="1"/>
           <p:nvPr/>
         </p:nvSpPr>
         <p:spPr>
           <a:xfrm>
-            <a:off x="1417320" y="1746504"/>
+            <a:off x="1463040" y="2889504"/>
             <a:ext cx="4846320" cy="365760"/>
           </a:xfrm>
           <a:prstGeom prst="rect">
@@ -7484,14 +9095,14 @@
       </p:sp>
       <p:sp>
         <p:nvSpPr>
-          <p:cNvPr id="7" name="Oval 6"/>
+          <p:cNvPr id="11" name="Oval 10"/>
           <p:cNvSpPr/>
           <p:nvPr/>
         </p:nvSpPr>
         <p:spPr>
           <a:xfrm>
-            <a:off x="822960" y="2313432"/>
-            <a:ext cx="420624" cy="420624"/>
+            <a:off x="822960" y="3401568"/>
+            <a:ext cx="457200" cy="457200"/>
           </a:xfrm>
           <a:prstGeom prst="ellipse">
             <a:avLst/>
@@ -7519,7 +9130,7 @@
           </a:fontRef>
         </p:style>
         <p:txBody>
-          <a:bodyPr rtlCol="0" anchor="ctr" lIns="0" rIns="0" tIns="0" bIns="0"/>
+          <a:bodyPr rtlCol="0" anchor="ctr" lIns="0" rIns="0" tIns="0" bIns="0" wrap="none"/>
           <a:lstStyle/>
           <a:p>
             <a:pPr algn="ctr"/>
@@ -7537,13 +9148,13 @@
       </p:sp>
       <p:sp>
         <p:nvSpPr>
-          <p:cNvPr id="8" name="TextBox 7"/>
+          <p:cNvPr id="12" name="TextBox 11"/>
           <p:cNvSpPr txBox="1"/>
           <p:nvPr/>
         </p:nvSpPr>
         <p:spPr>
           <a:xfrm>
-            <a:off x="1417320" y="2368296"/>
+            <a:off x="1463040" y="3474720"/>
             <a:ext cx="4846320" cy="365760"/>
           </a:xfrm>
           <a:prstGeom prst="rect">
@@ -7579,14 +9190,14 @@
       </p:sp>
       <p:sp>
         <p:nvSpPr>
-          <p:cNvPr id="9" name="Oval 8"/>
+          <p:cNvPr id="13" name="Oval 12"/>
           <p:cNvSpPr/>
           <p:nvPr/>
         </p:nvSpPr>
         <p:spPr>
           <a:xfrm>
-            <a:off x="822960" y="2935224"/>
-            <a:ext cx="420624" cy="420624"/>
+            <a:off x="822960" y="3986784"/>
+            <a:ext cx="457200" cy="457200"/>
           </a:xfrm>
           <a:prstGeom prst="ellipse">
             <a:avLst/>
@@ -7614,7 +9225,7 @@
           </a:fontRef>
         </p:style>
         <p:txBody>
-          <a:bodyPr rtlCol="0" anchor="ctr" lIns="0" rIns="0" tIns="0" bIns="0"/>
+          <a:bodyPr rtlCol="0" anchor="ctr" lIns="0" rIns="0" tIns="0" bIns="0" wrap="none"/>
           <a:lstStyle/>
           <a:p>
             <a:pPr algn="ctr"/>
@@ -7632,13 +9243,13 @@
       </p:sp>
       <p:sp>
         <p:nvSpPr>
-          <p:cNvPr id="10" name="TextBox 9"/>
+          <p:cNvPr id="14" name="TextBox 13"/>
           <p:cNvSpPr txBox="1"/>
           <p:nvPr/>
         </p:nvSpPr>
         <p:spPr>
           <a:xfrm>
-            <a:off x="1417320" y="2990088"/>
+            <a:off x="1463040" y="4059936"/>
             <a:ext cx="4846320" cy="365760"/>
           </a:xfrm>
           <a:prstGeom prst="rect">
@@ -7674,14 +9285,14 @@
       </p:sp>
       <p:sp>
         <p:nvSpPr>
-          <p:cNvPr id="11" name="Oval 10"/>
+          <p:cNvPr id="15" name="Oval 14"/>
           <p:cNvSpPr/>
           <p:nvPr/>
         </p:nvSpPr>
         <p:spPr>
           <a:xfrm>
-            <a:off x="822960" y="3557016"/>
-            <a:ext cx="420624" cy="420624"/>
+            <a:off x="822960" y="4572000"/>
+            <a:ext cx="457200" cy="457200"/>
           </a:xfrm>
           <a:prstGeom prst="ellipse">
             <a:avLst/>
@@ -7709,7 +9320,7 @@
           </a:fontRef>
         </p:style>
         <p:txBody>
-          <a:bodyPr rtlCol="0" anchor="ctr" lIns="0" rIns="0" tIns="0" bIns="0"/>
+          <a:bodyPr rtlCol="0" anchor="ctr" lIns="0" rIns="0" tIns="0" bIns="0" wrap="none"/>
           <a:lstStyle/>
           <a:p>
             <a:pPr algn="ctr"/>
@@ -7727,13 +9338,13 @@
       </p:sp>
       <p:sp>
         <p:nvSpPr>
-          <p:cNvPr id="12" name="TextBox 11"/>
+          <p:cNvPr id="16" name="TextBox 15"/>
           <p:cNvSpPr txBox="1"/>
           <p:nvPr/>
         </p:nvSpPr>
         <p:spPr>
           <a:xfrm>
-            <a:off x="1417320" y="3611880"/>
+            <a:off x="1463040" y="4645152"/>
             <a:ext cx="4846320" cy="365760"/>
           </a:xfrm>
           <a:prstGeom prst="rect">
@@ -7769,14 +9380,14 @@
       </p:sp>
       <p:sp>
         <p:nvSpPr>
-          <p:cNvPr id="13" name="Oval 12"/>
+          <p:cNvPr id="17" name="Oval 16"/>
           <p:cNvSpPr/>
           <p:nvPr/>
         </p:nvSpPr>
         <p:spPr>
           <a:xfrm>
-            <a:off x="822960" y="4178808"/>
-            <a:ext cx="420624" cy="420624"/>
+            <a:off x="822960" y="5157216"/>
+            <a:ext cx="457200" cy="457200"/>
           </a:xfrm>
           <a:prstGeom prst="ellipse">
             <a:avLst/>
@@ -7804,7 +9415,7 @@
           </a:fontRef>
         </p:style>
         <p:txBody>
-          <a:bodyPr rtlCol="0" anchor="ctr" lIns="0" rIns="0" tIns="0" bIns="0"/>
+          <a:bodyPr rtlCol="0" anchor="ctr" lIns="0" rIns="0" tIns="0" bIns="0" wrap="none"/>
           <a:lstStyle/>
           <a:p>
             <a:pPr algn="ctr"/>
@@ -7822,13 +9433,13 @@
       </p:sp>
       <p:sp>
         <p:nvSpPr>
-          <p:cNvPr id="14" name="TextBox 13"/>
+          <p:cNvPr id="18" name="TextBox 17"/>
           <p:cNvSpPr txBox="1"/>
           <p:nvPr/>
         </p:nvSpPr>
         <p:spPr>
           <a:xfrm>
-            <a:off x="1417320" y="4233672"/>
+            <a:off x="1463040" y="5230368"/>
             <a:ext cx="4846320" cy="365760"/>
           </a:xfrm>
           <a:prstGeom prst="rect">
@@ -7864,14 +9475,14 @@
       </p:sp>
       <p:sp>
         <p:nvSpPr>
-          <p:cNvPr id="15" name="Oval 14"/>
+          <p:cNvPr id="19" name="Oval 18"/>
           <p:cNvSpPr/>
           <p:nvPr/>
         </p:nvSpPr>
         <p:spPr>
           <a:xfrm>
-            <a:off x="822960" y="4800600"/>
-            <a:ext cx="420624" cy="420624"/>
+            <a:off x="822960" y="5742432"/>
+            <a:ext cx="457200" cy="457200"/>
           </a:xfrm>
           <a:prstGeom prst="ellipse">
             <a:avLst/>
@@ -7899,7 +9510,7 @@
           </a:fontRef>
         </p:style>
         <p:txBody>
-          <a:bodyPr rtlCol="0" anchor="ctr" lIns="0" rIns="0" tIns="0" bIns="0"/>
+          <a:bodyPr rtlCol="0" anchor="ctr" lIns="0" rIns="0" tIns="0" bIns="0" wrap="none"/>
           <a:lstStyle/>
           <a:p>
             <a:pPr algn="ctr"/>
@@ -7917,13 +9528,13 @@
       </p:sp>
       <p:sp>
         <p:nvSpPr>
-          <p:cNvPr id="16" name="TextBox 15"/>
+          <p:cNvPr id="20" name="TextBox 19"/>
           <p:cNvSpPr txBox="1"/>
           <p:nvPr/>
         </p:nvSpPr>
         <p:spPr>
           <a:xfrm>
-            <a:off x="1417320" y="4855464"/>
+            <a:off x="1463040" y="5815584"/>
             <a:ext cx="4846320" cy="365760"/>
           </a:xfrm>
           <a:prstGeom prst="rect">
@@ -7959,14 +9570,14 @@
       </p:sp>
       <p:sp>
         <p:nvSpPr>
-          <p:cNvPr id="17" name="Oval 16"/>
+          <p:cNvPr id="21" name="Oval 20"/>
           <p:cNvSpPr/>
           <p:nvPr/>
         </p:nvSpPr>
         <p:spPr>
           <a:xfrm>
-            <a:off x="822960" y="5422392"/>
-            <a:ext cx="420624" cy="420624"/>
+            <a:off x="6400800" y="1645920"/>
+            <a:ext cx="457200" cy="457200"/>
           </a:xfrm>
           <a:prstGeom prst="ellipse">
             <a:avLst/>
@@ -7994,7 +9605,7 @@
           </a:fontRef>
         </p:style>
         <p:txBody>
-          <a:bodyPr rtlCol="0" anchor="ctr" lIns="0" rIns="0" tIns="0" bIns="0"/>
+          <a:bodyPr rtlCol="0" anchor="ctr" lIns="0" rIns="0" tIns="0" bIns="0" wrap="none"/>
           <a:lstStyle/>
           <a:p>
             <a:pPr algn="ctr"/>
@@ -8012,13 +9623,13 @@
       </p:sp>
       <p:sp>
         <p:nvSpPr>
-          <p:cNvPr id="18" name="TextBox 17"/>
+          <p:cNvPr id="22" name="TextBox 21"/>
           <p:cNvSpPr txBox="1"/>
           <p:nvPr/>
         </p:nvSpPr>
         <p:spPr>
           <a:xfrm>
-            <a:off x="1417320" y="5477255"/>
+            <a:off x="7040880" y="1719072"/>
             <a:ext cx="4846320" cy="365760"/>
           </a:xfrm>
           <a:prstGeom prst="rect">
@@ -8054,14 +9665,14 @@
       </p:sp>
       <p:sp>
         <p:nvSpPr>
-          <p:cNvPr id="19" name="Oval 18"/>
+          <p:cNvPr id="23" name="Oval 22"/>
           <p:cNvSpPr/>
           <p:nvPr/>
         </p:nvSpPr>
         <p:spPr>
           <a:xfrm>
-            <a:off x="6400800" y="1691640"/>
-            <a:ext cx="420624" cy="420624"/>
+            <a:off x="6400800" y="2231136"/>
+            <a:ext cx="457200" cy="457200"/>
           </a:xfrm>
           <a:prstGeom prst="ellipse">
             <a:avLst/>
@@ -8089,7 +9700,7 @@
           </a:fontRef>
         </p:style>
         <p:txBody>
-          <a:bodyPr rtlCol="0" anchor="ctr" lIns="0" rIns="0" tIns="0" bIns="0"/>
+          <a:bodyPr rtlCol="0" anchor="ctr" lIns="0" rIns="0" tIns="0" bIns="0" wrap="none"/>
           <a:lstStyle/>
           <a:p>
             <a:pPr algn="ctr"/>
@@ -8107,13 +9718,13 @@
       </p:sp>
       <p:sp>
         <p:nvSpPr>
-          <p:cNvPr id="20" name="TextBox 19"/>
+          <p:cNvPr id="24" name="TextBox 23"/>
           <p:cNvSpPr txBox="1"/>
           <p:nvPr/>
         </p:nvSpPr>
         <p:spPr>
           <a:xfrm>
-            <a:off x="6995160" y="1746504"/>
+            <a:off x="7040880" y="2304288"/>
             <a:ext cx="4846320" cy="365760"/>
           </a:xfrm>
           <a:prstGeom prst="rect">
@@ -8149,14 +9760,14 @@
       </p:sp>
       <p:sp>
         <p:nvSpPr>
-          <p:cNvPr id="21" name="Oval 20"/>
+          <p:cNvPr id="25" name="Oval 24"/>
           <p:cNvSpPr/>
           <p:nvPr/>
         </p:nvSpPr>
         <p:spPr>
           <a:xfrm>
-            <a:off x="6400800" y="2313432"/>
-            <a:ext cx="420624" cy="420624"/>
+            <a:off x="6400800" y="2816352"/>
+            <a:ext cx="457200" cy="457200"/>
           </a:xfrm>
           <a:prstGeom prst="ellipse">
             <a:avLst/>
@@ -8184,7 +9795,7 @@
           </a:fontRef>
         </p:style>
         <p:txBody>
-          <a:bodyPr rtlCol="0" anchor="ctr" lIns="0" rIns="0" tIns="0" bIns="0"/>
+          <a:bodyPr rtlCol="0" anchor="ctr" lIns="0" rIns="0" tIns="0" bIns="0" wrap="none"/>
           <a:lstStyle/>
           <a:p>
             <a:pPr algn="ctr"/>
@@ -8202,13 +9813,13 @@
       </p:sp>
       <p:sp>
         <p:nvSpPr>
-          <p:cNvPr id="22" name="TextBox 21"/>
+          <p:cNvPr id="26" name="TextBox 25"/>
           <p:cNvSpPr txBox="1"/>
           <p:nvPr/>
         </p:nvSpPr>
         <p:spPr>
           <a:xfrm>
-            <a:off x="6995160" y="2368296"/>
+            <a:off x="7040880" y="2889504"/>
             <a:ext cx="4846320" cy="365760"/>
           </a:xfrm>
           <a:prstGeom prst="rect">
@@ -8244,14 +9855,14 @@
       </p:sp>
       <p:sp>
         <p:nvSpPr>
-          <p:cNvPr id="23" name="Oval 22"/>
+          <p:cNvPr id="27" name="Oval 26"/>
           <p:cNvSpPr/>
           <p:nvPr/>
         </p:nvSpPr>
         <p:spPr>
           <a:xfrm>
-            <a:off x="6400800" y="2935224"/>
-            <a:ext cx="420624" cy="420624"/>
+            <a:off x="6400800" y="3401568"/>
+            <a:ext cx="457200" cy="457200"/>
           </a:xfrm>
           <a:prstGeom prst="ellipse">
             <a:avLst/>
@@ -8279,7 +9890,7 @@
           </a:fontRef>
         </p:style>
         <p:txBody>
-          <a:bodyPr rtlCol="0" anchor="ctr" lIns="0" rIns="0" tIns="0" bIns="0"/>
+          <a:bodyPr rtlCol="0" anchor="ctr" lIns="0" rIns="0" tIns="0" bIns="0" wrap="none"/>
           <a:lstStyle/>
           <a:p>
             <a:pPr algn="ctr"/>
@@ -8297,13 +9908,13 @@
       </p:sp>
       <p:sp>
         <p:nvSpPr>
-          <p:cNvPr id="24" name="TextBox 23"/>
+          <p:cNvPr id="28" name="TextBox 27"/>
           <p:cNvSpPr txBox="1"/>
           <p:nvPr/>
         </p:nvSpPr>
         <p:spPr>
           <a:xfrm>
-            <a:off x="6995160" y="2990088"/>
+            <a:off x="7040880" y="3474720"/>
             <a:ext cx="4846320" cy="365760"/>
           </a:xfrm>
           <a:prstGeom prst="rect">
@@ -8339,14 +9950,14 @@
       </p:sp>
       <p:sp>
         <p:nvSpPr>
-          <p:cNvPr id="25" name="Oval 24"/>
+          <p:cNvPr id="29" name="Oval 28"/>
           <p:cNvSpPr/>
           <p:nvPr/>
         </p:nvSpPr>
         <p:spPr>
           <a:xfrm>
-            <a:off x="6400800" y="3557016"/>
-            <a:ext cx="420624" cy="420624"/>
+            <a:off x="6400800" y="3986784"/>
+            <a:ext cx="457200" cy="457200"/>
           </a:xfrm>
           <a:prstGeom prst="ellipse">
             <a:avLst/>
@@ -8374,7 +9985,7 @@
           </a:fontRef>
         </p:style>
         <p:txBody>
-          <a:bodyPr rtlCol="0" anchor="ctr" lIns="0" rIns="0" tIns="0" bIns="0"/>
+          <a:bodyPr rtlCol="0" anchor="ctr" lIns="0" rIns="0" tIns="0" bIns="0" wrap="none"/>
           <a:lstStyle/>
           <a:p>
             <a:pPr algn="ctr"/>
@@ -8392,13 +10003,13 @@
       </p:sp>
       <p:sp>
         <p:nvSpPr>
-          <p:cNvPr id="26" name="TextBox 25"/>
+          <p:cNvPr id="30" name="TextBox 29"/>
           <p:cNvSpPr txBox="1"/>
           <p:nvPr/>
         </p:nvSpPr>
         <p:spPr>
           <a:xfrm>
-            <a:off x="6995160" y="3611880"/>
+            <a:off x="7040880" y="4059936"/>
             <a:ext cx="4846320" cy="365760"/>
           </a:xfrm>
           <a:prstGeom prst="rect">
@@ -8434,14 +10045,14 @@
       </p:sp>
       <p:sp>
         <p:nvSpPr>
-          <p:cNvPr id="27" name="Oval 26"/>
+          <p:cNvPr id="31" name="Oval 30"/>
           <p:cNvSpPr/>
           <p:nvPr/>
         </p:nvSpPr>
         <p:spPr>
           <a:xfrm>
-            <a:off x="6400800" y="4178808"/>
-            <a:ext cx="420624" cy="420624"/>
+            <a:off x="6400800" y="4572000"/>
+            <a:ext cx="457200" cy="457200"/>
           </a:xfrm>
           <a:prstGeom prst="ellipse">
             <a:avLst/>
@@ -8469,7 +10080,7 @@
           </a:fontRef>
         </p:style>
         <p:txBody>
-          <a:bodyPr rtlCol="0" anchor="ctr" lIns="0" rIns="0" tIns="0" bIns="0"/>
+          <a:bodyPr rtlCol="0" anchor="ctr" lIns="0" rIns="0" tIns="0" bIns="0" wrap="none"/>
           <a:lstStyle/>
           <a:p>
             <a:pPr algn="ctr"/>
@@ -8487,13 +10098,13 @@
       </p:sp>
       <p:sp>
         <p:nvSpPr>
-          <p:cNvPr id="28" name="TextBox 27"/>
+          <p:cNvPr id="32" name="TextBox 31"/>
           <p:cNvSpPr txBox="1"/>
           <p:nvPr/>
         </p:nvSpPr>
         <p:spPr>
           <a:xfrm>
-            <a:off x="6995160" y="4233672"/>
+            <a:off x="7040880" y="4645152"/>
             <a:ext cx="4846320" cy="365760"/>
           </a:xfrm>
           <a:prstGeom prst="rect">
@@ -8529,14 +10140,109 @@
       </p:sp>
       <p:sp>
         <p:nvSpPr>
-          <p:cNvPr id="29" name="Oval 28"/>
+          <p:cNvPr id="33" name="Oval 32"/>
           <p:cNvSpPr/>
           <p:nvPr/>
         </p:nvSpPr>
         <p:spPr>
           <a:xfrm>
-            <a:off x="6400800" y="4800600"/>
-            <a:ext cx="420624" cy="420624"/>
+            <a:off x="6400800" y="5157216"/>
+            <a:ext cx="457200" cy="457200"/>
+          </a:xfrm>
+          <a:prstGeom prst="ellipse">
+            <a:avLst/>
+          </a:prstGeom>
+          <a:solidFill>
+            <a:srgbClr val="1C7293"/>
+          </a:solidFill>
+          <a:ln>
+            <a:noFill/>
+          </a:ln>
+          <a:effectLst/>
+        </p:spPr>
+        <p:style>
+          <a:lnRef idx="1">
+            <a:schemeClr val="accent1"/>
+          </a:lnRef>
+          <a:fillRef idx="3">
+            <a:schemeClr val="accent1"/>
+          </a:fillRef>
+          <a:effectRef idx="2">
+            <a:schemeClr val="accent1"/>
+          </a:effectRef>
+          <a:fontRef idx="minor">
+            <a:schemeClr val="lt1"/>
+          </a:fontRef>
+        </p:style>
+        <p:txBody>
+          <a:bodyPr rtlCol="0" anchor="ctr" lIns="0" rIns="0" tIns="0" bIns="0" wrap="none"/>
+          <a:lstStyle/>
+          <a:p>
+            <a:pPr algn="ctr"/>
+            <a:r>
+              <a:rPr sz="2000" b="1" i="0">
+                <a:solidFill>
+                  <a:srgbClr val="FFFFFF"/>
+                </a:solidFill>
+                <a:latin typeface="Calibri"/>
+              </a:rPr>
+              <a:t>§</a:t>
+            </a:r>
+          </a:p>
+        </p:txBody>
+      </p:sp>
+      <p:sp>
+        <p:nvSpPr>
+          <p:cNvPr id="34" name="TextBox 33"/>
+          <p:cNvSpPr txBox="1"/>
+          <p:nvPr/>
+        </p:nvSpPr>
+        <p:spPr>
+          <a:xfrm>
+            <a:off x="7040880" y="5230368"/>
+            <a:ext cx="4846320" cy="365760"/>
+          </a:xfrm>
+          <a:prstGeom prst="rect">
+            <a:avLst/>
+          </a:prstGeom>
+          <a:noFill/>
+        </p:spPr>
+        <p:txBody>
+          <a:bodyPr wrap="square" lIns="0" rIns="0" tIns="0" bIns="0">
+            <a:spAutoFit/>
+          </a:bodyPr>
+          <a:lstStyle/>
+          <a:p>
+            <a:pPr algn="l">
+              <a:lnSpc>
+                <a:spcPct val="110000"/>
+              </a:lnSpc>
+              <a:spcAft>
+                <a:spcPts val="0"/>
+              </a:spcAft>
+            </a:pPr>
+            <a:r>
+              <a:rPr sz="2000" b="1" i="0">
+                <a:solidFill>
+                  <a:srgbClr val="21295C"/>
+                </a:solidFill>
+                <a:latin typeface="Calibri"/>
+              </a:rPr>
+              <a:t>Glossary (two slides)</a:t>
+            </a:r>
+          </a:p>
+        </p:txBody>
+      </p:sp>
+      <p:sp>
+        <p:nvSpPr>
+          <p:cNvPr id="35" name="Oval 34"/>
+          <p:cNvSpPr/>
+          <p:nvPr/>
+        </p:nvSpPr>
+        <p:spPr>
+          <a:xfrm>
+            <a:off x="6400800" y="5742432"/>
+            <a:ext cx="457200" cy="457200"/>
           </a:xfrm>
           <a:prstGeom prst="ellipse">
             <a:avLst/>
@@ -8564,7 +10270,7 @@
           </a:fontRef>
         </p:style>
         <p:txBody>
-          <a:bodyPr rtlCol="0" anchor="ctr" lIns="0" rIns="0" tIns="0" bIns="0"/>
+          <a:bodyPr rtlCol="0" anchor="ctr" lIns="0" rIns="0" tIns="0" bIns="0" wrap="none"/>
           <a:lstStyle/>
           <a:p>
             <a:pPr algn="ctr"/>
@@ -8582,13 +10288,13 @@
       </p:sp>
       <p:sp>
         <p:nvSpPr>
-          <p:cNvPr id="30" name="TextBox 29"/>
+          <p:cNvPr id="36" name="TextBox 35"/>
           <p:cNvSpPr txBox="1"/>
           <p:nvPr/>
         </p:nvSpPr>
         <p:spPr>
           <a:xfrm>
-            <a:off x="6995160" y="4855464"/>
+            <a:off x="7040880" y="5815584"/>
             <a:ext cx="4846320" cy="365760"/>
           </a:xfrm>
           <a:prstGeom prst="rect">
@@ -8721,7 +10427,7 @@
                 </a:solidFill>
                 <a:latin typeface="Calibri"/>
               </a:rPr>
-              <a:t>TASK 1  ·  V6</a:t>
+              <a:t>MILESTONE M0  ·  ACCESS AND RECONNAISSANCE  ·  CLOSED 2026-09-28</a:t>
             </a:r>
           </a:p>
         </p:txBody>
@@ -8763,7 +10469,7 @@
                 </a:solidFill>
                 <a:latin typeface="Cambria"/>
               </a:rPr>
-              <a:t>Masking and tile330_masks.nc</a:t>
+              <a:t>Where we started: M0 in one slide</a:t>
             </a:r>
           </a:p>
         </p:txBody>
@@ -8805,35 +10511,53 @@
                 </a:solidFill>
                 <a:latin typeface="Calibri"/>
               </a:rPr>
-              <a:t>Halo = 7 × the measured dxC = 12.57 km; the 100 km cut removes the Gulf, no polygon</a:t>
-            </a:r>
-          </a:p>
-        </p:txBody>
-      </p:sp>
-      <p:pic>
-        <p:nvPicPr>
-          <p:cNvPr id="6" name="Picture 5" descr="m1_crop_V6a.png"/>
-          <p:cNvPicPr>
-            <a:picLocks noChangeAspect="1"/>
-          </p:cNvPicPr>
-          <p:nvPr/>
-        </p:nvPicPr>
-        <p:blipFill>
-          <a:blip r:embed="rId2"/>
-          <a:stretch>
-            <a:fillRect/>
-          </a:stretch>
-        </p:blipFill>
-        <p:spPr>
-          <a:xfrm>
-            <a:off x="777240" y="1737360"/>
-            <a:ext cx="4480560" cy="4354937"/>
-          </a:xfrm>
-          <a:prstGeom prst="rect">
-            <a:avLst/>
-          </a:prstGeom>
-        </p:spPr>
-      </p:pic>
+              <a:t>Goal: prove we can read the data and settle every open empirical question before any physics is written</a:t>
+            </a:r>
+          </a:p>
+        </p:txBody>
+      </p:sp>
+      <p:sp>
+        <p:nvSpPr>
+          <p:cNvPr id="6" name="TextBox 5"/>
+          <p:cNvSpPr txBox="1"/>
+          <p:nvPr/>
+        </p:nvSpPr>
+        <p:spPr>
+          <a:xfrm>
+            <a:off x="777240" y="1783080"/>
+            <a:ext cx="5760720" cy="365760"/>
+          </a:xfrm>
+          <a:prstGeom prst="rect">
+            <a:avLst/>
+          </a:prstGeom>
+          <a:noFill/>
+        </p:spPr>
+        <p:txBody>
+          <a:bodyPr wrap="square" lIns="0" rIns="0" tIns="0" bIns="0">
+            <a:spAutoFit/>
+          </a:bodyPr>
+          <a:lstStyle/>
+          <a:p>
+            <a:pPr algn="l">
+              <a:lnSpc>
+                <a:spcPct val="110000"/>
+              </a:lnSpc>
+              <a:spcAft>
+                <a:spcPts val="0"/>
+              </a:spcAft>
+            </a:pPr>
+            <a:r>
+              <a:rPr sz="2000" b="1" i="0">
+                <a:solidFill>
+                  <a:srgbClr val="065A82"/>
+                </a:solidFill>
+                <a:latin typeface="Calibri"/>
+              </a:rPr>
+              <a:t>FIVE QUESTIONS, FIVE NUMBERS</a:t>
+            </a:r>
+          </a:p>
+        </p:txBody>
+      </p:sp>
       <p:sp>
         <p:nvSpPr>
           <p:cNvPr id="7" name="TextBox 6"/>
@@ -8842,8 +10566,8 @@
         </p:nvSpPr>
         <p:spPr>
           <a:xfrm>
-            <a:off x="5577840" y="1783080"/>
-            <a:ext cx="5852160" cy="4389120"/>
+            <a:off x="777240" y="2194560"/>
+            <a:ext cx="5760720" cy="3566160"/>
           </a:xfrm>
           <a:prstGeom prst="rect">
             <a:avLst/>
@@ -8861,7 +10585,7 @@
                 <a:spcPct val="110000"/>
               </a:lnSpc>
               <a:spcAft>
-                <a:spcPts val="800"/>
+                <a:spcPts val="500"/>
               </a:spcAft>
             </a:pPr>
             <a:r>
@@ -8871,16 +10595,16 @@
                 </a:solidFill>
                 <a:latin typeface="Calibri"/>
               </a:rPr>
-              <a:t>•  518,400 cells → ocean 356,877 → halo 341,960 → offshore ≥ 100 km 273,431 → analysis 262,925 (73.7% of the ocean): one connected component.</a:t>
-            </a:r>
-          </a:p>
-          <a:p>
-            <a:pPr algn="l">
-              <a:lnSpc>
-                <a:spcPct val="110000"/>
-              </a:lnSpc>
-              <a:spcAft>
-                <a:spcPts val="800"/>
+              <a:t>•  Land is NaN, not 0: equal to hFacC / hFacW / hFacS cell for cell, 0 mismatches in 518,400.</a:t>
+            </a:r>
+          </a:p>
+          <a:p>
+            <a:pPr algn="l">
+              <a:lnSpc>
+                <a:spcPct val="110000"/>
+              </a:lnSpc>
+              <a:spcAft>
+                <a:spcPts val="500"/>
               </a:spcAft>
             </a:pPr>
             <a:r>
@@ -8890,16 +10614,16 @@
                 </a:solidFill>
                 <a:latin typeface="Calibri"/>
               </a:rPr>
-              <a:t>•  Gulf of California is its own ocean component (9,891 cells), max coast distance 73.9 km — 0 cells survive the cut.</a:t>
-            </a:r>
-          </a:p>
-          <a:p>
-            <a:pPr algn="l">
-              <a:lnSpc>
-                <a:spcPct val="110000"/>
-              </a:lnSpc>
-              <a:spcAft>
-                <a:spcPts val="800"/>
+              <a:t>•  W(k_l=0) = dEta/dt, not ~0: corr 0.9936, slope 1.037 against the centred Eta rate.</a:t>
+            </a:r>
+          </a:p>
+          <a:p>
+            <a:pPr algn="l">
+              <a:lnSpc>
+                <a:spcPct val="110000"/>
+              </a:lnSpc>
+              <a:spcAft>
+                <a:spcPts val="500"/>
               </a:spcAft>
             </a:pPr>
             <a:r>
@@ -8909,16 +10633,16 @@
                 </a:solidFill>
                 <a:latin typeface="Calibri"/>
               </a:rPr>
-              <a:t>•  The tile-edge rim is finite, not NaN: ~1e6x on the low edges, ~0.5x on the high. edge_cells = 7 covers it (minimum 2).</a:t>
-            </a:r>
-          </a:p>
-          <a:p>
-            <a:pPr algn="l">
-              <a:lnSpc>
-                <a:spcPct val="110000"/>
-              </a:lnSpc>
-              <a:spcAft>
-                <a:spcPts val="800"/>
+              <a:t>•  Spacing 1.71 × 1.85 km at 37N (planning said 1.8-2.3); face 10 is rotated 90°.</a:t>
+            </a:r>
+          </a:p>
+          <a:p>
+            <a:pPr algn="l">
+              <a:lnSpc>
+                <a:spcPct val="110000"/>
+              </a:lnSpc>
+              <a:spcAft>
+                <a:spcPts val="500"/>
               </a:spcAft>
             </a:pPr>
             <a:r>
@@ -8928,21 +10652,86 @@
                 </a:solidFill>
                 <a:latin typeface="Calibri"/>
               </a:rPr>
-              <a:t>•  17 tests. ocean_mask == isfinite(Theta) cell for cell at both hours; both halo_mask defects guarded.</a:t>
-            </a:r>
-          </a:p>
-        </p:txBody>
-      </p:sp>
-      <p:sp>
-        <p:nvSpPr>
-          <p:cNvPr id="8" name="TextBox 7"/>
+              <a:t>•  Rotation terms identically zero (SN = −1, CS = 0); metric term 0.1% median.</a:t>
+            </a:r>
+          </a:p>
+          <a:p>
+            <a:pPr algn="l">
+              <a:lnSpc>
+                <a:spcPct val="110000"/>
+              </a:lnSpc>
+              <a:spcAft>
+                <a:spcPts val="500"/>
+              </a:spcAft>
+            </a:pPr>
+            <a:r>
+              <a:rPr sz="2000" b="0" i="0">
+                <a:solidFill>
+                  <a:srgbClr val="1B2A33"/>
+                </a:solidFill>
+                <a:latin typeface="Calibri"/>
+              </a:rPr>
+              <a:t>•  Advection OS7MP (tempAdvScheme = 7), diffKhT = 0, linear free surface.</a:t>
+            </a:r>
+          </a:p>
+        </p:txBody>
+      </p:sp>
+      <p:sp>
+        <p:nvSpPr>
+          <p:cNvPr id="8" name="Rounded Rectangle 7"/>
+          <p:cNvSpPr/>
+          <p:nvPr/>
+        </p:nvSpPr>
+        <p:spPr>
+          <a:xfrm>
+            <a:off x="6812280" y="1737360"/>
+            <a:ext cx="4617720" cy="2606040"/>
+          </a:xfrm>
+          <a:prstGeom prst="roundRect">
+            <a:avLst>
+              <a:gd name="adj" fmla="val 7000"/>
+            </a:avLst>
+          </a:prstGeom>
+          <a:solidFill>
+            <a:srgbClr val="E7EFF3"/>
+          </a:solidFill>
+          <a:ln>
+            <a:noFill/>
+          </a:ln>
+          <a:effectLst/>
+        </p:spPr>
+        <p:style>
+          <a:lnRef idx="1">
+            <a:schemeClr val="accent1"/>
+          </a:lnRef>
+          <a:fillRef idx="3">
+            <a:schemeClr val="accent1"/>
+          </a:fillRef>
+          <a:effectRef idx="2">
+            <a:schemeClr val="accent1"/>
+          </a:effectRef>
+          <a:fontRef idx="minor">
+            <a:schemeClr val="lt1"/>
+          </a:fontRef>
+        </p:style>
+        <p:txBody>
+          <a:bodyPr rtlCol="0" anchor="ctr"/>
+          <a:lstStyle/>
+          <a:p>
+            <a:pPr algn="ctr"/>
+          </a:p>
+        </p:txBody>
+      </p:sp>
+      <p:sp>
+        <p:nvSpPr>
+          <p:cNvPr id="9" name="TextBox 8"/>
           <p:cNvSpPr txBox="1"/>
           <p:nvPr/>
         </p:nvSpPr>
         <p:spPr>
           <a:xfrm>
-            <a:off x="777240" y="6263640"/>
-            <a:ext cx="10607040" cy="365760"/>
+            <a:off x="7040880" y="1874519"/>
+            <a:ext cx="4206240" cy="365760"/>
           </a:xfrm>
           <a:prstGeom prst="rect">
             <a:avLst/>
@@ -8964,13 +10753,287 @@
               </a:spcAft>
             </a:pPr>
             <a:r>
+              <a:rPr sz="2000" b="1" i="0">
+                <a:solidFill>
+                  <a:srgbClr val="065A82"/>
+                </a:solidFill>
+                <a:latin typeface="Calibri"/>
+              </a:rPr>
+              <a:t>DELIVERED</a:t>
+            </a:r>
+          </a:p>
+        </p:txBody>
+      </p:sp>
+      <p:sp>
+        <p:nvSpPr>
+          <p:cNvPr id="10" name="TextBox 9"/>
+          <p:cNvSpPr txBox="1"/>
+          <p:nvPr/>
+        </p:nvSpPr>
+        <p:spPr>
+          <a:xfrm>
+            <a:off x="7040880" y="2286000"/>
+            <a:ext cx="4206240" cy="2011680"/>
+          </a:xfrm>
+          <a:prstGeom prst="rect">
+            <a:avLst/>
+          </a:prstGeom>
+          <a:noFill/>
+        </p:spPr>
+        <p:txBody>
+          <a:bodyPr wrap="square" lIns="0" rIns="0" tIns="0" bIns="0">
+            <a:spAutoFit/>
+          </a:bodyPr>
+          <a:lstStyle/>
+          <a:p>
+            <a:pPr algn="l">
+              <a:lnSpc>
+                <a:spcPct val="100000"/>
+              </a:lnSpc>
+              <a:spcAft>
+                <a:spcPts val="400"/>
+              </a:spcAft>
+            </a:pPr>
+            <a:r>
+              <a:rPr sz="2000" b="1" i="0">
+                <a:solidFill>
+                  <a:srgbClr val="1B2A33"/>
+                </a:solidFill>
+                <a:latin typeface="Courier New"/>
+              </a:rPr>
+              <a:t>tile330_grid.zarr</a:t>
+            </a:r>
+            <a:r>
               <a:rPr sz="2000" b="0" i="0">
                 <a:solidFill>
-                  <a:srgbClr val="62737F"/>
-                </a:solidFill>
-                <a:latin typeface="Courier New"/>
-              </a:rPr>
-              <a:t>figs/V6_land_halo_tile330.png, panel (a)</a:t>
+                  <a:srgbClr val="1B2A33"/>
+                </a:solidFill>
+                <a:latin typeface="Calibri"/>
+              </a:rPr>
+              <a:t> — 1.8 MB; hFacW/hFacS, drF/Z/Zl, orientation attrs.</a:t>
+            </a:r>
+          </a:p>
+          <a:p>
+            <a:pPr algn="l">
+              <a:lnSpc>
+                <a:spcPct val="100000"/>
+              </a:lnSpc>
+              <a:spcAft>
+                <a:spcPts val="400"/>
+              </a:spcAft>
+            </a:pPr>
+            <a:r>
+              <a:rPr sz="2000" b="0" i="0">
+                <a:solidFill>
+                  <a:srgbClr val="1B2A33"/>
+                </a:solidFill>
+                <a:latin typeface="Calibri"/>
+              </a:rPr>
+              <a:t>Two hours, 00:00 and 01:00, from both OSN stores: a 21 MB raw store.</a:t>
+            </a:r>
+          </a:p>
+          <a:p>
+            <a:pPr algn="l">
+              <a:lnSpc>
+                <a:spcPct val="100000"/>
+              </a:lnSpc>
+              <a:spcAft>
+                <a:spcPts val="0"/>
+              </a:spcAft>
+            </a:pPr>
+            <a:r>
+              <a:rPr sz="2000" b="0" i="0">
+                <a:solidFill>
+                  <a:srgbClr val="1B2A33"/>
+                </a:solidFill>
+                <a:latin typeface="Calibri"/>
+              </a:rPr>
+              <a:t>QA plot: NaN rim 1 cell (G) / 2 (Jacobian); no gradient ribbon.</a:t>
+            </a:r>
+          </a:p>
+        </p:txBody>
+      </p:sp>
+      <p:sp>
+        <p:nvSpPr>
+          <p:cNvPr id="11" name="Rounded Rectangle 10"/>
+          <p:cNvSpPr/>
+          <p:nvPr/>
+        </p:nvSpPr>
+        <p:spPr>
+          <a:xfrm>
+            <a:off x="6812280" y="4480560"/>
+            <a:ext cx="4617720" cy="1280160"/>
+          </a:xfrm>
+          <a:prstGeom prst="roundRect">
+            <a:avLst>
+              <a:gd name="adj" fmla="val 7000"/>
+            </a:avLst>
+          </a:prstGeom>
+          <a:solidFill>
+            <a:srgbClr val="FAEFE4"/>
+          </a:solidFill>
+          <a:ln>
+            <a:noFill/>
+          </a:ln>
+          <a:effectLst/>
+        </p:spPr>
+        <p:style>
+          <a:lnRef idx="1">
+            <a:schemeClr val="accent1"/>
+          </a:lnRef>
+          <a:fillRef idx="3">
+            <a:schemeClr val="accent1"/>
+          </a:fillRef>
+          <a:effectRef idx="2">
+            <a:schemeClr val="accent1"/>
+          </a:effectRef>
+          <a:fontRef idx="minor">
+            <a:schemeClr val="lt1"/>
+          </a:fontRef>
+        </p:style>
+        <p:txBody>
+          <a:bodyPr rtlCol="0" anchor="ctr"/>
+          <a:lstStyle/>
+          <a:p>
+            <a:pPr algn="ctr"/>
+          </a:p>
+        </p:txBody>
+      </p:sp>
+      <p:sp>
+        <p:nvSpPr>
+          <p:cNvPr id="12" name="TextBox 11"/>
+          <p:cNvSpPr txBox="1"/>
+          <p:nvPr/>
+        </p:nvSpPr>
+        <p:spPr>
+          <a:xfrm>
+            <a:off x="7040880" y="4572000"/>
+            <a:ext cx="4206240" cy="1143000"/>
+          </a:xfrm>
+          <a:prstGeom prst="rect">
+            <a:avLst/>
+          </a:prstGeom>
+          <a:noFill/>
+        </p:spPr>
+        <p:txBody>
+          <a:bodyPr wrap="square" lIns="0" rIns="0" tIns="0" bIns="0">
+            <a:spAutoFit/>
+          </a:bodyPr>
+          <a:lstStyle/>
+          <a:p>
+            <a:pPr algn="l">
+              <a:lnSpc>
+                <a:spcPct val="100000"/>
+              </a:lnSpc>
+              <a:spcAft>
+                <a:spcPts val="0"/>
+              </a:spcAft>
+            </a:pPr>
+            <a:r>
+              <a:rPr sz="2000" b="1" i="0">
+                <a:solidFill>
+                  <a:srgbClr val="A8501B"/>
+                </a:solidFill>
+                <a:latin typeface="Calibri"/>
+              </a:rPr>
+              <a:t>OVERTURNED  </a:t>
+            </a:r>
+            <a:r>
+              <a:rPr sz="2000" b="0" i="0">
+                <a:solidFill>
+                  <a:srgbClr val="1B2A33"/>
+                </a:solidFill>
+                <a:latin typeface="Calibri"/>
+              </a:rPr>
+              <a:t>planning §5.5 "land stored as 0" and §2.2 "w vanishes at z = 0". Neither breaks the study.</a:t>
+            </a:r>
+          </a:p>
+        </p:txBody>
+      </p:sp>
+      <p:sp>
+        <p:nvSpPr>
+          <p:cNvPr id="13" name="Rounded Rectangle 12"/>
+          <p:cNvSpPr/>
+          <p:nvPr/>
+        </p:nvSpPr>
+        <p:spPr>
+          <a:xfrm>
+            <a:off x="777240" y="5897880"/>
+            <a:ext cx="10652760" cy="640080"/>
+          </a:xfrm>
+          <a:prstGeom prst="roundRect">
+            <a:avLst>
+              <a:gd name="adj" fmla="val 7000"/>
+            </a:avLst>
+          </a:prstGeom>
+          <a:solidFill>
+            <a:srgbClr val="21295C"/>
+          </a:solidFill>
+          <a:ln>
+            <a:noFill/>
+          </a:ln>
+          <a:effectLst/>
+        </p:spPr>
+        <p:style>
+          <a:lnRef idx="1">
+            <a:schemeClr val="accent1"/>
+          </a:lnRef>
+          <a:fillRef idx="3">
+            <a:schemeClr val="accent1"/>
+          </a:fillRef>
+          <a:effectRef idx="2">
+            <a:schemeClr val="accent1"/>
+          </a:effectRef>
+          <a:fontRef idx="minor">
+            <a:schemeClr val="lt1"/>
+          </a:fontRef>
+        </p:style>
+        <p:txBody>
+          <a:bodyPr rtlCol="0" anchor="ctr"/>
+          <a:lstStyle/>
+          <a:p>
+            <a:pPr algn="ctr"/>
+          </a:p>
+        </p:txBody>
+      </p:sp>
+      <p:sp>
+        <p:nvSpPr>
+          <p:cNvPr id="14" name="TextBox 13"/>
+          <p:cNvSpPr txBox="1"/>
+          <p:nvPr/>
+        </p:nvSpPr>
+        <p:spPr>
+          <a:xfrm>
+            <a:off x="1097280" y="6053328"/>
+            <a:ext cx="10058400" cy="411480"/>
+          </a:xfrm>
+          <a:prstGeom prst="rect">
+            <a:avLst/>
+          </a:prstGeom>
+          <a:noFill/>
+        </p:spPr>
+        <p:txBody>
+          <a:bodyPr wrap="square" lIns="0" rIns="0" tIns="0" bIns="0">
+            <a:spAutoFit/>
+          </a:bodyPr>
+          <a:lstStyle/>
+          <a:p>
+            <a:pPr algn="l">
+              <a:lnSpc>
+                <a:spcPct val="110000"/>
+              </a:lnSpc>
+              <a:spcAft>
+                <a:spcPts val="0"/>
+              </a:spcAft>
+            </a:pPr>
+            <a:r>
+              <a:rPr sz="2000" b="1" i="0">
+                <a:solidFill>
+                  <a:srgbClr val="FFFFFF"/>
+                </a:solidFill>
+                <a:latin typeface="Calibri"/>
+              </a:rPr>
+              <a:t>Five criteria PASS; four §2 traps confirmed. Flag for M1: the Jacobian is 0.80x the flux form.</a:t>
             </a:r>
           </a:p>
         </p:txBody>
@@ -9074,7 +11137,7 @@
                 </a:solidFill>
                 <a:latin typeface="Calibri"/>
               </a:rPr>
-              <a:t>TASK 2  ·  CRITERION 7</a:t>
+              <a:t>MILESTONE M1  ·  OPERATORS AND VALIDATION  ·  CLOSED 2026-09-30</a:t>
             </a:r>
           </a:p>
         </p:txBody>
@@ -9116,7 +11179,7 @@
                 </a:solidFill>
                 <a:latin typeface="Cambria"/>
               </a:rPr>
-              <a:t>operators.py and the regression oracle</a:t>
+              <a:t>The answer: M1 in one slide</a:t>
             </a:r>
           </a:p>
         </p:txBody>
@@ -9158,35 +11221,57 @@
                 </a:solidFill>
                 <a:latin typeface="Calibri"/>
               </a:rPr>
-              <a:t>One shared operator for both sides; the oracle checks the wiring bit for bit</a:t>
-            </a:r>
-          </a:p>
-        </p:txBody>
-      </p:sp>
-      <p:pic>
-        <p:nvPicPr>
-          <p:cNvPr id="6" name="Picture 5" descr="m1_fig_operators.png"/>
-          <p:cNvPicPr>
-            <a:picLocks noChangeAspect="1"/>
-          </p:cNvPicPr>
-          <p:nvPr/>
-        </p:nvPicPr>
-        <p:blipFill>
-          <a:blip r:embed="rId2"/>
-          <a:stretch>
-            <a:fillRect/>
-          </a:stretch>
-        </p:blipFill>
-        <p:spPr>
-          <a:xfrm>
-            <a:off x="777240" y="1783080"/>
-            <a:ext cx="5120640" cy="2950877"/>
-          </a:xfrm>
-          <a:prstGeom prst="rect">
-            <a:avLst/>
-          </a:prstGeom>
-        </p:spPr>
-      </p:pic>
+              <a:t>Goal: operators that are known correct before any science — a hard gate, not a checklist</a:t>
+            </a:r>
+          </a:p>
+        </p:txBody>
+      </p:sp>
+      <p:sp>
+        <p:nvSpPr>
+          <p:cNvPr id="6" name="Rounded Rectangle 5"/>
+          <p:cNvSpPr/>
+          <p:nvPr/>
+        </p:nvSpPr>
+        <p:spPr>
+          <a:xfrm>
+            <a:off x="777240" y="1737360"/>
+            <a:ext cx="3429000" cy="1828800"/>
+          </a:xfrm>
+          <a:prstGeom prst="roundRect">
+            <a:avLst>
+              <a:gd name="adj" fmla="val 7000"/>
+            </a:avLst>
+          </a:prstGeom>
+          <a:solidFill>
+            <a:srgbClr val="E7EFF3"/>
+          </a:solidFill>
+          <a:ln>
+            <a:noFill/>
+          </a:ln>
+          <a:effectLst/>
+        </p:spPr>
+        <p:style>
+          <a:lnRef idx="1">
+            <a:schemeClr val="accent1"/>
+          </a:lnRef>
+          <a:fillRef idx="3">
+            <a:schemeClr val="accent1"/>
+          </a:fillRef>
+          <a:effectRef idx="2">
+            <a:schemeClr val="accent1"/>
+          </a:effectRef>
+          <a:fontRef idx="minor">
+            <a:schemeClr val="lt1"/>
+          </a:fontRef>
+        </p:style>
+        <p:txBody>
+          <a:bodyPr rtlCol="0" anchor="ctr"/>
+          <a:lstStyle/>
+          <a:p>
+            <a:pPr algn="ctr"/>
+          </a:p>
+        </p:txBody>
+      </p:sp>
       <p:sp>
         <p:nvSpPr>
           <p:cNvPr id="7" name="TextBox 6"/>
@@ -9195,8 +11280,8 @@
         </p:nvSpPr>
         <p:spPr>
           <a:xfrm>
-            <a:off x="777240" y="4846320"/>
-            <a:ext cx="5120640" cy="1280160"/>
+            <a:off x="960120" y="1828800"/>
+            <a:ext cx="3063240" cy="457200"/>
           </a:xfrm>
           <a:prstGeom prst="rect">
             <a:avLst/>
@@ -9211,20 +11296,20 @@
           <a:p>
             <a:pPr algn="l">
               <a:lnSpc>
-                <a:spcPct val="115000"/>
-              </a:lnSpc>
-              <a:spcAft>
-                <a:spcPts val="400"/>
-              </a:spcAft>
-            </a:pPr>
-            <a:r>
-              <a:rPr sz="2000" b="0" i="0">
-                <a:solidFill>
-                  <a:srgbClr val="62737F"/>
-                </a:solidFill>
-                <a:latin typeface="Calibri"/>
-              </a:rPr>
-              <a:t>The interpolated Jacobian is 0.85x the flux-form strain on the analysis mask (M0's 0.80 included the coast). The 0.911x gradb2 ratio is confirmed.</a:t>
+                <a:spcPct val="110000"/>
+              </a:lnSpc>
+              <a:spcAft>
+                <a:spcPts val="0"/>
+              </a:spcAft>
+            </a:pPr>
+            <a:r>
+              <a:rPr sz="2400" b="1" i="0">
+                <a:solidFill>
+                  <a:srgbClr val="065A82"/>
+                </a:solidFill>
+                <a:latin typeface="Cambria"/>
+              </a:rPr>
+              <a:t>1.004  /  0.981</a:t>
             </a:r>
           </a:p>
         </p:txBody>
@@ -9237,8 +11322,8 @@
         </p:nvSpPr>
         <p:spPr>
           <a:xfrm>
-            <a:off x="6217920" y="1783080"/>
-            <a:ext cx="5212080" cy="4480560"/>
+            <a:off x="960120" y="2331720"/>
+            <a:ext cx="3063240" cy="1188720"/>
           </a:xfrm>
           <a:prstGeom prst="rect">
             <a:avLst/>
@@ -9253,10 +11338,10 @@
           <a:p>
             <a:pPr algn="l">
               <a:lnSpc>
-                <a:spcPct val="110000"/>
-              </a:lnSpc>
-              <a:spcAft>
-                <a:spcPts val="800"/>
+                <a:spcPct val="100000"/>
+              </a:lnSpc>
+              <a:spcAft>
+                <a:spcPts val="0"/>
               </a:spcAft>
             </a:pPr>
             <a:r>
@@ -9266,16 +11351,127 @@
                 </a:solidFill>
                 <a:latin typeface="Calibri"/>
               </a:rPr>
-              <a:t>•  Criterion 7: unfiltered F vs frontogenesis_tendency — max |dF| = 0.0 on all 352,673 finite cells, both hours.</a:t>
-            </a:r>
-          </a:p>
-          <a:p>
-            <a:pPr algn="l">
-              <a:lnSpc>
-                <a:spcPct val="110000"/>
-              </a:lnSpc>
-              <a:spcAft>
-                <a:spcPts val="800"/>
+              <a:t>V3 gate: slope of DG/Dt on 2F, strain / real LLC velocity (needed 1 ± 0.05)</a:t>
+            </a:r>
+          </a:p>
+        </p:txBody>
+      </p:sp>
+      <p:sp>
+        <p:nvSpPr>
+          <p:cNvPr id="9" name="Rounded Rectangle 8"/>
+          <p:cNvSpPr/>
+          <p:nvPr/>
+        </p:nvSpPr>
+        <p:spPr>
+          <a:xfrm>
+            <a:off x="4389120" y="1737360"/>
+            <a:ext cx="3429000" cy="1828800"/>
+          </a:xfrm>
+          <a:prstGeom prst="roundRect">
+            <a:avLst>
+              <a:gd name="adj" fmla="val 7000"/>
+            </a:avLst>
+          </a:prstGeom>
+          <a:solidFill>
+            <a:srgbClr val="E7EFF3"/>
+          </a:solidFill>
+          <a:ln>
+            <a:noFill/>
+          </a:ln>
+          <a:effectLst/>
+        </p:spPr>
+        <p:style>
+          <a:lnRef idx="1">
+            <a:schemeClr val="accent1"/>
+          </a:lnRef>
+          <a:fillRef idx="3">
+            <a:schemeClr val="accent1"/>
+          </a:fillRef>
+          <a:effectRef idx="2">
+            <a:schemeClr val="accent1"/>
+          </a:effectRef>
+          <a:fontRef idx="minor">
+            <a:schemeClr val="lt1"/>
+          </a:fontRef>
+        </p:style>
+        <p:txBody>
+          <a:bodyPr rtlCol="0" anchor="ctr"/>
+          <a:lstStyle/>
+          <a:p>
+            <a:pPr algn="ctr"/>
+          </a:p>
+        </p:txBody>
+      </p:sp>
+      <p:sp>
+        <p:nvSpPr>
+          <p:cNvPr id="10" name="TextBox 9"/>
+          <p:cNvSpPr txBox="1"/>
+          <p:nvPr/>
+        </p:nvSpPr>
+        <p:spPr>
+          <a:xfrm>
+            <a:off x="4572000" y="1828800"/>
+            <a:ext cx="3063240" cy="457200"/>
+          </a:xfrm>
+          <a:prstGeom prst="rect">
+            <a:avLst/>
+          </a:prstGeom>
+          <a:noFill/>
+        </p:spPr>
+        <p:txBody>
+          <a:bodyPr wrap="square" lIns="0" rIns="0" tIns="0" bIns="0">
+            <a:spAutoFit/>
+          </a:bodyPr>
+          <a:lstStyle/>
+          <a:p>
+            <a:pPr algn="l">
+              <a:lnSpc>
+                <a:spcPct val="110000"/>
+              </a:lnSpc>
+              <a:spcAft>
+                <a:spcPts val="0"/>
+              </a:spcAft>
+            </a:pPr>
+            <a:r>
+              <a:rPr sz="2400" b="1" i="0">
+                <a:solidFill>
+                  <a:srgbClr val="065A82"/>
+                </a:solidFill>
+                <a:latin typeface="Cambria"/>
+              </a:rPr>
+              <a:t>~0.79x</a:t>
+            </a:r>
+          </a:p>
+        </p:txBody>
+      </p:sp>
+      <p:sp>
+        <p:nvSpPr>
+          <p:cNvPr id="11" name="TextBox 10"/>
+          <p:cNvSpPr txBox="1"/>
+          <p:nvPr/>
+        </p:nvSpPr>
+        <p:spPr>
+          <a:xfrm>
+            <a:off x="4572000" y="2331720"/>
+            <a:ext cx="3063240" cy="1188720"/>
+          </a:xfrm>
+          <a:prstGeom prst="rect">
+            <a:avLst/>
+          </a:prstGeom>
+          <a:noFill/>
+        </p:spPr>
+        <p:txBody>
+          <a:bodyPr wrap="square" lIns="0" rIns="0" tIns="0" bIns="0">
+            <a:spAutoFit/>
+          </a:bodyPr>
+          <a:lstStyle/>
+          <a:p>
+            <a:pPr algn="l">
+              <a:lnSpc>
+                <a:spcPct val="100000"/>
+              </a:lnSpc>
+              <a:spcAft>
+                <a:spcPts val="0"/>
               </a:spcAft>
             </a:pPr>
             <a:r>
@@ -9285,16 +11481,127 @@
                 </a:solidFill>
                 <a:latin typeface="Calibri"/>
               </a:rPr>
-              <a:t>•  lowpass: a top-hat of half-width L/2; NaN propagates, never renormalised. F is finite on all 262,925 analysis cells at every L.</a:t>
-            </a:r>
-          </a:p>
-          <a:p>
-            <a:pPr algn="l">
-              <a:lnSpc>
-                <a:spcPct val="110000"/>
-              </a:lnSpc>
-              <a:spcAft>
-                <a:spcPts val="800"/>
+              <a:t>discrete F vs chain-rule F on real front pixels — the change that passed the gate</a:t>
+            </a:r>
+          </a:p>
+        </p:txBody>
+      </p:sp>
+      <p:sp>
+        <p:nvSpPr>
+          <p:cNvPr id="12" name="Rounded Rectangle 11"/>
+          <p:cNvSpPr/>
+          <p:nvPr/>
+        </p:nvSpPr>
+        <p:spPr>
+          <a:xfrm>
+            <a:off x="8001000" y="1737360"/>
+            <a:ext cx="3429000" cy="1828800"/>
+          </a:xfrm>
+          <a:prstGeom prst="roundRect">
+            <a:avLst>
+              <a:gd name="adj" fmla="val 7000"/>
+            </a:avLst>
+          </a:prstGeom>
+          <a:solidFill>
+            <a:srgbClr val="E7EFF3"/>
+          </a:solidFill>
+          <a:ln>
+            <a:noFill/>
+          </a:ln>
+          <a:effectLst/>
+        </p:spPr>
+        <p:style>
+          <a:lnRef idx="1">
+            <a:schemeClr val="accent1"/>
+          </a:lnRef>
+          <a:fillRef idx="3">
+            <a:schemeClr val="accent1"/>
+          </a:fillRef>
+          <a:effectRef idx="2">
+            <a:schemeClr val="accent1"/>
+          </a:effectRef>
+          <a:fontRef idx="minor">
+            <a:schemeClr val="lt1"/>
+          </a:fontRef>
+        </p:style>
+        <p:txBody>
+          <a:bodyPr rtlCol="0" anchor="ctr"/>
+          <a:lstStyle/>
+          <a:p>
+            <a:pPr algn="ctr"/>
+          </a:p>
+        </p:txBody>
+      </p:sp>
+      <p:sp>
+        <p:nvSpPr>
+          <p:cNvPr id="13" name="TextBox 12"/>
+          <p:cNvSpPr txBox="1"/>
+          <p:nvPr/>
+        </p:nvSpPr>
+        <p:spPr>
+          <a:xfrm>
+            <a:off x="8183879" y="1828800"/>
+            <a:ext cx="3063240" cy="457200"/>
+          </a:xfrm>
+          <a:prstGeom prst="rect">
+            <a:avLst/>
+          </a:prstGeom>
+          <a:noFill/>
+        </p:spPr>
+        <p:txBody>
+          <a:bodyPr wrap="square" lIns="0" rIns="0" tIns="0" bIns="0">
+            <a:spAutoFit/>
+          </a:bodyPr>
+          <a:lstStyle/>
+          <a:p>
+            <a:pPr algn="l">
+              <a:lnSpc>
+                <a:spcPct val="110000"/>
+              </a:lnSpc>
+              <a:spcAft>
+                <a:spcPts val="0"/>
+              </a:spcAft>
+            </a:pPr>
+            <a:r>
+              <a:rPr sz="2400" b="1" i="0">
+                <a:solidFill>
+                  <a:srgbClr val="065A82"/>
+                </a:solidFill>
+                <a:latin typeface="Cambria"/>
+              </a:rPr>
+              <a:t>0.975 [0.954, 1.003]</a:t>
+            </a:r>
+          </a:p>
+        </p:txBody>
+      </p:sp>
+      <p:sp>
+        <p:nvSpPr>
+          <p:cNvPr id="14" name="TextBox 13"/>
+          <p:cNvSpPr txBox="1"/>
+          <p:nvPr/>
+        </p:nvSpPr>
+        <p:spPr>
+          <a:xfrm>
+            <a:off x="8183879" y="2331720"/>
+            <a:ext cx="3063240" cy="1188720"/>
+          </a:xfrm>
+          <a:prstGeom prst="rect">
+            <a:avLst/>
+          </a:prstGeom>
+          <a:noFill/>
+        </p:spPr>
+        <p:txBody>
+          <a:bodyPr wrap="square" lIns="0" rIns="0" tIns="0" bIns="0">
+            <a:spAutoFit/>
+          </a:bodyPr>
+          <a:lstStyle/>
+          <a:p>
+            <a:pPr algn="l">
+              <a:lnSpc>
+                <a:spcPct val="100000"/>
+              </a:lnSpc>
+              <a:spcAft>
+                <a:spcPts val="0"/>
               </a:spcAft>
             </a:pPr>
             <a:r>
@@ -9304,16 +11611,81 @@
                 </a:solidFill>
                 <a:latin typeface="Calibri"/>
               </a:rPr>
-              <a:t>•  Planning §2.4 had the strain-term sign wrong: F = −½δG + ½|σ|G cos 2θ, θ from the compressional axis.</a:t>
-            </a:r>
-          </a:p>
-          <a:p>
-            <a:pPr algn="l">
-              <a:lnSpc>
-                <a:spcPct val="110000"/>
-              </a:lnSpc>
-              <a:spcAft>
-                <a:spcPts val="800"/>
+              <a:t>V3b, a flux-form OS7MP-like truth: −0.006 ± 0.025 from V3; attenuation closed</a:t>
+            </a:r>
+          </a:p>
+        </p:txBody>
+      </p:sp>
+      <p:sp>
+        <p:nvSpPr>
+          <p:cNvPr id="15" name="TextBox 14"/>
+          <p:cNvSpPr txBox="1"/>
+          <p:nvPr/>
+        </p:nvSpPr>
+        <p:spPr>
+          <a:xfrm>
+            <a:off x="777240" y="3767328"/>
+            <a:ext cx="5120640" cy="365760"/>
+          </a:xfrm>
+          <a:prstGeom prst="rect">
+            <a:avLst/>
+          </a:prstGeom>
+          <a:noFill/>
+        </p:spPr>
+        <p:txBody>
+          <a:bodyPr wrap="square" lIns="0" rIns="0" tIns="0" bIns="0">
+            <a:spAutoFit/>
+          </a:bodyPr>
+          <a:lstStyle/>
+          <a:p>
+            <a:pPr algn="l">
+              <a:lnSpc>
+                <a:spcPct val="110000"/>
+              </a:lnSpc>
+              <a:spcAft>
+                <a:spcPts val="0"/>
+              </a:spcAft>
+            </a:pPr>
+            <a:r>
+              <a:rPr sz="2000" b="1" i="0">
+                <a:solidFill>
+                  <a:srgbClr val="065A82"/>
+                </a:solidFill>
+                <a:latin typeface="Calibri"/>
+              </a:rPr>
+              <a:t>WHAT CHANGED</a:t>
+            </a:r>
+          </a:p>
+        </p:txBody>
+      </p:sp>
+      <p:sp>
+        <p:nvSpPr>
+          <p:cNvPr id="16" name="TextBox 15"/>
+          <p:cNvSpPr txBox="1"/>
+          <p:nvPr/>
+        </p:nvSpPr>
+        <p:spPr>
+          <a:xfrm>
+            <a:off x="777240" y="4160520"/>
+            <a:ext cx="5120640" cy="1691640"/>
+          </a:xfrm>
+          <a:prstGeom prst="rect">
+            <a:avLst/>
+          </a:prstGeom>
+          <a:noFill/>
+        </p:spPr>
+        <p:txBody>
+          <a:bodyPr wrap="square" lIns="0" rIns="0" tIns="0" bIns="0">
+            <a:spAutoFit/>
+          </a:bodyPr>
+          <a:lstStyle/>
+          <a:p>
+            <a:pPr algn="l">
+              <a:lnSpc>
+                <a:spcPct val="110000"/>
+              </a:lnSpc>
+              <a:spcAft>
+                <a:spcPts val="400"/>
               </a:spcAft>
             </a:pPr>
             <a:r>
@@ -9323,7 +11695,217 @@
                 </a:solidFill>
                 <a:latin typeface="Calibri"/>
               </a:rPr>
-              <a:t>•  21 tests; the dims guard turns the 4-D broadcast into a ValueError before dbof.</a:t>
+              <a:t>•  First attempt FAIL 0.950 / 0.758 with the chain-rule F; discrete F + a cubic departure velocity → PASS.</a:t>
+            </a:r>
+          </a:p>
+          <a:p>
+            <a:pPr algn="l">
+              <a:lnSpc>
+                <a:spcPct val="110000"/>
+              </a:lnSpc>
+              <a:spcAft>
+                <a:spcPts val="400"/>
+              </a:spcAft>
+            </a:pPr>
+            <a:r>
+              <a:rPr sz="2000" b="0" i="0">
+                <a:solidFill>
+                  <a:srgbClr val="1B2A33"/>
+                </a:solidFill>
+                <a:latin typeface="Calibri"/>
+              </a:rPr>
+              <a:t>•  b is interpolated onto the departure stencil (order 3), never G.</a:t>
+            </a:r>
+          </a:p>
+        </p:txBody>
+      </p:sp>
+      <p:sp>
+        <p:nvSpPr>
+          <p:cNvPr id="17" name="TextBox 16"/>
+          <p:cNvSpPr txBox="1"/>
+          <p:nvPr/>
+        </p:nvSpPr>
+        <p:spPr>
+          <a:xfrm>
+            <a:off x="6309360" y="3767328"/>
+            <a:ext cx="5120640" cy="365760"/>
+          </a:xfrm>
+          <a:prstGeom prst="rect">
+            <a:avLst/>
+          </a:prstGeom>
+          <a:noFill/>
+        </p:spPr>
+        <p:txBody>
+          <a:bodyPr wrap="square" lIns="0" rIns="0" tIns="0" bIns="0">
+            <a:spAutoFit/>
+          </a:bodyPr>
+          <a:lstStyle/>
+          <a:p>
+            <a:pPr algn="l">
+              <a:lnSpc>
+                <a:spcPct val="110000"/>
+              </a:lnSpc>
+              <a:spcAft>
+                <a:spcPts val="0"/>
+              </a:spcAft>
+            </a:pPr>
+            <a:r>
+              <a:rPr sz="2000" b="1" i="0">
+                <a:solidFill>
+                  <a:srgbClr val="065A82"/>
+                </a:solidFill>
+                <a:latin typeface="Calibri"/>
+              </a:rPr>
+              <a:t>HANDED TO M3</a:t>
+            </a:r>
+          </a:p>
+        </p:txBody>
+      </p:sp>
+      <p:sp>
+        <p:nvSpPr>
+          <p:cNvPr id="18" name="TextBox 17"/>
+          <p:cNvSpPr txBox="1"/>
+          <p:nvPr/>
+        </p:nvSpPr>
+        <p:spPr>
+          <a:xfrm>
+            <a:off x="6309360" y="4160520"/>
+            <a:ext cx="5120640" cy="1691640"/>
+          </a:xfrm>
+          <a:prstGeom prst="rect">
+            <a:avLst/>
+          </a:prstGeom>
+          <a:noFill/>
+        </p:spPr>
+        <p:txBody>
+          <a:bodyPr wrap="square" lIns="0" rIns="0" tIns="0" bIns="0">
+            <a:spAutoFit/>
+          </a:bodyPr>
+          <a:lstStyle/>
+          <a:p>
+            <a:pPr algn="l">
+              <a:lnSpc>
+                <a:spcPct val="110000"/>
+              </a:lnSpc>
+              <a:spcAft>
+                <a:spcPts val="400"/>
+              </a:spcAft>
+            </a:pPr>
+            <a:r>
+              <a:rPr sz="2000" b="0" i="0">
+                <a:solidFill>
+                  <a:srgbClr val="1B2A33"/>
+                </a:solidFill>
+                <a:latin typeface="Calibri"/>
+              </a:rPr>
+              <a:t>•  Both forms of F, discrete primary; baseline 0.981 [0.970, 0.994], band 0.954-1.003, no upward correction.</a:t>
+            </a:r>
+          </a:p>
+          <a:p>
+            <a:pPr algn="l">
+              <a:lnSpc>
+                <a:spcPct val="110000"/>
+              </a:lnSpc>
+              <a:spcAft>
+                <a:spcPts val="400"/>
+              </a:spcAft>
+            </a:pPr>
+            <a:r>
+              <a:rPr sz="2000" b="0" i="0">
+                <a:solidFill>
+                  <a:srgbClr val="1B2A33"/>
+                </a:solidFill>
+                <a:latin typeface="Calibri"/>
+              </a:rPr>
+              <a:t>•  Order 3 (5 a sensitivity); V4 bar 0.28-1.0% of G/h; τ_δ to subfilter_term.</a:t>
+            </a:r>
+          </a:p>
+        </p:txBody>
+      </p:sp>
+      <p:sp>
+        <p:nvSpPr>
+          <p:cNvPr id="19" name="Rounded Rectangle 18"/>
+          <p:cNvSpPr/>
+          <p:nvPr/>
+        </p:nvSpPr>
+        <p:spPr>
+          <a:xfrm>
+            <a:off x="777240" y="5943600"/>
+            <a:ext cx="10652760" cy="594360"/>
+          </a:xfrm>
+          <a:prstGeom prst="roundRect">
+            <a:avLst>
+              <a:gd name="adj" fmla="val 7000"/>
+            </a:avLst>
+          </a:prstGeom>
+          <a:solidFill>
+            <a:srgbClr val="21295C"/>
+          </a:solidFill>
+          <a:ln>
+            <a:noFill/>
+          </a:ln>
+          <a:effectLst/>
+        </p:spPr>
+        <p:style>
+          <a:lnRef idx="1">
+            <a:schemeClr val="accent1"/>
+          </a:lnRef>
+          <a:fillRef idx="3">
+            <a:schemeClr val="accent1"/>
+          </a:fillRef>
+          <a:effectRef idx="2">
+            <a:schemeClr val="accent1"/>
+          </a:effectRef>
+          <a:fontRef idx="minor">
+            <a:schemeClr val="lt1"/>
+          </a:fontRef>
+        </p:style>
+        <p:txBody>
+          <a:bodyPr rtlCol="0" anchor="ctr"/>
+          <a:lstStyle/>
+          <a:p>
+            <a:pPr algn="ctr"/>
+          </a:p>
+        </p:txBody>
+      </p:sp>
+      <p:sp>
+        <p:nvSpPr>
+          <p:cNvPr id="20" name="TextBox 19"/>
+          <p:cNvSpPr txBox="1"/>
+          <p:nvPr/>
+        </p:nvSpPr>
+        <p:spPr>
+          <a:xfrm>
+            <a:off x="1097280" y="6080760"/>
+            <a:ext cx="10058400" cy="411480"/>
+          </a:xfrm>
+          <a:prstGeom prst="rect">
+            <a:avLst/>
+          </a:prstGeom>
+          <a:noFill/>
+        </p:spPr>
+        <p:txBody>
+          <a:bodyPr wrap="square" lIns="0" rIns="0" tIns="0" bIns="0">
+            <a:spAutoFit/>
+          </a:bodyPr>
+          <a:lstStyle/>
+          <a:p>
+            <a:pPr algn="l">
+              <a:lnSpc>
+                <a:spcPct val="110000"/>
+              </a:lnSpc>
+              <a:spcAft>
+                <a:spcPts val="0"/>
+              </a:spcAft>
+            </a:pPr>
+            <a:r>
+              <a:rPr sz="2000" b="1" i="0">
+                <a:solidFill>
+                  <a:srgbClr val="FFFFFF"/>
+                </a:solidFill>
+                <a:latin typeface="Calibri"/>
+              </a:rPr>
+              <a:t>All seven criteria PASS — 84 tests passed, 3 strict xfailed; seven PNGs. M1 closed 2026-09-30.</a:t>
             </a:r>
           </a:p>
         </p:txBody>
@@ -9427,7 +12009,7 @@
                 </a:solidFill>
                 <a:latin typeface="Calibri"/>
               </a:rPr>
-              <a:t>TASK 3  ·  V5, THE FIGURE LAUREN ASKED FOR</a:t>
+              <a:t>TASK 1  ·  V6</a:t>
             </a:r>
           </a:p>
         </p:txBody>
@@ -9469,7 +12051,7 @@
                 </a:solidFill>
                 <a:latin typeface="Cambria"/>
               </a:rPr>
-              <a:t>semilag.py and V5</a:t>
+              <a:t>Masking and tile330_masks.nc</a:t>
             </a:r>
           </a:p>
         </p:txBody>
@@ -9511,14 +12093,14 @@
                 </a:solidFill>
                 <a:latin typeface="Calibri"/>
               </a:rPr>
-              <a:t>Interpolate b (order ≥ 3) onto the departure stencil — never G</a:t>
+              <a:t>Halo = 7 × the measured dxC = 12.57 km; the 100 km cut removes the Gulf, no polygon</a:t>
             </a:r>
           </a:p>
         </p:txBody>
       </p:sp>
       <p:pic>
         <p:nvPicPr>
-          <p:cNvPr id="6" name="Picture 5" descr="m1_crop_V5a.png"/>
+          <p:cNvPr id="6" name="Picture 5" descr="m1_crop_V6a.png"/>
           <p:cNvPicPr>
             <a:picLocks noChangeAspect="1"/>
           </p:cNvPicPr>
@@ -9533,7 +12115,7 @@
         <p:spPr>
           <a:xfrm>
             <a:off x="777240" y="1737360"/>
-            <a:ext cx="5029200" cy="4053385"/>
+            <a:ext cx="4480560" cy="4354937"/>
           </a:xfrm>
           <a:prstGeom prst="rect">
             <a:avLst/>
@@ -9548,8 +12130,8 @@
         </p:nvSpPr>
         <p:spPr>
           <a:xfrm>
-            <a:off x="6126480" y="1783080"/>
-            <a:ext cx="5303520" cy="4480560"/>
+            <a:off x="5577840" y="1783080"/>
+            <a:ext cx="5852160" cy="4389120"/>
           </a:xfrm>
           <a:prstGeom prst="rect">
             <a:avLst/>
@@ -9577,7 +12159,7 @@
                 </a:solidFill>
                 <a:latin typeface="Calibri"/>
               </a:rPr>
-              <a:t>•  Half-cell shift, 1.5-cell front, bias at the maximum: bilinear G −4.94%, bilinear b −4.99%, cubic b −0.54%, quintic b −0.10% (prediction −5.56%).</a:t>
+              <a:t>•  518,400 cells → ocean 356,877 → halo 341,960 → offshore ≥ 100 km 273,431 → analysis 262,925 (73.7% of the ocean): one connected component.</a:t>
             </a:r>
           </a:p>
           <a:p>
@@ -9596,7 +12178,7 @@
                 </a:solidFill>
                 <a:latin typeface="Calibri"/>
               </a:rPr>
-              <a:t>•  The trap: shifting b and calling gradb2 measures DG/Dt − 2F ≈ 0. The stencil is built at the departure point instead.</a:t>
+              <a:t>•  Gulf of California is its own ocean component (9,891 cells), max coast distance 73.9 km — 0 cells survive the cut.</a:t>
             </a:r>
           </a:p>
           <a:p>
@@ -9615,7 +12197,7 @@
                 </a:solidFill>
                 <a:latin typeface="Calibri"/>
               </a:rPr>
-              <a:t>•  Local Lagrange, not map_coordinates: a filled NaN leaks 46 / 12 / 3.3% at 1 / 2 / 3 nodes through the spline prefilter.</a:t>
+              <a:t>•  The tile-edge rim is finite, not NaN: ~1e6x on the low edges, ~0.5x on the high. edge_cells = 7 covers it (minimum 2).</a:t>
             </a:r>
           </a:p>
           <a:p>
@@ -9634,7 +12216,7 @@
                 </a:solidFill>
                 <a:latin typeface="Calibri"/>
               </a:rPr>
-              <a:t>•  Real hour: order 1 fabricates +5.2% of G per hour on front pixels. 15 tests.</a:t>
+              <a:t>•  17 tests. ocean_mask == isfinite(Theta) cell for cell at both hours; both halo_mask defects guarded.</a:t>
             </a:r>
           </a:p>
         </p:txBody>
@@ -9647,8 +12229,8 @@
         </p:nvSpPr>
         <p:spPr>
           <a:xfrm>
-            <a:off x="777240" y="5943600"/>
-            <a:ext cx="5029200" cy="365760"/>
+            <a:off x="777240" y="6263640"/>
+            <a:ext cx="10607040" cy="365760"/>
           </a:xfrm>
           <a:prstGeom prst="rect">
             <a:avLst/>
@@ -9676,7 +12258,7 @@
                 </a:solidFill>
                 <a:latin typeface="Courier New"/>
               </a:rPr>
-              <a:t>figs/V5_interp_half_cell.png, panel (a)</a:t>
+              <a:t>figs/V6_land_halo_tile330.png, panel (a)</a:t>
             </a:r>
           </a:p>
         </p:txBody>
@@ -9780,7 +12362,7 @@
                 </a:solidFill>
                 <a:latin typeface="Calibri"/>
               </a:rPr>
-              <a:t>TASK 4</a:t>
+              <a:t>TASK 2  ·  CRITERION 7</a:t>
             </a:r>
           </a:p>
         </p:txBody>
@@ -9822,7 +12404,7 @@
                 </a:solidFill>
                 <a:latin typeface="Cambria"/>
               </a:rPr>
-              <a:t>coarsegrain.py</a:t>
+              <a:t>operators.py and the regression oracle</a:t>
             </a:r>
           </a:p>
         </p:txBody>
@@ -9864,14 +12446,14 @@
                 </a:solidFill>
                 <a:latin typeface="Calibri"/>
               </a:rPr>
-              <a:t>The subfilter term closes the coarse-grained budget — with its divergent part τ_δ</a:t>
+              <a:t>One shared operator for both sides; the oracle checks the wiring bit for bit</a:t>
             </a:r>
           </a:p>
         </p:txBody>
       </p:sp>
       <p:pic>
         <p:nvPicPr>
-          <p:cNvPr id="6" name="Picture 5" descr="m1_fig_coarsegrain.png"/>
+          <p:cNvPr id="6" name="Picture 5" descr="m1_fig_operators.png"/>
           <p:cNvPicPr>
             <a:picLocks noChangeAspect="1"/>
           </p:cNvPicPr>
@@ -9885,8 +12467,8 @@
         </p:blipFill>
         <p:spPr>
           <a:xfrm>
-            <a:off x="1005840" y="1737360"/>
-            <a:ext cx="9875520" cy="3198549"/>
+            <a:off x="777240" y="1783080"/>
+            <a:ext cx="5120640" cy="2950877"/>
           </a:xfrm>
           <a:prstGeom prst="rect">
             <a:avLst/>
@@ -9901,8 +12483,8 @@
         </p:nvSpPr>
         <p:spPr>
           <a:xfrm>
-            <a:off x="777240" y="5074920"/>
-            <a:ext cx="10607040" cy="1463040"/>
+            <a:off x="777240" y="4846320"/>
+            <a:ext cx="5120640" cy="1280160"/>
           </a:xfrm>
           <a:prstGeom prst="rect">
             <a:avLst/>
@@ -9917,29 +12499,71 @@
           <a:p>
             <a:pPr algn="l">
               <a:lnSpc>
-                <a:spcPct val="110000"/>
-              </a:lnSpc>
-              <a:spcAft>
-                <a:spcPts val="600"/>
+                <a:spcPct val="115000"/>
+              </a:lnSpc>
+              <a:spcAft>
+                <a:spcPts val="400"/>
               </a:spcAft>
             </a:pPr>
             <a:r>
               <a:rPr sz="2000" b="0" i="0">
                 <a:solidFill>
+                  <a:srgbClr val="62737F"/>
+                </a:solidFill>
+                <a:latin typeface="Calibri"/>
+              </a:rPr>
+              <a:t>The interpolated Jacobian is 0.85x the flux-form strain on the analysis mask (M0's 0.80 included the coast). The 0.911x gradb2 ratio is confirmed.</a:t>
+            </a:r>
+          </a:p>
+        </p:txBody>
+      </p:sp>
+      <p:sp>
+        <p:nvSpPr>
+          <p:cNvPr id="8" name="TextBox 7"/>
+          <p:cNvSpPr txBox="1"/>
+          <p:nvPr/>
+        </p:nvSpPr>
+        <p:spPr>
+          <a:xfrm>
+            <a:off x="6217920" y="1783080"/>
+            <a:ext cx="5212080" cy="4480560"/>
+          </a:xfrm>
+          <a:prstGeom prst="rect">
+            <a:avLst/>
+          </a:prstGeom>
+          <a:noFill/>
+        </p:spPr>
+        <p:txBody>
+          <a:bodyPr wrap="square" lIns="0" rIns="0" tIns="0" bIns="0">
+            <a:spAutoFit/>
+          </a:bodyPr>
+          <a:lstStyle/>
+          <a:p>
+            <a:pPr algn="l">
+              <a:lnSpc>
+                <a:spcPct val="110000"/>
+              </a:lnSpc>
+              <a:spcAft>
+                <a:spcPts val="800"/>
+              </a:spcAft>
+            </a:pPr>
+            <a:r>
+              <a:rPr sz="2000" b="0" i="0">
+                <a:solidFill>
                   <a:srgbClr val="1B2A33"/>
                 </a:solidFill>
                 <a:latin typeface="Calibri"/>
               </a:rPr>
-              <a:t>•  Germano holds to 4e-16 for the composite filter; τ is exactly 0 at L = 0 and O(L²) after — it does not become the numerical-diffusion term.</a:t>
-            </a:r>
-          </a:p>
-          <a:p>
-            <a:pPr algn="l">
-              <a:lnSpc>
-                <a:spcPct val="110000"/>
-              </a:lnSpc>
-              <a:spcAft>
-                <a:spcPts val="600"/>
+              <a:t>•  Criterion 7: unfiltered F vs frontogenesis_tendency — max |dF| = 0.0 on all 352,673 finite cells, both hours.</a:t>
+            </a:r>
+          </a:p>
+          <a:p>
+            <a:pPr algn="l">
+              <a:lnSpc>
+                <a:spcPct val="110000"/>
+              </a:lnSpc>
+              <a:spcAft>
+                <a:spcPts val="800"/>
               </a:spcAft>
             </a:pPr>
             <a:r>
@@ -9949,7 +12573,45 @@
                 </a:solidFill>
                 <a:latin typeface="Calibri"/>
               </a:rPr>
-              <a:t>•  Returned in F units (M3's subfilter field = 2 × term). The flux form without τ_δ overstates it 2.2x on hour 0. 10 tests; task 6's discrete F improved the 900 m residuals to 0.037 / 0.088.</a:t>
+              <a:t>•  lowpass: a top-hat of half-width L/2; NaN propagates, never renormalised. F is finite on all 262,925 analysis cells at every L.</a:t>
+            </a:r>
+          </a:p>
+          <a:p>
+            <a:pPr algn="l">
+              <a:lnSpc>
+                <a:spcPct val="110000"/>
+              </a:lnSpc>
+              <a:spcAft>
+                <a:spcPts val="800"/>
+              </a:spcAft>
+            </a:pPr>
+            <a:r>
+              <a:rPr sz="2000" b="0" i="0">
+                <a:solidFill>
+                  <a:srgbClr val="1B2A33"/>
+                </a:solidFill>
+                <a:latin typeface="Calibri"/>
+              </a:rPr>
+              <a:t>•  Planning §2.4 had the strain-term sign wrong: F = −½δG + ½|σ|G cos 2θ, θ from the compressional axis.</a:t>
+            </a:r>
+          </a:p>
+          <a:p>
+            <a:pPr algn="l">
+              <a:lnSpc>
+                <a:spcPct val="110000"/>
+              </a:lnSpc>
+              <a:spcAft>
+                <a:spcPts val="800"/>
+              </a:spcAft>
+            </a:pPr>
+            <a:r>
+              <a:rPr sz="2000" b="0" i="0">
+                <a:solidFill>
+                  <a:srgbClr val="1B2A33"/>
+                </a:solidFill>
+                <a:latin typeface="Calibri"/>
+              </a:rPr>
+              <a:t>•  21 tests; the dims guard turns the 4-D broadcast into a ValueError before dbof.</a:t>
             </a:r>
           </a:p>
         </p:txBody>
@@ -10053,7 +12715,7 @@
                 </a:solidFill>
                 <a:latin typeface="Calibri"/>
               </a:rPr>
-              <a:t>TASK 5  ·  CRITERIA 1, 2, 4</a:t>
+              <a:t>TASK 3  ·  V5, THE FIGURE LAUREN ASKED FOR</a:t>
             </a:r>
           </a:p>
         </p:txBody>
@@ -10095,7 +12757,7 @@
                 </a:solidFill>
                 <a:latin typeface="Cambria"/>
               </a:rPr>
-              <a:t>Gates V1, V2 and V4</a:t>
+              <a:t>semilag.py and V5</a:t>
             </a:r>
           </a:p>
         </p:txBody>
@@ -10137,404 +12799,14 @@
                 </a:solidFill>
                 <a:latin typeface="Calibri"/>
               </a:rPr>
-              <a:t>Two gates pass by a wide margin; V4 is the permanent error bar on every slope</a:t>
-            </a:r>
-          </a:p>
-        </p:txBody>
-      </p:sp>
-      <p:sp>
-        <p:nvSpPr>
-          <p:cNvPr id="6" name="Rounded Rectangle 5"/>
-          <p:cNvSpPr/>
-          <p:nvPr/>
-        </p:nvSpPr>
-        <p:spPr>
-          <a:xfrm>
-            <a:off x="777240" y="1737360"/>
-            <a:ext cx="3383280" cy="1691640"/>
-          </a:xfrm>
-          <a:prstGeom prst="roundRect">
-            <a:avLst>
-              <a:gd name="adj" fmla="val 7000"/>
-            </a:avLst>
-          </a:prstGeom>
-          <a:solidFill>
-            <a:srgbClr val="E7EFF3"/>
-          </a:solidFill>
-          <a:ln>
-            <a:noFill/>
-          </a:ln>
-          <a:effectLst/>
-        </p:spPr>
-        <p:style>
-          <a:lnRef idx="1">
-            <a:schemeClr val="accent1"/>
-          </a:lnRef>
-          <a:fillRef idx="3">
-            <a:schemeClr val="accent1"/>
-          </a:fillRef>
-          <a:effectRef idx="2">
-            <a:schemeClr val="accent1"/>
-          </a:effectRef>
-          <a:fontRef idx="minor">
-            <a:schemeClr val="lt1"/>
-          </a:fontRef>
-        </p:style>
-        <p:txBody>
-          <a:bodyPr rtlCol="0" anchor="ctr"/>
-          <a:lstStyle/>
-          <a:p>
-            <a:pPr algn="ctr"/>
-          </a:p>
-        </p:txBody>
-      </p:sp>
-      <p:sp>
-        <p:nvSpPr>
-          <p:cNvPr id="7" name="TextBox 6"/>
-          <p:cNvSpPr txBox="1"/>
-          <p:nvPr/>
-        </p:nvSpPr>
-        <p:spPr>
-          <a:xfrm>
-            <a:off x="960120" y="1847088"/>
-            <a:ext cx="3017520" cy="365760"/>
-          </a:xfrm>
-          <a:prstGeom prst="rect">
-            <a:avLst/>
-          </a:prstGeom>
-          <a:noFill/>
-        </p:spPr>
-        <p:txBody>
-          <a:bodyPr wrap="square" lIns="0" rIns="0" tIns="0" bIns="0">
-            <a:spAutoFit/>
-          </a:bodyPr>
-          <a:lstStyle/>
-          <a:p>
-            <a:pPr algn="l">
-              <a:lnSpc>
-                <a:spcPct val="110000"/>
-              </a:lnSpc>
-              <a:spcAft>
-                <a:spcPts val="0"/>
-              </a:spcAft>
-            </a:pPr>
-            <a:r>
-              <a:rPr sz="2100" b="1" i="0">
-                <a:solidFill>
-                  <a:srgbClr val="065A82"/>
-                </a:solidFill>
-                <a:latin typeface="Calibri"/>
-              </a:rPr>
-              <a:t>V1 — PASS, 0.78%</a:t>
-            </a:r>
-          </a:p>
-        </p:txBody>
-      </p:sp>
-      <p:sp>
-        <p:nvSpPr>
-          <p:cNvPr id="8" name="TextBox 7"/>
-          <p:cNvSpPr txBox="1"/>
-          <p:nvPr/>
-        </p:nvSpPr>
-        <p:spPr>
-          <a:xfrm>
-            <a:off x="960120" y="2258568"/>
-            <a:ext cx="3017520" cy="1097280"/>
-          </a:xfrm>
-          <a:prstGeom prst="rect">
-            <a:avLst/>
-          </a:prstGeom>
-          <a:noFill/>
-        </p:spPr>
-        <p:txBody>
-          <a:bodyPr wrap="square" lIns="0" rIns="0" tIns="0" bIns="0">
-            <a:spAutoFit/>
-          </a:bodyPr>
-          <a:lstStyle/>
-          <a:p>
-            <a:pPr algn="l">
-              <a:lnSpc>
-                <a:spcPct val="108000"/>
-              </a:lnSpc>
-              <a:spcAft>
-                <a:spcPts val="0"/>
-              </a:spcAft>
-            </a:pPr>
-            <a:r>
-              <a:rPr sz="2000" b="0" i="0">
-                <a:solidFill>
-                  <a:srgbClr val="1B2A33"/>
-                </a:solidFill>
-                <a:latin typeface="Calibri"/>
-              </a:rPr>
-              <a:t>8 chained hours at ell = 8 dx; the step alone &lt; 0.36%.</a:t>
-            </a:r>
-          </a:p>
-        </p:txBody>
-      </p:sp>
-      <p:sp>
-        <p:nvSpPr>
-          <p:cNvPr id="9" name="Rounded Rectangle 8"/>
-          <p:cNvSpPr/>
-          <p:nvPr/>
-        </p:nvSpPr>
-        <p:spPr>
-          <a:xfrm>
-            <a:off x="4389120" y="1737360"/>
-            <a:ext cx="3383280" cy="1691640"/>
-          </a:xfrm>
-          <a:prstGeom prst="roundRect">
-            <a:avLst>
-              <a:gd name="adj" fmla="val 7000"/>
-            </a:avLst>
-          </a:prstGeom>
-          <a:solidFill>
-            <a:srgbClr val="E7EFF3"/>
-          </a:solidFill>
-          <a:ln>
-            <a:noFill/>
-          </a:ln>
-          <a:effectLst/>
-        </p:spPr>
-        <p:style>
-          <a:lnRef idx="1">
-            <a:schemeClr val="accent1"/>
-          </a:lnRef>
-          <a:fillRef idx="3">
-            <a:schemeClr val="accent1"/>
-          </a:fillRef>
-          <a:effectRef idx="2">
-            <a:schemeClr val="accent1"/>
-          </a:effectRef>
-          <a:fontRef idx="minor">
-            <a:schemeClr val="lt1"/>
-          </a:fontRef>
-        </p:style>
-        <p:txBody>
-          <a:bodyPr rtlCol="0" anchor="ctr"/>
-          <a:lstStyle/>
-          <a:p>
-            <a:pPr algn="ctr"/>
-          </a:p>
-        </p:txBody>
-      </p:sp>
-      <p:sp>
-        <p:nvSpPr>
-          <p:cNvPr id="10" name="TextBox 9"/>
-          <p:cNvSpPr txBox="1"/>
-          <p:nvPr/>
-        </p:nvSpPr>
-        <p:spPr>
-          <a:xfrm>
-            <a:off x="4572000" y="1847088"/>
-            <a:ext cx="3017520" cy="365760"/>
-          </a:xfrm>
-          <a:prstGeom prst="rect">
-            <a:avLst/>
-          </a:prstGeom>
-          <a:noFill/>
-        </p:spPr>
-        <p:txBody>
-          <a:bodyPr wrap="square" lIns="0" rIns="0" tIns="0" bIns="0">
-            <a:spAutoFit/>
-          </a:bodyPr>
-          <a:lstStyle/>
-          <a:p>
-            <a:pPr algn="l">
-              <a:lnSpc>
-                <a:spcPct val="110000"/>
-              </a:lnSpc>
-              <a:spcAft>
-                <a:spcPts val="0"/>
-              </a:spcAft>
-            </a:pPr>
-            <a:r>
-              <a:rPr sz="2100" b="1" i="0">
-                <a:solidFill>
-                  <a:srgbClr val="065A82"/>
-                </a:solidFill>
-                <a:latin typeface="Calibri"/>
-              </a:rPr>
-              <a:t>V2 — PASS, 0.077%</a:t>
-            </a:r>
-          </a:p>
-        </p:txBody>
-      </p:sp>
-      <p:sp>
-        <p:nvSpPr>
-          <p:cNvPr id="11" name="TextBox 10"/>
-          <p:cNvSpPr txBox="1"/>
-          <p:nvPr/>
-        </p:nvSpPr>
-        <p:spPr>
-          <a:xfrm>
-            <a:off x="4572000" y="2258568"/>
-            <a:ext cx="3017520" cy="1097280"/>
-          </a:xfrm>
-          <a:prstGeom prst="rect">
-            <a:avLst/>
-          </a:prstGeom>
-          <a:noFill/>
-        </p:spPr>
-        <p:txBody>
-          <a:bodyPr wrap="square" lIns="0" rIns="0" tIns="0" bIns="0">
-            <a:spAutoFit/>
-          </a:bodyPr>
-          <a:lstStyle/>
-          <a:p>
-            <a:pPr algn="l">
-              <a:lnSpc>
-                <a:spcPct val="108000"/>
-              </a:lnSpc>
-              <a:spcAft>
-                <a:spcPts val="0"/>
-              </a:spcAft>
-            </a:pPr>
-            <a:r>
-              <a:rPr sz="2000" b="0" i="0">
-                <a:solidFill>
-                  <a:srgbClr val="1B2A33"/>
-                </a:solidFill>
-                <a:latin typeface="Calibri"/>
-              </a:rPr>
-              <a:t>b_x max; b_y 0.041%; metric alone 0.012%; swapped 87%.</a:t>
-            </a:r>
-          </a:p>
-        </p:txBody>
-      </p:sp>
-      <p:sp>
-        <p:nvSpPr>
-          <p:cNvPr id="12" name="Rounded Rectangle 11"/>
-          <p:cNvSpPr/>
-          <p:nvPr/>
-        </p:nvSpPr>
-        <p:spPr>
-          <a:xfrm>
-            <a:off x="8001000" y="1737360"/>
-            <a:ext cx="3383280" cy="1691640"/>
-          </a:xfrm>
-          <a:prstGeom prst="roundRect">
-            <a:avLst>
-              <a:gd name="adj" fmla="val 7000"/>
-            </a:avLst>
-          </a:prstGeom>
-          <a:solidFill>
-            <a:srgbClr val="E7EFF3"/>
-          </a:solidFill>
-          <a:ln>
-            <a:noFill/>
-          </a:ln>
-          <a:effectLst/>
-        </p:spPr>
-        <p:style>
-          <a:lnRef idx="1">
-            <a:schemeClr val="accent1"/>
-          </a:lnRef>
-          <a:fillRef idx="3">
-            <a:schemeClr val="accent1"/>
-          </a:fillRef>
-          <a:effectRef idx="2">
-            <a:schemeClr val="accent1"/>
-          </a:effectRef>
-          <a:fontRef idx="minor">
-            <a:schemeClr val="lt1"/>
-          </a:fontRef>
-        </p:style>
-        <p:txBody>
-          <a:bodyPr rtlCol="0" anchor="ctr"/>
-          <a:lstStyle/>
-          <a:p>
-            <a:pPr algn="ctr"/>
-          </a:p>
-        </p:txBody>
-      </p:sp>
-      <p:sp>
-        <p:nvSpPr>
-          <p:cNvPr id="13" name="TextBox 12"/>
-          <p:cNvSpPr txBox="1"/>
-          <p:nvPr/>
-        </p:nvSpPr>
-        <p:spPr>
-          <a:xfrm>
-            <a:off x="8183879" y="1847088"/>
-            <a:ext cx="3017520" cy="365760"/>
-          </a:xfrm>
-          <a:prstGeom prst="rect">
-            <a:avLst/>
-          </a:prstGeom>
-          <a:noFill/>
-        </p:spPr>
-        <p:txBody>
-          <a:bodyPr wrap="square" lIns="0" rIns="0" tIns="0" bIns="0">
-            <a:spAutoFit/>
-          </a:bodyPr>
-          <a:lstStyle/>
-          <a:p>
-            <a:pPr algn="l">
-              <a:lnSpc>
-                <a:spcPct val="110000"/>
-              </a:lnSpc>
-              <a:spcAft>
-                <a:spcPts val="0"/>
-              </a:spcAft>
-            </a:pPr>
-            <a:r>
-              <a:rPr sz="2100" b="1" i="0">
-                <a:solidFill>
-                  <a:srgbClr val="065A82"/>
-                </a:solidFill>
-                <a:latin typeface="Calibri"/>
-              </a:rPr>
-              <a:t>V4 — 0.28 to 1.0%</a:t>
-            </a:r>
-          </a:p>
-        </p:txBody>
-      </p:sp>
-      <p:sp>
-        <p:nvSpPr>
-          <p:cNvPr id="14" name="TextBox 13"/>
-          <p:cNvSpPr txBox="1"/>
-          <p:nvPr/>
-        </p:nvSpPr>
-        <p:spPr>
-          <a:xfrm>
-            <a:off x="8183879" y="2258568"/>
-            <a:ext cx="3017520" cy="1097280"/>
-          </a:xfrm>
-          <a:prstGeom prst="rect">
-            <a:avLst/>
-          </a:prstGeom>
-          <a:noFill/>
-        </p:spPr>
-        <p:txBody>
-          <a:bodyPr wrap="square" lIns="0" rIns="0" tIns="0" bIns="0">
-            <a:spAutoFit/>
-          </a:bodyPr>
-          <a:lstStyle/>
-          <a:p>
-            <a:pPr algn="l">
-              <a:lnSpc>
-                <a:spcPct val="108000"/>
-              </a:lnSpc>
-              <a:spcAft>
-                <a:spcPts val="0"/>
-              </a:spcAft>
-            </a:pPr>
-            <a:r>
-              <a:rPr sz="2000" b="0" i="0">
-                <a:solidFill>
-                  <a:srgbClr val="1B2A33"/>
-                </a:solidFill>
-                <a:latin typeface="Calibri"/>
-              </a:rPr>
-              <a:t>of G per hour, order 3, 1.5- to 1-cell front. Order 5: 0.06%.</a:t>
+              <a:t>Interpolate b (order ≥ 3) onto the departure stencil — never G</a:t>
             </a:r>
           </a:p>
         </p:txBody>
       </p:sp>
       <p:pic>
         <p:nvPicPr>
-          <p:cNvPr id="15" name="Picture 14" descr="m1_crop_V1a.png"/>
+          <p:cNvPr id="6" name="Picture 5" descr="m1_crop_V5a.png"/>
           <p:cNvPicPr>
             <a:picLocks noChangeAspect="1"/>
           </p:cNvPicPr>
@@ -10548,38 +12820,155 @@
         </p:blipFill>
         <p:spPr>
           <a:xfrm>
-            <a:off x="777240" y="3657600"/>
-            <a:ext cx="4140798" cy="2834640"/>
+            <a:off x="777240" y="1737360"/>
+            <a:ext cx="5029200" cy="4053385"/>
           </a:xfrm>
           <a:prstGeom prst="rect">
             <a:avLst/>
           </a:prstGeom>
         </p:spPr>
       </p:pic>
-      <p:pic>
-        <p:nvPicPr>
-          <p:cNvPr id="16" name="Picture 15" descr="m1_fig_gates.png"/>
-          <p:cNvPicPr>
-            <a:picLocks noChangeAspect="1"/>
-          </p:cNvPicPr>
-          <p:nvPr/>
-        </p:nvPicPr>
-        <p:blipFill>
-          <a:blip r:embed="rId3"/>
-          <a:stretch>
-            <a:fillRect/>
-          </a:stretch>
-        </p:blipFill>
-        <p:spPr>
-          <a:xfrm>
-            <a:off x="6035040" y="3611880"/>
-            <a:ext cx="5199808" cy="2880360"/>
-          </a:xfrm>
-          <a:prstGeom prst="rect">
-            <a:avLst/>
-          </a:prstGeom>
-        </p:spPr>
-      </p:pic>
+      <p:sp>
+        <p:nvSpPr>
+          <p:cNvPr id="7" name="TextBox 6"/>
+          <p:cNvSpPr txBox="1"/>
+          <p:nvPr/>
+        </p:nvSpPr>
+        <p:spPr>
+          <a:xfrm>
+            <a:off x="6126480" y="1783080"/>
+            <a:ext cx="5303520" cy="4480560"/>
+          </a:xfrm>
+          <a:prstGeom prst="rect">
+            <a:avLst/>
+          </a:prstGeom>
+          <a:noFill/>
+        </p:spPr>
+        <p:txBody>
+          <a:bodyPr wrap="square" lIns="0" rIns="0" tIns="0" bIns="0">
+            <a:spAutoFit/>
+          </a:bodyPr>
+          <a:lstStyle/>
+          <a:p>
+            <a:pPr algn="l">
+              <a:lnSpc>
+                <a:spcPct val="110000"/>
+              </a:lnSpc>
+              <a:spcAft>
+                <a:spcPts val="800"/>
+              </a:spcAft>
+            </a:pPr>
+            <a:r>
+              <a:rPr sz="2000" b="0" i="0">
+                <a:solidFill>
+                  <a:srgbClr val="1B2A33"/>
+                </a:solidFill>
+                <a:latin typeface="Calibri"/>
+              </a:rPr>
+              <a:t>•  Half-cell shift, 1.5-cell front, bias at the maximum: bilinear G −4.94%, bilinear b −4.99%, cubic b −0.54%, quintic b −0.10% (prediction −5.56%).</a:t>
+            </a:r>
+          </a:p>
+          <a:p>
+            <a:pPr algn="l">
+              <a:lnSpc>
+                <a:spcPct val="110000"/>
+              </a:lnSpc>
+              <a:spcAft>
+                <a:spcPts val="800"/>
+              </a:spcAft>
+            </a:pPr>
+            <a:r>
+              <a:rPr sz="2000" b="0" i="0">
+                <a:solidFill>
+                  <a:srgbClr val="1B2A33"/>
+                </a:solidFill>
+                <a:latin typeface="Calibri"/>
+              </a:rPr>
+              <a:t>•  The trap: shifting b and calling gradb2 measures DG/Dt − 2F ≈ 0. The stencil is built at the departure point instead.</a:t>
+            </a:r>
+          </a:p>
+          <a:p>
+            <a:pPr algn="l">
+              <a:lnSpc>
+                <a:spcPct val="110000"/>
+              </a:lnSpc>
+              <a:spcAft>
+                <a:spcPts val="800"/>
+              </a:spcAft>
+            </a:pPr>
+            <a:r>
+              <a:rPr sz="2000" b="0" i="0">
+                <a:solidFill>
+                  <a:srgbClr val="1B2A33"/>
+                </a:solidFill>
+                <a:latin typeface="Calibri"/>
+              </a:rPr>
+              <a:t>•  Local Lagrange, not map_coordinates: a filled NaN leaks 46 / 12 / 3.3% at 1 / 2 / 3 nodes through the spline prefilter.</a:t>
+            </a:r>
+          </a:p>
+          <a:p>
+            <a:pPr algn="l">
+              <a:lnSpc>
+                <a:spcPct val="110000"/>
+              </a:lnSpc>
+              <a:spcAft>
+                <a:spcPts val="800"/>
+              </a:spcAft>
+            </a:pPr>
+            <a:r>
+              <a:rPr sz="2000" b="0" i="0">
+                <a:solidFill>
+                  <a:srgbClr val="1B2A33"/>
+                </a:solidFill>
+                <a:latin typeface="Calibri"/>
+              </a:rPr>
+              <a:t>•  Real hour: order 1 fabricates +5.2% of G per hour on front pixels. 15 tests.</a:t>
+            </a:r>
+          </a:p>
+        </p:txBody>
+      </p:sp>
+      <p:sp>
+        <p:nvSpPr>
+          <p:cNvPr id="8" name="TextBox 7"/>
+          <p:cNvSpPr txBox="1"/>
+          <p:nvPr/>
+        </p:nvSpPr>
+        <p:spPr>
+          <a:xfrm>
+            <a:off x="777240" y="5943600"/>
+            <a:ext cx="5029200" cy="365760"/>
+          </a:xfrm>
+          <a:prstGeom prst="rect">
+            <a:avLst/>
+          </a:prstGeom>
+          <a:noFill/>
+        </p:spPr>
+        <p:txBody>
+          <a:bodyPr wrap="square" lIns="0" rIns="0" tIns="0" bIns="0">
+            <a:spAutoFit/>
+          </a:bodyPr>
+          <a:lstStyle/>
+          <a:p>
+            <a:pPr algn="l">
+              <a:lnSpc>
+                <a:spcPct val="110000"/>
+              </a:lnSpc>
+              <a:spcAft>
+                <a:spcPts val="0"/>
+              </a:spcAft>
+            </a:pPr>
+            <a:r>
+              <a:rPr sz="2000" b="0" i="0">
+                <a:solidFill>
+                  <a:srgbClr val="62737F"/>
+                </a:solidFill>
+                <a:latin typeface="Courier New"/>
+              </a:rPr>
+              <a:t>figs/V5_interp_half_cell.png, panel (a)</a:t>
+            </a:r>
+          </a:p>
+        </p:txBody>
+      </p:sp>
     </p:spTree>
   </p:cSld>
   <p:clrMapOvr>
@@ -10679,7 +13068,7 @@
                 </a:solidFill>
                 <a:latin typeface="Calibri"/>
               </a:rPr>
-              <a:t>TASK 6  ·  THE HARD GATE, CRITERION 3</a:t>
+              <a:t>TASK 4</a:t>
             </a:r>
           </a:p>
         </p:txBody>
@@ -10721,7 +13110,7 @@
                 </a:solidFill>
                 <a:latin typeface="Cambria"/>
               </a:rPr>
-              <a:t>Gate V3 — the discrete null</a:t>
+              <a:t>coarsegrain.py</a:t>
             </a:r>
           </a:p>
         </p:txBody>
@@ -10763,14 +13152,14 @@
                 </a:solidFill>
                 <a:latin typeface="Calibri"/>
               </a:rPr>
-              <a:t>First attempt FAIL 0.950 / 0.758 → PASS 1.004 [0.995, 1.017] / 0.981 [0.970, 0.994]</a:t>
+              <a:t>The subfilter term closes the coarse-grained budget — with its divergent part τ_δ</a:t>
             </a:r>
           </a:p>
         </p:txBody>
       </p:sp>
       <p:pic>
         <p:nvPicPr>
-          <p:cNvPr id="6" name="Picture 5" descr="m1_crop_V3d.png"/>
+          <p:cNvPr id="6" name="Picture 5" descr="m1_fig_coarsegrain.png"/>
           <p:cNvPicPr>
             <a:picLocks noChangeAspect="1"/>
           </p:cNvPicPr>
@@ -10784,8 +13173,8 @@
         </p:blipFill>
         <p:spPr>
           <a:xfrm>
-            <a:off x="777240" y="1737360"/>
-            <a:ext cx="4114800" cy="3851031"/>
+            <a:off x="1005840" y="1737360"/>
+            <a:ext cx="9875520" cy="3198549"/>
           </a:xfrm>
           <a:prstGeom prst="rect">
             <a:avLst/>
@@ -10800,8 +13189,8 @@
         </p:nvSpPr>
         <p:spPr>
           <a:xfrm>
-            <a:off x="777240" y="6035040"/>
-            <a:ext cx="4114800" cy="457200"/>
+            <a:off x="777240" y="5074920"/>
+            <a:ext cx="10607040" cy="1463040"/>
           </a:xfrm>
           <a:prstGeom prst="rect">
             <a:avLst/>
@@ -10819,73 +13208,26 @@
                 <a:spcPct val="110000"/>
               </a:lnSpc>
               <a:spcAft>
-                <a:spcPts val="0"/>
+                <a:spcPts val="600"/>
               </a:spcAft>
             </a:pPr>
             <a:r>
               <a:rPr sz="2000" b="0" i="0">
                 <a:solidFill>
-                  <a:srgbClr val="62737F"/>
-                </a:solidFill>
-                <a:latin typeface="Courier New"/>
-              </a:rPr>
-              <a:t>V3 panel (d): LLC, n 26,293, corr 0.982</a:t>
-            </a:r>
-          </a:p>
-        </p:txBody>
-      </p:sp>
-      <p:pic>
-        <p:nvPicPr>
-          <p:cNvPr id="8" name="Picture 7" descr="m1_fig_v3_changes.png"/>
-          <p:cNvPicPr>
-            <a:picLocks noChangeAspect="1"/>
-          </p:cNvPicPr>
-          <p:nvPr/>
-        </p:nvPicPr>
-        <p:blipFill>
-          <a:blip r:embed="rId3"/>
-          <a:stretch>
-            <a:fillRect/>
-          </a:stretch>
-        </p:blipFill>
-        <p:spPr>
-          <a:xfrm>
-            <a:off x="5212080" y="1737360"/>
-            <a:ext cx="6309360" cy="2870439"/>
-          </a:xfrm>
-          <a:prstGeom prst="rect">
-            <a:avLst/>
-          </a:prstGeom>
-        </p:spPr>
-      </p:pic>
-      <p:sp>
-        <p:nvSpPr>
-          <p:cNvPr id="9" name="TextBox 8"/>
-          <p:cNvSpPr txBox="1"/>
-          <p:nvPr/>
-        </p:nvSpPr>
-        <p:spPr>
-          <a:xfrm>
-            <a:off x="5212080" y="4754880"/>
-            <a:ext cx="6217920" cy="1737360"/>
-          </a:xfrm>
-          <a:prstGeom prst="rect">
-            <a:avLst/>
-          </a:prstGeom>
-          <a:noFill/>
-        </p:spPr>
-        <p:txBody>
-          <a:bodyPr wrap="square" lIns="0" rIns="0" tIns="0" bIns="0">
-            <a:spAutoFit/>
-          </a:bodyPr>
-          <a:lstStyle/>
-          <a:p>
-            <a:pPr algn="l">
-              <a:lnSpc>
-                <a:spcPct val="108000"/>
-              </a:lnSpc>
-              <a:spcAft>
-                <a:spcPts val="500"/>
+                  <a:srgbClr val="1B2A33"/>
+                </a:solidFill>
+                <a:latin typeface="Calibri"/>
+              </a:rPr>
+              <a:t>•  Germano holds to 4e-16 for the composite filter; τ is exactly 0 at L = 0 and O(L²) after — it does not become the numerical-diffusion term.</a:t>
+            </a:r>
+          </a:p>
+          <a:p>
+            <a:pPr algn="l">
+              <a:lnSpc>
+                <a:spcPct val="110000"/>
+              </a:lnSpc>
+              <a:spcAft>
+                <a:spcPts val="600"/>
               </a:spcAft>
             </a:pPr>
             <a:r>
@@ -10895,26 +13237,7 @@
                 </a:solidFill>
                 <a:latin typeface="Calibri"/>
               </a:rPr>
-              <a:t>The chain-rule product fails on the grid by (2/3)(dx/ell)². The consistent F = −Σ (L_k b)[L_k, u·∇] b is now the default (form='discrete'); the departure velocity is cubic.</a:t>
-            </a:r>
-          </a:p>
-          <a:p>
-            <a:pPr algn="l">
-              <a:lnSpc>
-                <a:spcPct val="108000"/>
-              </a:lnSpc>
-              <a:spcAft>
-                <a:spcPts val="500"/>
-              </a:spcAft>
-            </a:pPr>
-            <a:r>
-              <a:rPr sz="2000" b="0" i="0">
-                <a:solidFill>
-                  <a:srgbClr val="62737F"/>
-                </a:solidFill>
-                <a:latin typeface="Calibri"/>
-              </a:rPr>
-              <a:t>Both sides of this null see the same centred velocity, so the 0.85x Jacobian attenuation cannot appear here. 70 tests, 0 skipped.</a:t>
+              <a:t>•  Returned in F units (M3's subfilter field = 2 × term). The flux form without τ_δ overstates it 2.2x on hour 0. 10 tests; task 6's discrete F improved the 900 m residuals to 0.037 / 0.088.</a:t>
             </a:r>
           </a:p>
         </p:txBody>
@@ -11018,7 +13341,7 @@
                 </a:solidFill>
                 <a:latin typeface="Calibri"/>
               </a:rPr>
-              <a:t>TASK 6b  ·  M1-Q2, OPTION (a)</a:t>
+              <a:t>TASK 5  ·  CRITERIA 1, 2, 4</a:t>
             </a:r>
           </a:p>
         </p:txBody>
@@ -11060,7 +13383,7 @@
                 </a:solidFill>
                 <a:latin typeface="Cambria"/>
               </a:rPr>
-              <a:t>V3b — the finite-volume null</a:t>
+              <a:t>Gates V1, V2 and V4</a:t>
             </a:r>
           </a:p>
         </p:txBody>
@@ -11102,14 +13425,404 @@
                 </a:solidFill>
                 <a:latin typeface="Calibri"/>
               </a:rPr>
-              <a:t>A recorded bias, not a gate: 0.975 [0.954, 1.003] on the real hour, −0.006 ± 0.025 from V3's 0.981</a:t>
+              <a:t>Two gates pass by a wide margin; V4 is the permanent error bar on every slope</a:t>
+            </a:r>
+          </a:p>
+        </p:txBody>
+      </p:sp>
+      <p:sp>
+        <p:nvSpPr>
+          <p:cNvPr id="6" name="Rounded Rectangle 5"/>
+          <p:cNvSpPr/>
+          <p:nvPr/>
+        </p:nvSpPr>
+        <p:spPr>
+          <a:xfrm>
+            <a:off x="777240" y="1737360"/>
+            <a:ext cx="3383280" cy="1691640"/>
+          </a:xfrm>
+          <a:prstGeom prst="roundRect">
+            <a:avLst>
+              <a:gd name="adj" fmla="val 7000"/>
+            </a:avLst>
+          </a:prstGeom>
+          <a:solidFill>
+            <a:srgbClr val="E7EFF3"/>
+          </a:solidFill>
+          <a:ln>
+            <a:noFill/>
+          </a:ln>
+          <a:effectLst/>
+        </p:spPr>
+        <p:style>
+          <a:lnRef idx="1">
+            <a:schemeClr val="accent1"/>
+          </a:lnRef>
+          <a:fillRef idx="3">
+            <a:schemeClr val="accent1"/>
+          </a:fillRef>
+          <a:effectRef idx="2">
+            <a:schemeClr val="accent1"/>
+          </a:effectRef>
+          <a:fontRef idx="minor">
+            <a:schemeClr val="lt1"/>
+          </a:fontRef>
+        </p:style>
+        <p:txBody>
+          <a:bodyPr rtlCol="0" anchor="ctr"/>
+          <a:lstStyle/>
+          <a:p>
+            <a:pPr algn="ctr"/>
+          </a:p>
+        </p:txBody>
+      </p:sp>
+      <p:sp>
+        <p:nvSpPr>
+          <p:cNvPr id="7" name="TextBox 6"/>
+          <p:cNvSpPr txBox="1"/>
+          <p:nvPr/>
+        </p:nvSpPr>
+        <p:spPr>
+          <a:xfrm>
+            <a:off x="960120" y="1847088"/>
+            <a:ext cx="3017520" cy="365760"/>
+          </a:xfrm>
+          <a:prstGeom prst="rect">
+            <a:avLst/>
+          </a:prstGeom>
+          <a:noFill/>
+        </p:spPr>
+        <p:txBody>
+          <a:bodyPr wrap="square" lIns="0" rIns="0" tIns="0" bIns="0">
+            <a:spAutoFit/>
+          </a:bodyPr>
+          <a:lstStyle/>
+          <a:p>
+            <a:pPr algn="l">
+              <a:lnSpc>
+                <a:spcPct val="110000"/>
+              </a:lnSpc>
+              <a:spcAft>
+                <a:spcPts val="0"/>
+              </a:spcAft>
+            </a:pPr>
+            <a:r>
+              <a:rPr sz="2100" b="1" i="0">
+                <a:solidFill>
+                  <a:srgbClr val="065A82"/>
+                </a:solidFill>
+                <a:latin typeface="Calibri"/>
+              </a:rPr>
+              <a:t>V1 — PASS, 0.78%</a:t>
+            </a:r>
+          </a:p>
+        </p:txBody>
+      </p:sp>
+      <p:sp>
+        <p:nvSpPr>
+          <p:cNvPr id="8" name="TextBox 7"/>
+          <p:cNvSpPr txBox="1"/>
+          <p:nvPr/>
+        </p:nvSpPr>
+        <p:spPr>
+          <a:xfrm>
+            <a:off x="960120" y="2258568"/>
+            <a:ext cx="3017520" cy="1097280"/>
+          </a:xfrm>
+          <a:prstGeom prst="rect">
+            <a:avLst/>
+          </a:prstGeom>
+          <a:noFill/>
+        </p:spPr>
+        <p:txBody>
+          <a:bodyPr wrap="square" lIns="0" rIns="0" tIns="0" bIns="0">
+            <a:spAutoFit/>
+          </a:bodyPr>
+          <a:lstStyle/>
+          <a:p>
+            <a:pPr algn="l">
+              <a:lnSpc>
+                <a:spcPct val="108000"/>
+              </a:lnSpc>
+              <a:spcAft>
+                <a:spcPts val="0"/>
+              </a:spcAft>
+            </a:pPr>
+            <a:r>
+              <a:rPr sz="2000" b="0" i="0">
+                <a:solidFill>
+                  <a:srgbClr val="1B2A33"/>
+                </a:solidFill>
+                <a:latin typeface="Calibri"/>
+              </a:rPr>
+              <a:t>8 chained hours at ell = 8 dx; the step alone &lt; 0.36%.</a:t>
+            </a:r>
+          </a:p>
+        </p:txBody>
+      </p:sp>
+      <p:sp>
+        <p:nvSpPr>
+          <p:cNvPr id="9" name="Rounded Rectangle 8"/>
+          <p:cNvSpPr/>
+          <p:nvPr/>
+        </p:nvSpPr>
+        <p:spPr>
+          <a:xfrm>
+            <a:off x="4389120" y="1737360"/>
+            <a:ext cx="3383280" cy="1691640"/>
+          </a:xfrm>
+          <a:prstGeom prst="roundRect">
+            <a:avLst>
+              <a:gd name="adj" fmla="val 7000"/>
+            </a:avLst>
+          </a:prstGeom>
+          <a:solidFill>
+            <a:srgbClr val="E7EFF3"/>
+          </a:solidFill>
+          <a:ln>
+            <a:noFill/>
+          </a:ln>
+          <a:effectLst/>
+        </p:spPr>
+        <p:style>
+          <a:lnRef idx="1">
+            <a:schemeClr val="accent1"/>
+          </a:lnRef>
+          <a:fillRef idx="3">
+            <a:schemeClr val="accent1"/>
+          </a:fillRef>
+          <a:effectRef idx="2">
+            <a:schemeClr val="accent1"/>
+          </a:effectRef>
+          <a:fontRef idx="minor">
+            <a:schemeClr val="lt1"/>
+          </a:fontRef>
+        </p:style>
+        <p:txBody>
+          <a:bodyPr rtlCol="0" anchor="ctr"/>
+          <a:lstStyle/>
+          <a:p>
+            <a:pPr algn="ctr"/>
+          </a:p>
+        </p:txBody>
+      </p:sp>
+      <p:sp>
+        <p:nvSpPr>
+          <p:cNvPr id="10" name="TextBox 9"/>
+          <p:cNvSpPr txBox="1"/>
+          <p:nvPr/>
+        </p:nvSpPr>
+        <p:spPr>
+          <a:xfrm>
+            <a:off x="4572000" y="1847088"/>
+            <a:ext cx="3017520" cy="365760"/>
+          </a:xfrm>
+          <a:prstGeom prst="rect">
+            <a:avLst/>
+          </a:prstGeom>
+          <a:noFill/>
+        </p:spPr>
+        <p:txBody>
+          <a:bodyPr wrap="square" lIns="0" rIns="0" tIns="0" bIns="0">
+            <a:spAutoFit/>
+          </a:bodyPr>
+          <a:lstStyle/>
+          <a:p>
+            <a:pPr algn="l">
+              <a:lnSpc>
+                <a:spcPct val="110000"/>
+              </a:lnSpc>
+              <a:spcAft>
+                <a:spcPts val="0"/>
+              </a:spcAft>
+            </a:pPr>
+            <a:r>
+              <a:rPr sz="2100" b="1" i="0">
+                <a:solidFill>
+                  <a:srgbClr val="065A82"/>
+                </a:solidFill>
+                <a:latin typeface="Calibri"/>
+              </a:rPr>
+              <a:t>V2 — PASS, 0.077%</a:t>
+            </a:r>
+          </a:p>
+        </p:txBody>
+      </p:sp>
+      <p:sp>
+        <p:nvSpPr>
+          <p:cNvPr id="11" name="TextBox 10"/>
+          <p:cNvSpPr txBox="1"/>
+          <p:nvPr/>
+        </p:nvSpPr>
+        <p:spPr>
+          <a:xfrm>
+            <a:off x="4572000" y="2258568"/>
+            <a:ext cx="3017520" cy="1097280"/>
+          </a:xfrm>
+          <a:prstGeom prst="rect">
+            <a:avLst/>
+          </a:prstGeom>
+          <a:noFill/>
+        </p:spPr>
+        <p:txBody>
+          <a:bodyPr wrap="square" lIns="0" rIns="0" tIns="0" bIns="0">
+            <a:spAutoFit/>
+          </a:bodyPr>
+          <a:lstStyle/>
+          <a:p>
+            <a:pPr algn="l">
+              <a:lnSpc>
+                <a:spcPct val="108000"/>
+              </a:lnSpc>
+              <a:spcAft>
+                <a:spcPts val="0"/>
+              </a:spcAft>
+            </a:pPr>
+            <a:r>
+              <a:rPr sz="2000" b="0" i="0">
+                <a:solidFill>
+                  <a:srgbClr val="1B2A33"/>
+                </a:solidFill>
+                <a:latin typeface="Calibri"/>
+              </a:rPr>
+              <a:t>b_x max; b_y 0.041%; metric alone 0.012%; swapped 87%.</a:t>
+            </a:r>
+          </a:p>
+        </p:txBody>
+      </p:sp>
+      <p:sp>
+        <p:nvSpPr>
+          <p:cNvPr id="12" name="Rounded Rectangle 11"/>
+          <p:cNvSpPr/>
+          <p:nvPr/>
+        </p:nvSpPr>
+        <p:spPr>
+          <a:xfrm>
+            <a:off x="8001000" y="1737360"/>
+            <a:ext cx="3383280" cy="1691640"/>
+          </a:xfrm>
+          <a:prstGeom prst="roundRect">
+            <a:avLst>
+              <a:gd name="adj" fmla="val 7000"/>
+            </a:avLst>
+          </a:prstGeom>
+          <a:solidFill>
+            <a:srgbClr val="E7EFF3"/>
+          </a:solidFill>
+          <a:ln>
+            <a:noFill/>
+          </a:ln>
+          <a:effectLst/>
+        </p:spPr>
+        <p:style>
+          <a:lnRef idx="1">
+            <a:schemeClr val="accent1"/>
+          </a:lnRef>
+          <a:fillRef idx="3">
+            <a:schemeClr val="accent1"/>
+          </a:fillRef>
+          <a:effectRef idx="2">
+            <a:schemeClr val="accent1"/>
+          </a:effectRef>
+          <a:fontRef idx="minor">
+            <a:schemeClr val="lt1"/>
+          </a:fontRef>
+        </p:style>
+        <p:txBody>
+          <a:bodyPr rtlCol="0" anchor="ctr"/>
+          <a:lstStyle/>
+          <a:p>
+            <a:pPr algn="ctr"/>
+          </a:p>
+        </p:txBody>
+      </p:sp>
+      <p:sp>
+        <p:nvSpPr>
+          <p:cNvPr id="13" name="TextBox 12"/>
+          <p:cNvSpPr txBox="1"/>
+          <p:nvPr/>
+        </p:nvSpPr>
+        <p:spPr>
+          <a:xfrm>
+            <a:off x="8183879" y="1847088"/>
+            <a:ext cx="3017520" cy="365760"/>
+          </a:xfrm>
+          <a:prstGeom prst="rect">
+            <a:avLst/>
+          </a:prstGeom>
+          <a:noFill/>
+        </p:spPr>
+        <p:txBody>
+          <a:bodyPr wrap="square" lIns="0" rIns="0" tIns="0" bIns="0">
+            <a:spAutoFit/>
+          </a:bodyPr>
+          <a:lstStyle/>
+          <a:p>
+            <a:pPr algn="l">
+              <a:lnSpc>
+                <a:spcPct val="110000"/>
+              </a:lnSpc>
+              <a:spcAft>
+                <a:spcPts val="0"/>
+              </a:spcAft>
+            </a:pPr>
+            <a:r>
+              <a:rPr sz="2100" b="1" i="0">
+                <a:solidFill>
+                  <a:srgbClr val="065A82"/>
+                </a:solidFill>
+                <a:latin typeface="Calibri"/>
+              </a:rPr>
+              <a:t>V4 — 0.28 to 1.0%</a:t>
+            </a:r>
+          </a:p>
+        </p:txBody>
+      </p:sp>
+      <p:sp>
+        <p:nvSpPr>
+          <p:cNvPr id="14" name="TextBox 13"/>
+          <p:cNvSpPr txBox="1"/>
+          <p:nvPr/>
+        </p:nvSpPr>
+        <p:spPr>
+          <a:xfrm>
+            <a:off x="8183879" y="2258568"/>
+            <a:ext cx="3017520" cy="1097280"/>
+          </a:xfrm>
+          <a:prstGeom prst="rect">
+            <a:avLst/>
+          </a:prstGeom>
+          <a:noFill/>
+        </p:spPr>
+        <p:txBody>
+          <a:bodyPr wrap="square" lIns="0" rIns="0" tIns="0" bIns="0">
+            <a:spAutoFit/>
+          </a:bodyPr>
+          <a:lstStyle/>
+          <a:p>
+            <a:pPr algn="l">
+              <a:lnSpc>
+                <a:spcPct val="108000"/>
+              </a:lnSpc>
+              <a:spcAft>
+                <a:spcPts val="0"/>
+              </a:spcAft>
+            </a:pPr>
+            <a:r>
+              <a:rPr sz="2000" b="0" i="0">
+                <a:solidFill>
+                  <a:srgbClr val="1B2A33"/>
+                </a:solidFill>
+                <a:latin typeface="Calibri"/>
+              </a:rPr>
+              <a:t>of G per hour, order 3, 1.5- to 1-cell front. Order 5: 0.06%.</a:t>
             </a:r>
           </a:p>
         </p:txBody>
       </p:sp>
       <p:pic>
         <p:nvPicPr>
-          <p:cNvPr id="6" name="Picture 5" descr="m1_crop_V3b_c.png"/>
+          <p:cNvPr id="15" name="Picture 14" descr="m1_crop_V1a.png"/>
           <p:cNvPicPr>
             <a:picLocks noChangeAspect="1"/>
           </p:cNvPicPr>
@@ -11123,59 +13836,17 @@
         </p:blipFill>
         <p:spPr>
           <a:xfrm>
-            <a:off x="777240" y="1737360"/>
-            <a:ext cx="3931920" cy="4002133"/>
+            <a:off x="777240" y="3657600"/>
+            <a:ext cx="4140798" cy="2834640"/>
           </a:xfrm>
           <a:prstGeom prst="rect">
             <a:avLst/>
           </a:prstGeom>
         </p:spPr>
       </p:pic>
-      <p:sp>
-        <p:nvSpPr>
-          <p:cNvPr id="7" name="TextBox 6"/>
-          <p:cNvSpPr txBox="1"/>
-          <p:nvPr/>
-        </p:nvSpPr>
-        <p:spPr>
-          <a:xfrm>
-            <a:off x="777240" y="5806440"/>
-            <a:ext cx="4114800" cy="731520"/>
-          </a:xfrm>
-          <a:prstGeom prst="rect">
-            <a:avLst/>
-          </a:prstGeom>
-          <a:noFill/>
-        </p:spPr>
-        <p:txBody>
-          <a:bodyPr wrap="square" lIns="0" rIns="0" tIns="0" bIns="0">
-            <a:spAutoFit/>
-          </a:bodyPr>
-          <a:lstStyle/>
-          <a:p>
-            <a:pPr algn="l">
-              <a:lnSpc>
-                <a:spcPct val="110000"/>
-              </a:lnSpc>
-              <a:spcAft>
-                <a:spcPts val="0"/>
-              </a:spcAft>
-            </a:pPr>
-            <a:r>
-              <a:rPr sz="2000" b="0" i="0">
-                <a:solidFill>
-                  <a:srgbClr val="62737F"/>
-                </a:solidFill>
-                <a:latin typeface="Courier New"/>
-              </a:rPr>
-              <a:t>V3b panel (c): OS7MP-like truth, discrete F</a:t>
-            </a:r>
-          </a:p>
-        </p:txBody>
-      </p:sp>
       <p:pic>
         <p:nvPicPr>
-          <p:cNvPr id="8" name="Picture 7" descr="m1_fig_v3b.png"/>
+          <p:cNvPr id="16" name="Picture 15" descr="m1_fig_gates.png"/>
           <p:cNvPicPr>
             <a:picLocks noChangeAspect="1"/>
           </p:cNvPicPr>
@@ -11189,56 +13860,14 @@
         </p:blipFill>
         <p:spPr>
           <a:xfrm>
-            <a:off x="5120640" y="1737360"/>
-            <a:ext cx="6309360" cy="4198456"/>
+            <a:off x="6035040" y="3611880"/>
+            <a:ext cx="5199808" cy="2880360"/>
           </a:xfrm>
           <a:prstGeom prst="rect">
             <a:avLst/>
           </a:prstGeom>
         </p:spPr>
       </p:pic>
-      <p:sp>
-        <p:nvSpPr>
-          <p:cNvPr id="9" name="TextBox 8"/>
-          <p:cNvSpPr txBox="1"/>
-          <p:nvPr/>
-        </p:nvSpPr>
-        <p:spPr>
-          <a:xfrm>
-            <a:off x="5120640" y="5943600"/>
-            <a:ext cx="6309360" cy="731520"/>
-          </a:xfrm>
-          <a:prstGeom prst="rect">
-            <a:avLst/>
-          </a:prstGeom>
-          <a:noFill/>
-        </p:spPr>
-        <p:txBody>
-          <a:bodyPr wrap="square" lIns="0" rIns="0" tIns="0" bIns="0">
-            <a:spAutoFit/>
-          </a:bodyPr>
-          <a:lstStyle/>
-          <a:p>
-            <a:pPr algn="l">
-              <a:lnSpc>
-                <a:spcPct val="108000"/>
-              </a:lnSpc>
-              <a:spcAft>
-                <a:spcPts val="0"/>
-              </a:spcAft>
-            </a:pPr>
-            <a:r>
-              <a:rPr sz="2000" b="0" i="0">
-                <a:solidFill>
-                  <a:srgbClr val="62737F"/>
-                </a:solidFill>
-                <a:latin typeface="Calibri"/>
-              </a:rPr>
-              <a:t>fvadvect.py: flux-form C-grid advection with MITgcm face transports; centred, DST3, OS7 and OS7MP-like.</a:t>
-            </a:r>
-          </a:p>
-        </p:txBody>
-      </p:sp>
     </p:spTree>
   </p:cSld>
   <p:clrMapOvr>
